--- a/folien/02-adressierung-subnetting-parallelkurs.pptx
+++ b/folien/02-adressierung-subnetting-parallelkurs.pptx
@@ -12883,8 +12883,8 @@
         </p:blipFill>
         <p:spPr>
           <a:xfrm>
-            <a:off x="566928" y="1572768"/>
-            <a:ext cx="8010144" cy="2286000"/>
+            <a:off x="566928" y="1554480"/>
+            <a:ext cx="8010144" cy="2359152"/>
           </a:xfrm>
           <a:prstGeom prst="rect">
             <a:avLst/>
@@ -13197,8 +13197,8 @@
         </p:blipFill>
         <p:spPr>
           <a:xfrm>
-            <a:off x="566928" y="1554480"/>
-            <a:ext cx="8010144" cy="2148840"/>
+            <a:off x="566928" y="1536192"/>
+            <a:ext cx="8010144" cy="2286000"/>
           </a:xfrm>
           <a:prstGeom prst="rect">
             <a:avLst/>
@@ -13258,7 +13258,7 @@
                 <a:ea typeface="Arial" pitchFamily="34" charset="-122"/>
                 <a:cs typeface="Arial" pitchFamily="34" charset="-120"/>
               </a:rPr>
-              <a:t>Die Maske zieht die Grenze: Alles unter den Einsen ist Netz, der Rest gehört dem Gerät.</a:t>
+              <a:t>Vorn das Netz, hinten die Nummer des einzelnen Geräts – egal ob Laptop, Drucker oder Server.</a:t>
             </a:r>
             <a:endParaRPr lang="en-US" sz="1200" dirty="0"/>
           </a:p>

--- a/folien/02-adressierung-subnetting-parallelkurs.pptx
+++ b/folien/02-adressierung-subnetting-parallelkurs.pptx
@@ -14942,8 +14942,8 @@
         </p:blipFill>
         <p:spPr>
           <a:xfrm>
-            <a:off x="566928" y="1600200"/>
-            <a:ext cx="8010144" cy="1600200"/>
+            <a:off x="566928" y="1691640"/>
+            <a:ext cx="8010144" cy="1956816"/>
           </a:xfrm>
           <a:prstGeom prst="rect">
             <a:avLst/>
@@ -14958,28 +14958,8 @@
         </p:nvSpPr>
         <p:spPr>
           <a:xfrm>
-            <a:off x="566928" y="3383280"/>
-            <a:ext cx="8010144" cy="914400"/>
-          </a:xfrm>
-          <a:prstGeom prst="rect">
-            <a:avLst/>
-          </a:prstGeom>
-          <a:solidFill>
-            <a:srgbClr val="EEF0FB"/>
-          </a:solidFill>
-          <a:ln/>
-        </p:spPr>
-      </p:sp>
-      <p:sp>
-        <p:nvSpPr>
-          <p:cNvPr id="7" name="Shape 4"/>
-          <p:cNvSpPr/>
-          <p:nvPr/>
-        </p:nvSpPr>
-        <p:spPr>
-          <a:xfrm>
-            <a:off x="566928" y="3383280"/>
-            <a:ext cx="41148" cy="914400"/>
+            <a:off x="566928" y="4069080"/>
+            <a:ext cx="32004" cy="256032"/>
           </a:xfrm>
           <a:prstGeom prst="rect">
             <a:avLst/>
@@ -14992,72 +14972,30 @@
       </p:sp>
       <p:sp>
         <p:nvSpPr>
-          <p:cNvPr id="8" name="Text 5"/>
-          <p:cNvSpPr/>
-          <p:nvPr/>
-        </p:nvSpPr>
-        <p:spPr>
-          <a:xfrm>
-            <a:off x="804672" y="3529584"/>
-            <a:ext cx="7607808" cy="242062"/>
-          </a:xfrm>
-          <a:prstGeom prst="rect">
-            <a:avLst/>
-          </a:prstGeom>
-          <a:noFill/>
-          <a:ln/>
-        </p:spPr>
-        <p:txBody>
-          <a:bodyPr wrap="square" lIns="0" tIns="0" rIns="0" bIns="0" rtlCol="0" anchor="t"/>
-          <a:lstStyle/>
-          <a:p>
-            <a:pPr indent="0" marL="0">
-              <a:buNone/>
-            </a:pPr>
-            <a:r>
-              <a:rPr lang="en-US" sz="1300" b="1" dirty="0">
-                <a:solidFill>
-                  <a:srgbClr val="272E52"/>
-                </a:solidFill>
-                <a:latin typeface="Arial" pitchFamily="34" charset="0"/>
-                <a:ea typeface="Arial" pitchFamily="34" charset="-122"/>
-                <a:cs typeface="Arial" pitchFamily="34" charset="-120"/>
-              </a:rPr>
-              <a:t>Und das Gateway?</a:t>
-            </a:r>
-            <a:endParaRPr lang="en-US" sz="1300" dirty="0"/>
-          </a:p>
-        </p:txBody>
-      </p:sp>
-      <p:sp>
-        <p:nvSpPr>
-          <p:cNvPr id="9" name="Text 6"/>
-          <p:cNvSpPr/>
-          <p:nvPr/>
-        </p:nvSpPr>
-        <p:spPr>
-          <a:xfrm>
-            <a:off x="804672" y="3817366"/>
-            <a:ext cx="7607808" cy="361442"/>
-          </a:xfrm>
-          <a:prstGeom prst="rect">
-            <a:avLst/>
-          </a:prstGeom>
-          <a:noFill/>
-          <a:ln/>
-        </p:spPr>
-        <p:txBody>
-          <a:bodyPr wrap="square" lIns="0" tIns="0" rIns="0" bIns="0" rtlCol="0" anchor="t"/>
-          <a:lstStyle/>
-          <a:p>
-            <a:pPr indent="0" marL="0">
-              <a:lnSpc>
-                <a:spcPct val="92000"/>
-              </a:lnSpc>
-              <a:buNone/>
-            </a:pPr>
-            <a:r>
-              <a:rPr lang="en-US" sz="1150" dirty="0">
+          <p:cNvPr id="7" name="Text 4"/>
+          <p:cNvSpPr/>
+          <p:nvPr/>
+        </p:nvSpPr>
+        <p:spPr>
+          <a:xfrm>
+            <a:off x="749808" y="4023360"/>
+            <a:ext cx="7827264" cy="402336"/>
+          </a:xfrm>
+          <a:prstGeom prst="rect">
+            <a:avLst/>
+          </a:prstGeom>
+          <a:noFill/>
+          <a:ln/>
+        </p:spPr>
+        <p:txBody>
+          <a:bodyPr wrap="square" lIns="0" tIns="0" rIns="0" bIns="0" rtlCol="0" anchor="ctr"/>
+          <a:lstStyle/>
+          <a:p>
+            <a:pPr indent="0" marL="0">
+              <a:buNone/>
+            </a:pPr>
+            <a:r>
+              <a:rPr lang="en-US" sz="1200" b="1" dirty="0">
                 <a:solidFill>
                   <a:srgbClr val="434A63"/>
                 </a:solidFill>
@@ -15065,15 +15003,15 @@
                 <a:ea typeface="Arial" pitchFamily="34" charset="-122"/>
                 <a:cs typeface="Arial" pitchFamily="34" charset="-120"/>
               </a:rPr>
-              <a:t>Der Router braucht auch eine Adresse aus dem Block – meist die erste nutzbare. Wer Geräte zählt, plant ihn mit ein: 62 nutzbare heißt 61 für eure Geräte plus das Gateway.</a:t>
-            </a:r>
-            <a:endParaRPr lang="en-US" sz="1150" dirty="0"/>
-          </a:p>
-        </p:txBody>
-      </p:sp>
-      <p:sp>
-        <p:nvSpPr>
-          <p:cNvPr id="10" name="Shape 7"/>
+              <a:t>Wer 64 sagt, hat die zwei Reservierten vergessen – und wer Geräte plant, rechnet das Gateway mit ein: 61 bleiben frei.</a:t>
+            </a:r>
+            <a:endParaRPr lang="en-US" sz="1200" dirty="0"/>
+          </a:p>
+        </p:txBody>
+      </p:sp>
+      <p:sp>
+        <p:nvSpPr>
+          <p:cNvPr id="8" name="Shape 5"/>
           <p:cNvSpPr/>
           <p:nvPr/>
         </p:nvSpPr>
@@ -15096,7 +15034,7 @@
       </p:sp>
       <p:sp>
         <p:nvSpPr>
-          <p:cNvPr id="11" name="Text 8"/>
+          <p:cNvPr id="9" name="Text 6"/>
           <p:cNvSpPr/>
           <p:nvPr/>
         </p:nvSpPr>
@@ -15135,7 +15073,7 @@
       </p:sp>
       <p:sp>
         <p:nvSpPr>
-          <p:cNvPr id="12" name="Text 9"/>
+          <p:cNvPr id="10" name="Text 7"/>
           <p:cNvSpPr/>
           <p:nvPr/>
         </p:nvSpPr>

--- a/folien/02-adressierung-subnetting-parallelkurs.pptx
+++ b/folien/02-adressierung-subnetting-parallelkurs.pptx
@@ -32,9 +32,10 @@
     <p:sldId id="280" r:id="rId26"/>
     <p:sldId id="281" r:id="rId27"/>
     <p:sldId id="282" r:id="rId28"/>
+    <p:sldId id="283" r:id="rId29"/>
   </p:sldIdLst>
   <p:notesMasterIdLst>
-    <p:notesMasterId r:id="rId29"/>
+    <p:notesMasterId r:id="rId30"/>
   </p:notesMasterIdLst>
   <p:sldSz cx="9144000" cy="5143500"/>
   <p:notesSz cx="5143500" cy="9144000"/>
@@ -2224,6 +2225,94 @@
             <a:fld id="{F7021451-1387-4CA6-816F-3879F97B5CBC}" type="slidenum">
               <a:rPr lang="en-US"/>
               <a:t>27</a:t>
+            </a:fld>
+            <a:endParaRPr lang="en-US"/>
+          </a:p>
+        </p:txBody>
+      </p:sp>
+    </p:spTree>
+    <p:extLst>
+      <p:ext uri="{BB962C8B-B14F-4D97-AF65-F5344CB8AC3E}">
+        <p14:creationId xmlns:p14="http://schemas.microsoft.com/office/powerpoint/2010/main" val="1024086991"/>
+      </p:ext>
+    </p:extLst>
+  </p:cSld>
+  <p:clrMapOvr>
+    <a:masterClrMapping/>
+  </p:clrMapOvr>
+</p:notes>
+</file>
+
+<file path=ppt/notesSlides/notesSlide28.xml><?xml version="1.0" encoding="utf-8"?>
+<p:notes xmlns:a="http://schemas.openxmlformats.org/drawingml/2006/main" xmlns:r="http://schemas.openxmlformats.org/officeDocument/2006/relationships" xmlns:p="http://schemas.openxmlformats.org/presentationml/2006/main">
+  <p:cSld>
+    <p:spTree>
+      <p:nvGrpSpPr>
+        <p:cNvPr id="1" name=""/>
+        <p:cNvGrpSpPr/>
+        <p:nvPr/>
+      </p:nvGrpSpPr>
+      <p:grpSpPr>
+        <a:xfrm>
+          <a:off x="0" y="0"/>
+          <a:ext cx="0" cy="0"/>
+          <a:chOff x="0" y="0"/>
+          <a:chExt cx="0" cy="0"/>
+        </a:xfrm>
+      </p:grpSpPr>
+      <p:sp>
+        <p:nvSpPr>
+          <p:cNvPr id="2" name="Slide Image Placeholder 1"/>
+          <p:cNvSpPr>
+            <a:spLocks noGrp="1" noRot="1" noChangeAspect="1"/>
+          </p:cNvSpPr>
+          <p:nvPr>
+            <p:ph type="sldImg"/>
+          </p:nvPr>
+        </p:nvSpPr>
+        <p:spPr/>
+      </p:sp>
+      <p:sp>
+        <p:nvSpPr>
+          <p:cNvPr id="3" name="Notes Placeholder 2"/>
+          <p:cNvSpPr>
+            <a:spLocks noGrp="1"/>
+          </p:cNvSpPr>
+          <p:nvPr>
+            <p:ph type="body" idx="1"/>
+          </p:nvPr>
+        </p:nvSpPr>
+        <p:spPr/>
+        <p:txBody>
+          <a:bodyPr/>
+          <a:lstStyle/>
+          <a:p>
+            <a:r>
+              <a:rPr lang="en-US" dirty="0"/>
+              <a:t/>
+            </a:r>
+            <a:endParaRPr lang="en-US" dirty="0"/>
+          </a:p>
+        </p:txBody>
+      </p:sp>
+      <p:sp>
+        <p:nvSpPr>
+          <p:cNvPr id="4" name="Slide Number Placeholder 3"/>
+          <p:cNvSpPr>
+            <a:spLocks noGrp="1"/>
+          </p:cNvSpPr>
+          <p:nvPr>
+            <p:ph type="sldNum" sz="quarter" idx="10"/>
+          </p:nvPr>
+        </p:nvSpPr>
+        <p:spPr/>
+        <p:txBody>
+          <a:bodyPr/>
+          <a:lstStyle/>
+          <a:p>
+            <a:fld id="{F7021451-1387-4CA6-816F-3879F97B5CBC}" type="slidenum">
+              <a:rPr lang="en-US"/>
+              <a:t>28</a:t>
             </a:fld>
             <a:endParaRPr lang="en-US"/>
           </a:p>
@@ -3720,7 +3809,7 @@
                 <a:ea typeface="Arial" pitchFamily="34" charset="-122"/>
                 <a:cs typeface="Arial" pitchFamily="34" charset="-120"/>
               </a:rPr>
-              <a:t>7/20</a:t>
+              <a:t>7/21</a:t>
             </a:r>
             <a:endParaRPr lang="en-US" sz="1050" dirty="0"/>
           </a:p>
@@ -3999,7 +4088,7 @@
                 <a:ea typeface="Arial" pitchFamily="34" charset="-122"/>
                 <a:cs typeface="Arial" pitchFamily="34" charset="-120"/>
               </a:rPr>
-              <a:t>8/20</a:t>
+              <a:t>8/21</a:t>
             </a:r>
             <a:endParaRPr lang="en-US" sz="1050" dirty="0"/>
           </a:p>
@@ -4313,7 +4402,7 @@
                 <a:ea typeface="Arial" pitchFamily="34" charset="-122"/>
                 <a:cs typeface="Arial" pitchFamily="34" charset="-120"/>
               </a:rPr>
-              <a:t>9/20</a:t>
+              <a:t>9/21</a:t>
             </a:r>
             <a:endParaRPr lang="en-US" sz="1050" dirty="0"/>
           </a:p>
@@ -4627,7 +4716,7 @@
                 <a:ea typeface="Arial" pitchFamily="34" charset="-122"/>
                 <a:cs typeface="Arial" pitchFamily="34" charset="-120"/>
               </a:rPr>
-              <a:t>10/20</a:t>
+              <a:t>10/21</a:t>
             </a:r>
             <a:endParaRPr lang="en-US" sz="1050" dirty="0"/>
           </a:p>
@@ -4941,7 +5030,7 @@
                 <a:ea typeface="Arial" pitchFamily="34" charset="-122"/>
                 <a:cs typeface="Arial" pitchFamily="34" charset="-120"/>
               </a:rPr>
-              <a:t>11/20</a:t>
+              <a:t>11/21</a:t>
             </a:r>
             <a:endParaRPr lang="en-US" sz="1050" dirty="0"/>
           </a:p>
@@ -5255,7 +5344,7 @@
                 <a:ea typeface="Arial" pitchFamily="34" charset="-122"/>
                 <a:cs typeface="Arial" pitchFamily="34" charset="-120"/>
               </a:rPr>
-              <a:t>12/20</a:t>
+              <a:t>12/21</a:t>
             </a:r>
             <a:endParaRPr lang="en-US" sz="1050" dirty="0"/>
           </a:p>
@@ -5778,7 +5867,7 @@
                 <a:ea typeface="Arial" pitchFamily="34" charset="-122"/>
                 <a:cs typeface="Arial" pitchFamily="34" charset="-120"/>
               </a:rPr>
-              <a:t>13/20</a:t>
+              <a:t>13/21</a:t>
             </a:r>
             <a:endParaRPr lang="en-US" sz="1050" dirty="0"/>
           </a:p>
@@ -5908,7 +5997,7 @@
                 <a:ea typeface="Arial" pitchFamily="34" charset="-122"/>
                 <a:cs typeface="Arial" pitchFamily="34" charset="-120"/>
               </a:rPr>
-              <a:t>IPv6 in fünf Minuten</a:t>
+              <a:t>Warum IPv6?</a:t>
             </a:r>
             <a:endParaRPr lang="en-US" sz="2600" dirty="0"/>
           </a:p>
@@ -5916,7 +6005,7 @@
       </p:sp>
       <p:pic>
         <p:nvPicPr>
-          <p:cNvPr id="5" name="Image 0" descr="/Users/jacobmenge/Desktop/kurs-26.2b-orga/folienwerkstatt/assets/diagramme/ipv6-aufbau-neutral.png">    </p:cNvPr>
+          <p:cNvPr id="5" name="Image 0" descr="/Users/jacobmenge/Desktop/kurs-26.2b-orga/folienwerkstatt/assets/diagramme/ipv6-warum.png">    </p:cNvPr>
           <p:cNvPicPr>
             <a:picLocks noChangeAspect="1"/>
           </p:cNvPicPr>
@@ -6396,7 +6485,7 @@
                 <a:ea typeface="Arial" pitchFamily="34" charset="-122"/>
                 <a:cs typeface="Arial" pitchFamily="34" charset="-120"/>
               </a:rPr>
-              <a:t>14/20</a:t>
+              <a:t>14/21</a:t>
             </a:r>
             <a:endParaRPr lang="en-US" sz="1050" dirty="0"/>
           </a:p>
@@ -6442,162 +6531,228 @@
         </p:nvSpPr>
         <p:spPr>
           <a:xfrm>
-            <a:off x="6355080" y="0"/>
-            <a:ext cx="2788920" cy="5143500"/>
+            <a:off x="566928" y="201168"/>
+            <a:ext cx="475488" cy="50292"/>
           </a:xfrm>
           <a:prstGeom prst="rect">
             <a:avLst/>
           </a:prstGeom>
           <a:solidFill>
-            <a:srgbClr val="FBF2E3"/>
+            <a:srgbClr val="3843AF"/>
           </a:solidFill>
           <a:ln/>
         </p:spPr>
       </p:sp>
       <p:sp>
         <p:nvSpPr>
-          <p:cNvPr id="3" name="Shape 1"/>
-          <p:cNvSpPr/>
-          <p:nvPr/>
-        </p:nvSpPr>
-        <p:spPr>
-          <a:xfrm>
-            <a:off x="6355080" y="0"/>
-            <a:ext cx="45720" cy="5143500"/>
+          <p:cNvPr id="3" name="Text 1"/>
+          <p:cNvSpPr/>
+          <p:nvPr/>
+        </p:nvSpPr>
+        <p:spPr>
+          <a:xfrm>
+            <a:off x="566928" y="384048"/>
+            <a:ext cx="8010144" cy="237744"/>
+          </a:xfrm>
+          <a:prstGeom prst="rect">
+            <a:avLst/>
+          </a:prstGeom>
+          <a:noFill/>
+          <a:ln/>
+        </p:spPr>
+        <p:txBody>
+          <a:bodyPr wrap="square" lIns="0" tIns="0" rIns="0" bIns="0" rtlCol="0" anchor="ctr"/>
+          <a:lstStyle/>
+          <a:p>
+            <a:pPr indent="0" marL="0">
+              <a:buNone/>
+            </a:pPr>
+            <a:r>
+              <a:rPr lang="en-US" sz="1150" b="1" spc="180" kern="0" dirty="0">
+                <a:solidFill>
+                  <a:srgbClr val="3843AF"/>
+                </a:solidFill>
+                <a:latin typeface="Arial" pitchFamily="34" charset="0"/>
+                <a:ea typeface="Arial" pitchFamily="34" charset="-122"/>
+                <a:cs typeface="Arial" pitchFamily="34" charset="-120"/>
+              </a:rPr>
+              <a:t>HEXADEZIMAL, KURZ ERKLÄRT</a:t>
+            </a:r>
+            <a:endParaRPr lang="en-US" sz="1150" dirty="0"/>
+          </a:p>
+        </p:txBody>
+      </p:sp>
+      <p:sp>
+        <p:nvSpPr>
+          <p:cNvPr id="4" name="Text 2"/>
+          <p:cNvSpPr/>
+          <p:nvPr/>
+        </p:nvSpPr>
+        <p:spPr>
+          <a:xfrm>
+            <a:off x="566928" y="731520"/>
+            <a:ext cx="8010144" cy="603504"/>
+          </a:xfrm>
+          <a:prstGeom prst="rect">
+            <a:avLst/>
+          </a:prstGeom>
+          <a:noFill/>
+          <a:ln/>
+        </p:spPr>
+        <p:txBody>
+          <a:bodyPr wrap="square" lIns="0" tIns="0" rIns="0" bIns="0" rtlCol="0" anchor="t"/>
+          <a:lstStyle/>
+          <a:p>
+            <a:pPr indent="0" marL="0">
+              <a:buNone/>
+            </a:pPr>
+            <a:r>
+              <a:rPr lang="en-US" sz="2600" b="1" dirty="0">
+                <a:solidFill>
+                  <a:srgbClr val="272E52"/>
+                </a:solidFill>
+                <a:latin typeface="Arial" pitchFamily="34" charset="0"/>
+                <a:ea typeface="Arial" pitchFamily="34" charset="-122"/>
+                <a:cs typeface="Arial" pitchFamily="34" charset="-120"/>
+              </a:rPr>
+              <a:t>IPv6 lesen können</a:t>
+            </a:r>
+            <a:endParaRPr lang="en-US" sz="2600" dirty="0"/>
+          </a:p>
+        </p:txBody>
+      </p:sp>
+      <p:pic>
+        <p:nvPicPr>
+          <p:cNvPr id="5" name="Image 0" descr="/Users/jacobmenge/Desktop/kurs-26.2b-orga/folienwerkstatt/assets/diagramme/ipv6-aufbau-neutral.png">    </p:cNvPr>
+          <p:cNvPicPr>
+            <a:picLocks noChangeAspect="1"/>
+          </p:cNvPicPr>
+          <p:nvPr/>
+        </p:nvPicPr>
+        <p:blipFill>
+          <a:blip r:embed="rId1"/>
+          <a:stretch>
+            <a:fillRect/>
+          </a:stretch>
+        </p:blipFill>
+        <p:spPr>
+          <a:xfrm>
+            <a:off x="566928" y="1517904"/>
+            <a:ext cx="8010144" cy="2340864"/>
+          </a:xfrm>
+          <a:prstGeom prst="rect">
+            <a:avLst/>
+          </a:prstGeom>
+        </p:spPr>
+      </p:pic>
+      <p:sp>
+        <p:nvSpPr>
+          <p:cNvPr id="6" name="Shape 3"/>
+          <p:cNvSpPr/>
+          <p:nvPr/>
+        </p:nvSpPr>
+        <p:spPr>
+          <a:xfrm>
+            <a:off x="566928" y="4114800"/>
+            <a:ext cx="32004" cy="256032"/>
           </a:xfrm>
           <a:prstGeom prst="rect">
             <a:avLst/>
           </a:prstGeom>
           <a:solidFill>
-            <a:srgbClr val="9A6310"/>
+            <a:srgbClr val="3843AF"/>
           </a:solidFill>
           <a:ln/>
         </p:spPr>
       </p:sp>
       <p:sp>
         <p:nvSpPr>
-          <p:cNvPr id="4" name="Text 2"/>
-          <p:cNvSpPr/>
-          <p:nvPr/>
-        </p:nvSpPr>
-        <p:spPr>
-          <a:xfrm>
-            <a:off x="6629400" y="1463040"/>
-            <a:ext cx="2194560" cy="1737360"/>
-          </a:xfrm>
-          <a:prstGeom prst="rect">
-            <a:avLst/>
-          </a:prstGeom>
-          <a:noFill/>
-          <a:ln/>
-        </p:spPr>
-        <p:txBody>
-          <a:bodyPr wrap="square" lIns="0" tIns="0" rIns="0" bIns="0" rtlCol="0" anchor="ctr"/>
-          <a:lstStyle/>
-          <a:p>
-            <a:pPr algn="ctr" indent="0" marL="0">
-              <a:buNone/>
-            </a:pPr>
-            <a:r>
-              <a:rPr lang="en-US" sz="8400" b="1" dirty="0">
-                <a:solidFill>
-                  <a:srgbClr val="9A6310"/>
-                </a:solidFill>
-                <a:latin typeface="Arial" pitchFamily="34" charset="0"/>
-                <a:ea typeface="Arial" pitchFamily="34" charset="-122"/>
-                <a:cs typeface="Arial" pitchFamily="34" charset="-120"/>
-              </a:rPr>
-              <a:t>04</a:t>
-            </a:r>
-            <a:endParaRPr lang="en-US" sz="8400" dirty="0"/>
-          </a:p>
-        </p:txBody>
-      </p:sp>
-      <p:sp>
-        <p:nvSpPr>
-          <p:cNvPr id="5" name="Shape 3"/>
-          <p:cNvSpPr/>
-          <p:nvPr/>
-        </p:nvSpPr>
-        <p:spPr>
-          <a:xfrm>
-            <a:off x="566928" y="1883664"/>
-            <a:ext cx="475488" cy="50292"/>
-          </a:xfrm>
-          <a:prstGeom prst="rect">
-            <a:avLst/>
-          </a:prstGeom>
-          <a:solidFill>
-            <a:srgbClr val="9A6310"/>
-          </a:solidFill>
-          <a:ln/>
-        </p:spPr>
-      </p:sp>
-      <p:sp>
-        <p:nvSpPr>
-          <p:cNvPr id="6" name="Text 4"/>
-          <p:cNvSpPr/>
-          <p:nvPr/>
-        </p:nvSpPr>
-        <p:spPr>
-          <a:xfrm>
-            <a:off x="566928" y="2084832"/>
-            <a:ext cx="5394960" cy="868680"/>
-          </a:xfrm>
-          <a:prstGeom prst="rect">
-            <a:avLst/>
-          </a:prstGeom>
-          <a:noFill/>
-          <a:ln/>
-        </p:spPr>
-        <p:txBody>
-          <a:bodyPr wrap="square" lIns="0" tIns="0" rIns="0" bIns="0" rtlCol="0" anchor="t"/>
-          <a:lstStyle/>
-          <a:p>
-            <a:pPr indent="0" marL="0">
-              <a:buNone/>
-            </a:pPr>
-            <a:r>
-              <a:rPr lang="en-US" sz="3000" b="1" dirty="0">
-                <a:solidFill>
-                  <a:srgbClr val="272E52"/>
-                </a:solidFill>
-                <a:latin typeface="Arial" pitchFamily="34" charset="0"/>
-                <a:ea typeface="Arial" pitchFamily="34" charset="-122"/>
-                <a:cs typeface="Arial" pitchFamily="34" charset="-120"/>
-              </a:rPr>
-              <a:t>Subnetz-Architekten</a:t>
-            </a:r>
-            <a:endParaRPr lang="en-US" sz="3000" dirty="0"/>
-          </a:p>
-        </p:txBody>
-      </p:sp>
-      <p:sp>
-        <p:nvSpPr>
-          <p:cNvPr id="7" name="Text 5"/>
-          <p:cNvSpPr/>
-          <p:nvPr/>
-        </p:nvSpPr>
-        <p:spPr>
-          <a:xfrm>
-            <a:off x="566928" y="3017520"/>
-            <a:ext cx="5394960" cy="548640"/>
-          </a:xfrm>
-          <a:prstGeom prst="rect">
-            <a:avLst/>
-          </a:prstGeom>
-          <a:noFill/>
-          <a:ln/>
-        </p:spPr>
-        <p:txBody>
-          <a:bodyPr wrap="square" lIns="0" tIns="0" rIns="0" bIns="0" rtlCol="0" anchor="t"/>
-          <a:lstStyle/>
-          <a:p>
-            <a:pPr indent="0" marL="0">
-              <a:buNone/>
-            </a:pPr>
-            <a:r>
-              <a:rPr lang="en-US" sz="1350" dirty="0">
+          <p:cNvPr id="7" name="Text 4"/>
+          <p:cNvSpPr/>
+          <p:nvPr/>
+        </p:nvSpPr>
+        <p:spPr>
+          <a:xfrm>
+            <a:off x="749808" y="4069080"/>
+            <a:ext cx="7827264" cy="402336"/>
+          </a:xfrm>
+          <a:prstGeom prst="rect">
+            <a:avLst/>
+          </a:prstGeom>
+          <a:noFill/>
+          <a:ln/>
+        </p:spPr>
+        <p:txBody>
+          <a:bodyPr wrap="square" lIns="0" tIns="0" rIns="0" bIns="0" rtlCol="0" anchor="ctr"/>
+          <a:lstStyle/>
+          <a:p>
+            <a:pPr indent="0" marL="0">
+              <a:buNone/>
+            </a:pPr>
+            <a:r>
+              <a:rPr lang="en-US" sz="1200" b="1" dirty="0">
+                <a:solidFill>
+                  <a:srgbClr val="434A63"/>
+                </a:solidFill>
+                <a:latin typeface="Arial" pitchFamily="34" charset="0"/>
+                <a:ea typeface="Arial" pitchFamily="34" charset="-122"/>
+                <a:cs typeface="Arial" pitchFamily="34" charset="-120"/>
+              </a:rPr>
+              <a:t>Lesen reicht: vorn das Netz, hinten das Gerät – gerechnet wird bei IPv6 nichts mehr.</a:t>
+            </a:r>
+            <a:endParaRPr lang="en-US" sz="1200" dirty="0"/>
+          </a:p>
+        </p:txBody>
+      </p:sp>
+      <p:sp>
+        <p:nvSpPr>
+          <p:cNvPr id="8" name="Shape 5"/>
+          <p:cNvSpPr/>
+          <p:nvPr/>
+        </p:nvSpPr>
+        <p:spPr>
+          <a:xfrm>
+            <a:off x="566928" y="4631436"/>
+            <a:ext cx="8010144" cy="0"/>
+          </a:xfrm>
+          <a:prstGeom prst="line">
+            <a:avLst/>
+          </a:prstGeom>
+          <a:noFill/>
+          <a:ln w="9525">
+            <a:solidFill>
+              <a:srgbClr val="DFE3F0"/>
+            </a:solidFill>
+            <a:prstDash val="solid"/>
+          </a:ln>
+        </p:spPr>
+      </p:sp>
+      <p:sp>
+        <p:nvSpPr>
+          <p:cNvPr id="9" name="Text 6"/>
+          <p:cNvSpPr/>
+          <p:nvPr/>
+        </p:nvSpPr>
+        <p:spPr>
+          <a:xfrm>
+            <a:off x="566928" y="4722876"/>
+            <a:ext cx="5029200" cy="237744"/>
+          </a:xfrm>
+          <a:prstGeom prst="rect">
+            <a:avLst/>
+          </a:prstGeom>
+          <a:noFill/>
+          <a:ln/>
+        </p:spPr>
+        <p:txBody>
+          <a:bodyPr wrap="square" lIns="0" tIns="0" rIns="0" bIns="0" rtlCol="0" anchor="ctr"/>
+          <a:lstStyle/>
+          <a:p>
+            <a:pPr indent="0" marL="0">
+              <a:buNone/>
+            </a:pPr>
+            <a:r>
+              <a:rPr lang="en-US" sz="1050" spc="30" kern="0" dirty="0">
                 <a:solidFill>
                   <a:srgbClr val="5C6377"/>
                 </a:solidFill>
@@ -6605,9 +6760,48 @@
                 <a:ea typeface="Arial" pitchFamily="34" charset="-122"/>
                 <a:cs typeface="Arial" pitchFamily="34" charset="-120"/>
               </a:rPr>
-              <a:t>50 Minuten in Gruppen – ihr plant das Netz der Müller GmbH</a:t>
-            </a:r>
-            <a:endParaRPr lang="en-US" sz="1350" dirty="0"/>
+              <a:t>Privat und v6</a:t>
+            </a:r>
+            <a:endParaRPr lang="en-US" sz="1050" dirty="0"/>
+          </a:p>
+        </p:txBody>
+      </p:sp>
+      <p:sp>
+        <p:nvSpPr>
+          <p:cNvPr id="10" name="Text 7"/>
+          <p:cNvSpPr/>
+          <p:nvPr/>
+        </p:nvSpPr>
+        <p:spPr>
+          <a:xfrm>
+            <a:off x="8028432" y="4722876"/>
+            <a:ext cx="548640" cy="237744"/>
+          </a:xfrm>
+          <a:prstGeom prst="rect">
+            <a:avLst/>
+          </a:prstGeom>
+          <a:noFill/>
+          <a:ln/>
+        </p:spPr>
+        <p:txBody>
+          <a:bodyPr wrap="square" lIns="0" tIns="0" rIns="0" bIns="0" rtlCol="0" anchor="ctr"/>
+          <a:lstStyle/>
+          <a:p>
+            <a:pPr algn="r" indent="0" marL="0">
+              <a:buNone/>
+            </a:pPr>
+            <a:r>
+              <a:rPr lang="en-US" sz="1050" dirty="0">
+                <a:solidFill>
+                  <a:srgbClr val="5C6377"/>
+                </a:solidFill>
+                <a:latin typeface="Arial" pitchFamily="34" charset="0"/>
+                <a:ea typeface="Arial" pitchFamily="34" charset="-122"/>
+                <a:cs typeface="Arial" pitchFamily="34" charset="-120"/>
+              </a:rPr>
+              <a:t>15/21</a:t>
+            </a:r>
+            <a:endParaRPr lang="en-US" sz="1050" dirty="0"/>
           </a:p>
         </p:txBody>
       </p:sp>
@@ -7697,7 +7891,7 @@
                 <a:ea typeface="Arial" pitchFamily="34" charset="-122"/>
                 <a:cs typeface="Arial" pitchFamily="34" charset="-120"/>
               </a:rPr>
-              <a:t>1/20</a:t>
+              <a:t>1/21</a:t>
             </a:r>
             <a:endParaRPr lang="en-US" sz="1050" dirty="0"/>
           </a:p>
@@ -7743,8 +7937,28 @@
         </p:nvSpPr>
         <p:spPr>
           <a:xfrm>
-            <a:off x="566928" y="201168"/>
-            <a:ext cx="475488" cy="50292"/>
+            <a:off x="6355080" y="0"/>
+            <a:ext cx="2788920" cy="5143500"/>
+          </a:xfrm>
+          <a:prstGeom prst="rect">
+            <a:avLst/>
+          </a:prstGeom>
+          <a:solidFill>
+            <a:srgbClr val="FBF2E3"/>
+          </a:solidFill>
+          <a:ln/>
+        </p:spPr>
+      </p:sp>
+      <p:sp>
+        <p:nvSpPr>
+          <p:cNvPr id="3" name="Shape 1"/>
+          <p:cNvSpPr/>
+          <p:nvPr/>
+        </p:nvSpPr>
+        <p:spPr>
+          <a:xfrm>
+            <a:off x="6355080" y="0"/>
+            <a:ext cx="45720" cy="5143500"/>
           </a:xfrm>
           <a:prstGeom prst="rect">
             <a:avLst/>
@@ -7757,30 +7971,30 @@
       </p:sp>
       <p:sp>
         <p:nvSpPr>
-          <p:cNvPr id="3" name="Text 1"/>
-          <p:cNvSpPr/>
-          <p:nvPr/>
-        </p:nvSpPr>
-        <p:spPr>
-          <a:xfrm>
-            <a:off x="566928" y="384048"/>
-            <a:ext cx="8010144" cy="237744"/>
-          </a:xfrm>
-          <a:prstGeom prst="rect">
-            <a:avLst/>
-          </a:prstGeom>
-          <a:noFill/>
-          <a:ln/>
-        </p:spPr>
-        <p:txBody>
-          <a:bodyPr wrap="square" lIns="0" tIns="0" rIns="0" bIns="0" rtlCol="0" anchor="ctr"/>
-          <a:lstStyle/>
-          <a:p>
-            <a:pPr indent="0" marL="0">
-              <a:buNone/>
-            </a:pPr>
-            <a:r>
-              <a:rPr lang="en-US" sz="1150" b="1" spc="180" kern="0" dirty="0">
+          <p:cNvPr id="4" name="Text 2"/>
+          <p:cNvSpPr/>
+          <p:nvPr/>
+        </p:nvSpPr>
+        <p:spPr>
+          <a:xfrm>
+            <a:off x="6629400" y="1463040"/>
+            <a:ext cx="2194560" cy="1737360"/>
+          </a:xfrm>
+          <a:prstGeom prst="rect">
+            <a:avLst/>
+          </a:prstGeom>
+          <a:noFill/>
+          <a:ln/>
+        </p:spPr>
+        <p:txBody>
+          <a:bodyPr wrap="square" lIns="0" tIns="0" rIns="0" bIns="0" rtlCol="0" anchor="ctr"/>
+          <a:lstStyle/>
+          <a:p>
+            <a:pPr algn="ctr" indent="0" marL="0">
+              <a:buNone/>
+            </a:pPr>
+            <a:r>
+              <a:rPr lang="en-US" sz="8400" b="1" dirty="0">
                 <a:solidFill>
                   <a:srgbClr val="9A6310"/>
                 </a:solidFill>
@@ -7788,472 +8002,22 @@
                 <a:ea typeface="Arial" pitchFamily="34" charset="-122"/>
                 <a:cs typeface="Arial" pitchFamily="34" charset="-120"/>
               </a:rPr>
-              <a:t>BREAKOUT · 50 MINUTEN</a:t>
-            </a:r>
-            <a:endParaRPr lang="en-US" sz="1150" dirty="0"/>
-          </a:p>
-        </p:txBody>
-      </p:sp>
-      <p:sp>
-        <p:nvSpPr>
-          <p:cNvPr id="4" name="Text 2"/>
-          <p:cNvSpPr/>
-          <p:nvPr/>
-        </p:nvSpPr>
-        <p:spPr>
-          <a:xfrm>
-            <a:off x="566928" y="731520"/>
-            <a:ext cx="8010144" cy="603504"/>
-          </a:xfrm>
-          <a:prstGeom prst="rect">
-            <a:avLst/>
-          </a:prstGeom>
-          <a:noFill/>
-          <a:ln/>
-        </p:spPr>
-        <p:txBody>
-          <a:bodyPr wrap="square" lIns="0" tIns="0" rIns="0" bIns="0" rtlCol="0" anchor="t"/>
-          <a:lstStyle/>
-          <a:p>
-            <a:pPr indent="0" marL="0">
-              <a:buNone/>
-            </a:pPr>
-            <a:r>
-              <a:rPr lang="en-US" sz="2600" b="1" dirty="0">
-                <a:solidFill>
-                  <a:srgbClr val="272E52"/>
-                </a:solidFill>
-                <a:latin typeface="Arial" pitchFamily="34" charset="0"/>
-                <a:ea typeface="Arial" pitchFamily="34" charset="-122"/>
-                <a:cs typeface="Arial" pitchFamily="34" charset="-120"/>
-              </a:rPr>
-              <a:t>Der Auftrag</a:t>
-            </a:r>
-            <a:endParaRPr lang="en-US" sz="2600" dirty="0"/>
-          </a:p>
-        </p:txBody>
-      </p:sp>
-      <p:sp>
-        <p:nvSpPr>
-          <p:cNvPr id="5" name="Text 3"/>
-          <p:cNvSpPr/>
-          <p:nvPr/>
-        </p:nvSpPr>
-        <p:spPr>
-          <a:xfrm>
-            <a:off x="566928" y="1444752"/>
-            <a:ext cx="8010144" cy="438912"/>
-          </a:xfrm>
-          <a:prstGeom prst="rect">
-            <a:avLst/>
-          </a:prstGeom>
-          <a:noFill/>
-          <a:ln/>
-        </p:spPr>
-        <p:txBody>
-          <a:bodyPr wrap="square" lIns="0" tIns="0" rIns="0" bIns="0" rtlCol="0" anchor="t"/>
-          <a:lstStyle/>
-          <a:p>
-            <a:pPr indent="0" marL="0">
-              <a:buNone/>
-            </a:pPr>
-            <a:r>
-              <a:rPr lang="en-US" sz="1300" dirty="0">
-                <a:solidFill>
-                  <a:srgbClr val="5C6377"/>
-                </a:solidFill>
-                <a:latin typeface="Arial" pitchFamily="34" charset="0"/>
-                <a:ea typeface="Arial" pitchFamily="34" charset="-122"/>
-                <a:cs typeface="Arial" pitchFamily="34" charset="-120"/>
-              </a:rPr>
-              <a:t>Die Müller GmbH zieht um. Ihr bekommt ein /24 und schneidet daraus die Abteilungsnetze – nur mit Stift, Papier und dem Rezept von eben.</a:t>
-            </a:r>
-            <a:endParaRPr lang="en-US" sz="1300" dirty="0"/>
-          </a:p>
-        </p:txBody>
-      </p:sp>
-      <p:sp>
-        <p:nvSpPr>
-          <p:cNvPr id="6" name="Shape 4"/>
-          <p:cNvSpPr/>
-          <p:nvPr/>
-        </p:nvSpPr>
-        <p:spPr>
-          <a:xfrm>
-            <a:off x="438912" y="2011680"/>
-            <a:ext cx="8266176" cy="384048"/>
-          </a:xfrm>
-          <a:prstGeom prst="rect">
-            <a:avLst/>
-          </a:prstGeom>
-          <a:solidFill>
-            <a:srgbClr val="F5F6FC"/>
-          </a:solidFill>
-          <a:ln/>
-        </p:spPr>
-      </p:sp>
-      <p:sp>
-        <p:nvSpPr>
-          <p:cNvPr id="7" name="Text 5"/>
-          <p:cNvSpPr/>
-          <p:nvPr/>
-        </p:nvSpPr>
-        <p:spPr>
-          <a:xfrm>
-            <a:off x="566928" y="2011680"/>
-            <a:ext cx="868680" cy="384048"/>
-          </a:xfrm>
-          <a:prstGeom prst="rect">
-            <a:avLst/>
-          </a:prstGeom>
-          <a:noFill/>
-          <a:ln/>
-        </p:spPr>
-        <p:txBody>
-          <a:bodyPr wrap="square" lIns="0" tIns="0" rIns="0" bIns="0" rtlCol="0" anchor="ctr"/>
-          <a:lstStyle/>
-          <a:p>
-            <a:pPr indent="0" marL="0">
-              <a:buNone/>
-            </a:pPr>
-            <a:r>
-              <a:rPr lang="en-US" sz="1200" b="1" dirty="0">
-                <a:solidFill>
-                  <a:srgbClr val="9A6310"/>
-                </a:solidFill>
-                <a:latin typeface="Courier New" pitchFamily="34" charset="0"/>
-                <a:ea typeface="Courier New" pitchFamily="34" charset="-122"/>
-                <a:cs typeface="Courier New" pitchFamily="34" charset="-120"/>
-              </a:rPr>
-              <a:t>10 min</a:t>
-            </a:r>
-            <a:endParaRPr lang="en-US" sz="1200" dirty="0"/>
-          </a:p>
-        </p:txBody>
-      </p:sp>
-      <p:sp>
-        <p:nvSpPr>
-          <p:cNvPr id="8" name="Text 6"/>
-          <p:cNvSpPr/>
-          <p:nvPr/>
-        </p:nvSpPr>
-        <p:spPr>
-          <a:xfrm>
-            <a:off x="1435608" y="2011680"/>
-            <a:ext cx="7141464" cy="384048"/>
-          </a:xfrm>
-          <a:prstGeom prst="rect">
-            <a:avLst/>
-          </a:prstGeom>
-          <a:noFill/>
-          <a:ln/>
-        </p:spPr>
-        <p:txBody>
-          <a:bodyPr wrap="square" lIns="0" tIns="0" rIns="0" bIns="0" rtlCol="0" anchor="ctr"/>
-          <a:lstStyle/>
-          <a:p>
-            <a:pPr indent="0" marL="0">
-              <a:buNone/>
-            </a:pPr>
-            <a:r>
-              <a:rPr lang="en-US" sz="1200" dirty="0">
-                <a:solidFill>
-                  <a:srgbClr val="434A63"/>
-                </a:solidFill>
-                <a:latin typeface="Arial" pitchFamily="34" charset="0"/>
-                <a:ea typeface="Arial" pitchFamily="34" charset="-122"/>
-                <a:cs typeface="Arial" pitchFamily="34" charset="-120"/>
-              </a:rPr>
-              <a:t>Je Abteilung die Hostbits bestimmen – Formel: 2 hoch n minus 2</a:t>
-            </a:r>
-            <a:endParaRPr lang="en-US" sz="1200" dirty="0"/>
-          </a:p>
-        </p:txBody>
-      </p:sp>
-      <p:sp>
-        <p:nvSpPr>
-          <p:cNvPr id="9" name="Text 7"/>
-          <p:cNvSpPr/>
-          <p:nvPr/>
-        </p:nvSpPr>
-        <p:spPr>
-          <a:xfrm>
-            <a:off x="566928" y="2395728"/>
-            <a:ext cx="868680" cy="384048"/>
-          </a:xfrm>
-          <a:prstGeom prst="rect">
-            <a:avLst/>
-          </a:prstGeom>
-          <a:noFill/>
-          <a:ln/>
-        </p:spPr>
-        <p:txBody>
-          <a:bodyPr wrap="square" lIns="0" tIns="0" rIns="0" bIns="0" rtlCol="0" anchor="ctr"/>
-          <a:lstStyle/>
-          <a:p>
-            <a:pPr indent="0" marL="0">
-              <a:buNone/>
-            </a:pPr>
-            <a:r>
-              <a:rPr lang="en-US" sz="1200" b="1" dirty="0">
-                <a:solidFill>
-                  <a:srgbClr val="9A6310"/>
-                </a:solidFill>
-                <a:latin typeface="Courier New" pitchFamily="34" charset="0"/>
-                <a:ea typeface="Courier New" pitchFamily="34" charset="-122"/>
-                <a:cs typeface="Courier New" pitchFamily="34" charset="-120"/>
-              </a:rPr>
-              <a:t>15 min</a:t>
-            </a:r>
-            <a:endParaRPr lang="en-US" sz="1200" dirty="0"/>
-          </a:p>
-        </p:txBody>
-      </p:sp>
-      <p:sp>
-        <p:nvSpPr>
-          <p:cNvPr id="10" name="Text 8"/>
-          <p:cNvSpPr/>
-          <p:nvPr/>
-        </p:nvSpPr>
-        <p:spPr>
-          <a:xfrm>
-            <a:off x="1435608" y="2395728"/>
-            <a:ext cx="7141464" cy="384048"/>
-          </a:xfrm>
-          <a:prstGeom prst="rect">
-            <a:avLst/>
-          </a:prstGeom>
-          <a:noFill/>
-          <a:ln/>
-        </p:spPr>
-        <p:txBody>
-          <a:bodyPr wrap="square" lIns="0" tIns="0" rIns="0" bIns="0" rtlCol="0" anchor="ctr"/>
-          <a:lstStyle/>
-          <a:p>
-            <a:pPr indent="0" marL="0">
-              <a:buNone/>
-            </a:pPr>
-            <a:r>
-              <a:rPr lang="en-US" sz="1200" dirty="0">
-                <a:solidFill>
-                  <a:srgbClr val="434A63"/>
-                </a:solidFill>
-                <a:latin typeface="Arial" pitchFamily="34" charset="0"/>
-                <a:ea typeface="Arial" pitchFamily="34" charset="-122"/>
-                <a:cs typeface="Arial" pitchFamily="34" charset="-120"/>
-              </a:rPr>
-              <a:t>Größte zuerst: Präfixe wählen, Blöcke lückenlos schneiden</a:t>
-            </a:r>
-            <a:endParaRPr lang="en-US" sz="1200" dirty="0"/>
-          </a:p>
-        </p:txBody>
-      </p:sp>
-      <p:sp>
-        <p:nvSpPr>
-          <p:cNvPr id="11" name="Shape 9"/>
-          <p:cNvSpPr/>
-          <p:nvPr/>
-        </p:nvSpPr>
-        <p:spPr>
-          <a:xfrm>
-            <a:off x="438912" y="2779776"/>
-            <a:ext cx="8266176" cy="384048"/>
-          </a:xfrm>
-          <a:prstGeom prst="rect">
-            <a:avLst/>
-          </a:prstGeom>
-          <a:solidFill>
-            <a:srgbClr val="F5F6FC"/>
-          </a:solidFill>
-          <a:ln/>
-        </p:spPr>
-      </p:sp>
-      <p:sp>
-        <p:nvSpPr>
-          <p:cNvPr id="12" name="Text 10"/>
-          <p:cNvSpPr/>
-          <p:nvPr/>
-        </p:nvSpPr>
-        <p:spPr>
-          <a:xfrm>
-            <a:off x="566928" y="2779776"/>
-            <a:ext cx="868680" cy="384048"/>
-          </a:xfrm>
-          <a:prstGeom prst="rect">
-            <a:avLst/>
-          </a:prstGeom>
-          <a:noFill/>
-          <a:ln/>
-        </p:spPr>
-        <p:txBody>
-          <a:bodyPr wrap="square" lIns="0" tIns="0" rIns="0" bIns="0" rtlCol="0" anchor="ctr"/>
-          <a:lstStyle/>
-          <a:p>
-            <a:pPr indent="0" marL="0">
-              <a:buNone/>
-            </a:pPr>
-            <a:r>
-              <a:rPr lang="en-US" sz="1200" b="1" dirty="0">
-                <a:solidFill>
-                  <a:srgbClr val="9A6310"/>
-                </a:solidFill>
-                <a:latin typeface="Courier New" pitchFamily="34" charset="0"/>
-                <a:ea typeface="Courier New" pitchFamily="34" charset="-122"/>
-                <a:cs typeface="Courier New" pitchFamily="34" charset="-120"/>
-              </a:rPr>
-              <a:t>15 min</a:t>
-            </a:r>
-            <a:endParaRPr lang="en-US" sz="1200" dirty="0"/>
-          </a:p>
-        </p:txBody>
-      </p:sp>
-      <p:sp>
-        <p:nvSpPr>
-          <p:cNvPr id="13" name="Text 11"/>
-          <p:cNvSpPr/>
-          <p:nvPr/>
-        </p:nvSpPr>
-        <p:spPr>
-          <a:xfrm>
-            <a:off x="1435608" y="2779776"/>
-            <a:ext cx="7141464" cy="384048"/>
-          </a:xfrm>
-          <a:prstGeom prst="rect">
-            <a:avLst/>
-          </a:prstGeom>
-          <a:noFill/>
-          <a:ln/>
-        </p:spPr>
-        <p:txBody>
-          <a:bodyPr wrap="square" lIns="0" tIns="0" rIns="0" bIns="0" rtlCol="0" anchor="ctr"/>
-          <a:lstStyle/>
-          <a:p>
-            <a:pPr indent="0" marL="0">
-              <a:buNone/>
-            </a:pPr>
-            <a:r>
-              <a:rPr lang="en-US" sz="1200" dirty="0">
-                <a:solidFill>
-                  <a:srgbClr val="434A63"/>
-                </a:solidFill>
-                <a:latin typeface="Arial" pitchFamily="34" charset="0"/>
-                <a:ea typeface="Arial" pitchFamily="34" charset="-122"/>
-                <a:cs typeface="Arial" pitchFamily="34" charset="-120"/>
-              </a:rPr>
-              <a:t>Planungstabelle füllen: Netz, erste, letzte, Broadcast</a:t>
-            </a:r>
-            <a:endParaRPr lang="en-US" sz="1200" dirty="0"/>
-          </a:p>
-        </p:txBody>
-      </p:sp>
-      <p:sp>
-        <p:nvSpPr>
-          <p:cNvPr id="14" name="Text 12"/>
-          <p:cNvSpPr/>
-          <p:nvPr/>
-        </p:nvSpPr>
-        <p:spPr>
-          <a:xfrm>
-            <a:off x="566928" y="3163824"/>
-            <a:ext cx="868680" cy="384048"/>
-          </a:xfrm>
-          <a:prstGeom prst="rect">
-            <a:avLst/>
-          </a:prstGeom>
-          <a:noFill/>
-          <a:ln/>
-        </p:spPr>
-        <p:txBody>
-          <a:bodyPr wrap="square" lIns="0" tIns="0" rIns="0" bIns="0" rtlCol="0" anchor="ctr"/>
-          <a:lstStyle/>
-          <a:p>
-            <a:pPr indent="0" marL="0">
-              <a:buNone/>
-            </a:pPr>
-            <a:r>
-              <a:rPr lang="en-US" sz="1200" b="1" dirty="0">
-                <a:solidFill>
-                  <a:srgbClr val="9A6310"/>
-                </a:solidFill>
-                <a:latin typeface="Courier New" pitchFamily="34" charset="0"/>
-                <a:ea typeface="Courier New" pitchFamily="34" charset="-122"/>
-                <a:cs typeface="Courier New" pitchFamily="34" charset="-120"/>
-              </a:rPr>
-              <a:t>10 min</a:t>
-            </a:r>
-            <a:endParaRPr lang="en-US" sz="1200" dirty="0"/>
-          </a:p>
-        </p:txBody>
-      </p:sp>
-      <p:sp>
-        <p:nvSpPr>
-          <p:cNvPr id="15" name="Text 13"/>
-          <p:cNvSpPr/>
-          <p:nvPr/>
-        </p:nvSpPr>
-        <p:spPr>
-          <a:xfrm>
-            <a:off x="1435608" y="3163824"/>
-            <a:ext cx="7141464" cy="384048"/>
-          </a:xfrm>
-          <a:prstGeom prst="rect">
-            <a:avLst/>
-          </a:prstGeom>
-          <a:noFill/>
-          <a:ln/>
-        </p:spPr>
-        <p:txBody>
-          <a:bodyPr wrap="square" lIns="0" tIns="0" rIns="0" bIns="0" rtlCol="0" anchor="ctr"/>
-          <a:lstStyle/>
-          <a:p>
-            <a:pPr indent="0" marL="0">
-              <a:buNone/>
-            </a:pPr>
-            <a:r>
-              <a:rPr lang="en-US" sz="1200" dirty="0">
-                <a:solidFill>
-                  <a:srgbClr val="434A63"/>
-                </a:solidFill>
-                <a:latin typeface="Arial" pitchFamily="34" charset="0"/>
-                <a:ea typeface="Arial" pitchFamily="34" charset="-122"/>
-                <a:cs typeface="Arial" pitchFamily="34" charset="-120"/>
-              </a:rPr>
-              <a:t>Selbstcheck im Online-Subnetzrechner – jede Zeile muss exakt passen</a:t>
-            </a:r>
-            <a:endParaRPr lang="en-US" sz="1200" dirty="0"/>
-          </a:p>
-        </p:txBody>
-      </p:sp>
-      <p:sp>
-        <p:nvSpPr>
-          <p:cNvPr id="16" name="Shape 14"/>
-          <p:cNvSpPr/>
-          <p:nvPr/>
-        </p:nvSpPr>
-        <p:spPr>
-          <a:xfrm>
-            <a:off x="566928" y="3611880"/>
-            <a:ext cx="8010144" cy="841248"/>
-          </a:xfrm>
-          <a:prstGeom prst="rect">
-            <a:avLst/>
-          </a:prstGeom>
-          <a:solidFill>
-            <a:srgbClr val="EEF0FB"/>
-          </a:solidFill>
-          <a:ln/>
-        </p:spPr>
-      </p:sp>
-      <p:sp>
-        <p:nvSpPr>
-          <p:cNvPr id="17" name="Shape 15"/>
-          <p:cNvSpPr/>
-          <p:nvPr/>
-        </p:nvSpPr>
-        <p:spPr>
-          <a:xfrm>
-            <a:off x="566928" y="3611880"/>
-            <a:ext cx="41148" cy="841248"/>
+              <a:t>04</a:t>
+            </a:r>
+            <a:endParaRPr lang="en-US" sz="8400" dirty="0"/>
+          </a:p>
+        </p:txBody>
+      </p:sp>
+      <p:sp>
+        <p:nvSpPr>
+          <p:cNvPr id="5" name="Shape 3"/>
+          <p:cNvSpPr/>
+          <p:nvPr/>
+        </p:nvSpPr>
+        <p:spPr>
+          <a:xfrm>
+            <a:off x="566928" y="1883664"/>
+            <a:ext cx="475488" cy="50292"/>
           </a:xfrm>
           <a:prstGeom prst="rect">
             <a:avLst/>
@@ -8266,14 +8030,14 @@
       </p:sp>
       <p:sp>
         <p:nvSpPr>
-          <p:cNvPr id="18" name="Text 16"/>
-          <p:cNvSpPr/>
-          <p:nvPr/>
-        </p:nvSpPr>
-        <p:spPr>
-          <a:xfrm>
-            <a:off x="804672" y="3758184"/>
-            <a:ext cx="7607808" cy="242062"/>
+          <p:cNvPr id="6" name="Text 4"/>
+          <p:cNvSpPr/>
+          <p:nvPr/>
+        </p:nvSpPr>
+        <p:spPr>
+          <a:xfrm>
+            <a:off x="566928" y="2084832"/>
+            <a:ext cx="5394960" cy="868680"/>
           </a:xfrm>
           <a:prstGeom prst="rect">
             <a:avLst/>
@@ -8289,7 +8053,7 @@
               <a:buNone/>
             </a:pPr>
             <a:r>
-              <a:rPr lang="en-US" sz="1300" b="1" dirty="0">
+              <a:rPr lang="en-US" sz="3000" b="1" dirty="0">
                 <a:solidFill>
                   <a:srgbClr val="272E52"/>
                 </a:solidFill>
@@ -8297,22 +8061,22 @@
                 <a:ea typeface="Arial" pitchFamily="34" charset="-122"/>
                 <a:cs typeface="Arial" pitchFamily="34" charset="-120"/>
               </a:rPr>
-              <a:t>Jetzt öffnen – beides braucht ihr gleich im Raum</a:t>
-            </a:r>
-            <a:endParaRPr lang="en-US" sz="1300" dirty="0"/>
-          </a:p>
-        </p:txBody>
-      </p:sp>
-      <p:sp>
-        <p:nvSpPr>
-          <p:cNvPr id="19" name="Text 17"/>
-          <p:cNvSpPr/>
-          <p:nvPr/>
-        </p:nvSpPr>
-        <p:spPr>
-          <a:xfrm>
-            <a:off x="804672" y="4045966"/>
-            <a:ext cx="7607808" cy="288290"/>
+              <a:t>Subnetz-Architekten</a:t>
+            </a:r>
+            <a:endParaRPr lang="en-US" sz="3000" dirty="0"/>
+          </a:p>
+        </p:txBody>
+      </p:sp>
+      <p:sp>
+        <p:nvSpPr>
+          <p:cNvPr id="7" name="Text 5"/>
+          <p:cNvSpPr/>
+          <p:nvPr/>
+        </p:nvSpPr>
+        <p:spPr>
+          <a:xfrm>
+            <a:off x="566928" y="3017520"/>
+            <a:ext cx="5394960" cy="548640"/>
           </a:xfrm>
           <a:prstGeom prst="rect">
             <a:avLst/>
@@ -8325,101 +8089,10 @@
           <a:lstStyle/>
           <a:p>
             <a:pPr indent="0" marL="0">
-              <a:lnSpc>
-                <a:spcPct val="92000"/>
-              </a:lnSpc>
-              <a:spcAft>
-                <a:spcPts val="500"/>
-              </a:spcAft>
-              <a:buNone/>
-            </a:pPr>
-            <a:r>
-              <a:rPr lang="en-US" sz="1050" dirty="0">
-                <a:solidFill>
-                  <a:srgbClr val="434A63"/>
-                </a:solidFill>
-                <a:latin typeface="Arial" pitchFamily="34" charset="0"/>
-                <a:ea typeface="Arial" pitchFamily="34" charset="-122"/>
-                <a:cs typeface="Arial" pitchFamily="34" charset="-120"/>
-              </a:rPr>
-              <a:t>Aufgabe mit allen Zahlen:  jacobmenge.github.io/kurs-unterlagen/netzwerke/praxis-subnetting/</a:t>
-            </a:r>
-            <a:endParaRPr lang="en-US" sz="1050" dirty="0"/>
-          </a:p>
-          <a:p>
-            <a:pPr indent="0" marL="0">
-              <a:lnSpc>
-                <a:spcPct val="92000"/>
-              </a:lnSpc>
-              <a:spcAft>
-                <a:spcPts val="500"/>
-              </a:spcAft>
-              <a:buNone/>
-            </a:pPr>
-            <a:r>
-              <a:rPr lang="en-US" sz="1050" dirty="0">
-                <a:solidFill>
-                  <a:srgbClr val="434A63"/>
-                </a:solidFill>
-                <a:latin typeface="Arial" pitchFamily="34" charset="0"/>
-                <a:ea typeface="Arial" pitchFamily="34" charset="-122"/>
-                <a:cs typeface="Arial" pitchFamily="34" charset="-120"/>
-              </a:rPr>
-              <a:t>Ergebnisse eintragen:  &lt;Link zum Ergebnis-Dokument hier eintragen&gt;</a:t>
-            </a:r>
-            <a:endParaRPr lang="en-US" sz="1050" dirty="0"/>
-          </a:p>
-        </p:txBody>
-      </p:sp>
-      <p:sp>
-        <p:nvSpPr>
-          <p:cNvPr id="20" name="Shape 18"/>
-          <p:cNvSpPr/>
-          <p:nvPr/>
-        </p:nvSpPr>
-        <p:spPr>
-          <a:xfrm>
-            <a:off x="566928" y="4631436"/>
-            <a:ext cx="8010144" cy="0"/>
-          </a:xfrm>
-          <a:prstGeom prst="line">
-            <a:avLst/>
-          </a:prstGeom>
-          <a:noFill/>
-          <a:ln w="9525">
-            <a:solidFill>
-              <a:srgbClr val="DFE3F0"/>
-            </a:solidFill>
-            <a:prstDash val="solid"/>
-          </a:ln>
-        </p:spPr>
-      </p:sp>
-      <p:sp>
-        <p:nvSpPr>
-          <p:cNvPr id="21" name="Text 19"/>
-          <p:cNvSpPr/>
-          <p:nvPr/>
-        </p:nvSpPr>
-        <p:spPr>
-          <a:xfrm>
-            <a:off x="566928" y="4722876"/>
-            <a:ext cx="5029200" cy="237744"/>
-          </a:xfrm>
-          <a:prstGeom prst="rect">
-            <a:avLst/>
-          </a:prstGeom>
-          <a:noFill/>
-          <a:ln/>
-        </p:spPr>
-        <p:txBody>
-          <a:bodyPr wrap="square" lIns="0" tIns="0" rIns="0" bIns="0" rtlCol="0" anchor="ctr"/>
-          <a:lstStyle/>
-          <a:p>
-            <a:pPr indent="0" marL="0">
-              <a:buNone/>
-            </a:pPr>
-            <a:r>
-              <a:rPr lang="en-US" sz="1050" spc="30" kern="0" dirty="0">
+              <a:buNone/>
+            </a:pPr>
+            <a:r>
+              <a:rPr lang="en-US" sz="1350" dirty="0">
                 <a:solidFill>
                   <a:srgbClr val="5C6377"/>
                 </a:solidFill>
@@ -8427,48 +8100,9 @@
                 <a:ea typeface="Arial" pitchFamily="34" charset="-122"/>
                 <a:cs typeface="Arial" pitchFamily="34" charset="-120"/>
               </a:rPr>
-              <a:t>Breakout</a:t>
-            </a:r>
-            <a:endParaRPr lang="en-US" sz="1050" dirty="0"/>
-          </a:p>
-        </p:txBody>
-      </p:sp>
-      <p:sp>
-        <p:nvSpPr>
-          <p:cNvPr id="22" name="Text 20"/>
-          <p:cNvSpPr/>
-          <p:nvPr/>
-        </p:nvSpPr>
-        <p:spPr>
-          <a:xfrm>
-            <a:off x="8028432" y="4722876"/>
-            <a:ext cx="548640" cy="237744"/>
-          </a:xfrm>
-          <a:prstGeom prst="rect">
-            <a:avLst/>
-          </a:prstGeom>
-          <a:noFill/>
-          <a:ln/>
-        </p:spPr>
-        <p:txBody>
-          <a:bodyPr wrap="square" lIns="0" tIns="0" rIns="0" bIns="0" rtlCol="0" anchor="ctr"/>
-          <a:lstStyle/>
-          <a:p>
-            <a:pPr algn="r" indent="0" marL="0">
-              <a:buNone/>
-            </a:pPr>
-            <a:r>
-              <a:rPr lang="en-US" sz="1050" dirty="0">
-                <a:solidFill>
-                  <a:srgbClr val="5C6377"/>
-                </a:solidFill>
-                <a:latin typeface="Arial" pitchFamily="34" charset="0"/>
-                <a:ea typeface="Arial" pitchFamily="34" charset="-122"/>
-                <a:cs typeface="Arial" pitchFamily="34" charset="-120"/>
-              </a:rPr>
-              <a:t>15/20</a:t>
-            </a:r>
-            <a:endParaRPr lang="en-US" sz="1050" dirty="0"/>
+              <a:t>50 Minuten in Gruppen – ihr plant das Netz der Müller GmbH</a:t>
+            </a:r>
+            <a:endParaRPr lang="en-US" sz="1350" dirty="0"/>
           </a:p>
         </p:txBody>
       </p:sp>
@@ -8557,7 +8191,7 @@
                 <a:ea typeface="Arial" pitchFamily="34" charset="-122"/>
                 <a:cs typeface="Arial" pitchFamily="34" charset="-120"/>
               </a:rPr>
-              <a:t>SPIELREGELN</a:t>
+              <a:t>BREAKOUT · 50 MINUTEN</a:t>
             </a:r>
             <a:endParaRPr lang="en-US" sz="1150" dirty="0"/>
           </a:p>
@@ -8596,7 +8230,7 @@
                 <a:ea typeface="Arial" pitchFamily="34" charset="-122"/>
                 <a:cs typeface="Arial" pitchFamily="34" charset="-120"/>
               </a:rPr>
-              <a:t>So arbeitet ihr</a:t>
+              <a:t>Der Auftrag</a:t>
             </a:r>
             <a:endParaRPr lang="en-US" sz="2600" dirty="0"/>
           </a:p>
@@ -8610,8 +8244,8 @@
         </p:nvSpPr>
         <p:spPr>
           <a:xfrm>
-            <a:off x="566928" y="1700784"/>
-            <a:ext cx="8010144" cy="2011680"/>
+            <a:off x="566928" y="1444752"/>
+            <a:ext cx="8010144" cy="438912"/>
           </a:xfrm>
           <a:prstGeom prst="rect">
             <a:avLst/>
@@ -8624,33 +8258,486 @@
           <a:lstStyle/>
           <a:p>
             <a:pPr indent="0" marL="0">
-              <a:lnSpc>
-                <a:spcPct val="92000"/>
-              </a:lnSpc>
-              <a:buNone/>
-            </a:pPr>
-            <a:r>
-              <a:rPr lang="en-US" sz="1250" b="1" dirty="0">
+              <a:buNone/>
+            </a:pPr>
+            <a:r>
+              <a:rPr lang="en-US" sz="1300" dirty="0">
+                <a:solidFill>
+                  <a:srgbClr val="5C6377"/>
+                </a:solidFill>
+                <a:latin typeface="Arial" pitchFamily="34" charset="0"/>
+                <a:ea typeface="Arial" pitchFamily="34" charset="-122"/>
+                <a:cs typeface="Arial" pitchFamily="34" charset="-120"/>
+              </a:rPr>
+              <a:t>Die Müller GmbH zieht um. Ihr bekommt ein /24 und schneidet daraus die Abteilungsnetze – nur mit Stift, Papier und dem Rezept von eben.</a:t>
+            </a:r>
+            <a:endParaRPr lang="en-US" sz="1300" dirty="0"/>
+          </a:p>
+        </p:txBody>
+      </p:sp>
+      <p:sp>
+        <p:nvSpPr>
+          <p:cNvPr id="6" name="Shape 4"/>
+          <p:cNvSpPr/>
+          <p:nvPr/>
+        </p:nvSpPr>
+        <p:spPr>
+          <a:xfrm>
+            <a:off x="438912" y="2011680"/>
+            <a:ext cx="8266176" cy="384048"/>
+          </a:xfrm>
+          <a:prstGeom prst="rect">
+            <a:avLst/>
+          </a:prstGeom>
+          <a:solidFill>
+            <a:srgbClr val="F5F6FC"/>
+          </a:solidFill>
+          <a:ln/>
+        </p:spPr>
+      </p:sp>
+      <p:sp>
+        <p:nvSpPr>
+          <p:cNvPr id="7" name="Text 5"/>
+          <p:cNvSpPr/>
+          <p:nvPr/>
+        </p:nvSpPr>
+        <p:spPr>
+          <a:xfrm>
+            <a:off x="566928" y="2011680"/>
+            <a:ext cx="868680" cy="384048"/>
+          </a:xfrm>
+          <a:prstGeom prst="rect">
+            <a:avLst/>
+          </a:prstGeom>
+          <a:noFill/>
+          <a:ln/>
+        </p:spPr>
+        <p:txBody>
+          <a:bodyPr wrap="square" lIns="0" tIns="0" rIns="0" bIns="0" rtlCol="0" anchor="ctr"/>
+          <a:lstStyle/>
+          <a:p>
+            <a:pPr indent="0" marL="0">
+              <a:buNone/>
+            </a:pPr>
+            <a:r>
+              <a:rPr lang="en-US" sz="1200" b="1" dirty="0">
                 <a:solidFill>
                   <a:srgbClr val="9A6310"/>
                 </a:solidFill>
-                <a:latin typeface="Arial" pitchFamily="34" charset="0"/>
-                <a:ea typeface="Arial" pitchFamily="34" charset="-122"/>
-                <a:cs typeface="Arial" pitchFamily="34" charset="-120"/>
-              </a:rPr>
-              <a:t>▸   </a:t>
-            </a:r>
+                <a:latin typeface="Courier New" pitchFamily="34" charset="0"/>
+                <a:ea typeface="Courier New" pitchFamily="34" charset="-122"/>
+                <a:cs typeface="Courier New" pitchFamily="34" charset="-120"/>
+              </a:rPr>
+              <a:t>10 min</a:t>
+            </a:r>
+            <a:endParaRPr lang="en-US" sz="1200" dirty="0"/>
+          </a:p>
+        </p:txBody>
+      </p:sp>
+      <p:sp>
+        <p:nvSpPr>
+          <p:cNvPr id="8" name="Text 6"/>
+          <p:cNvSpPr/>
+          <p:nvPr/>
+        </p:nvSpPr>
+        <p:spPr>
+          <a:xfrm>
+            <a:off x="1435608" y="2011680"/>
+            <a:ext cx="7141464" cy="384048"/>
+          </a:xfrm>
+          <a:prstGeom prst="rect">
+            <a:avLst/>
+          </a:prstGeom>
+          <a:noFill/>
+          <a:ln/>
+        </p:spPr>
+        <p:txBody>
+          <a:bodyPr wrap="square" lIns="0" tIns="0" rIns="0" bIns="0" rtlCol="0" anchor="ctr"/>
+          <a:lstStyle/>
+          <a:p>
+            <a:pPr indent="0" marL="0">
+              <a:buNone/>
+            </a:pPr>
+            <a:r>
+              <a:rPr lang="en-US" sz="1200" dirty="0">
+                <a:solidFill>
+                  <a:srgbClr val="434A63"/>
+                </a:solidFill>
+                <a:latin typeface="Arial" pitchFamily="34" charset="0"/>
+                <a:ea typeface="Arial" pitchFamily="34" charset="-122"/>
+                <a:cs typeface="Arial" pitchFamily="34" charset="-120"/>
+              </a:rPr>
+              <a:t>Je Abteilung die Hostbits bestimmen – Formel: 2 hoch n minus 2</a:t>
+            </a:r>
+            <a:endParaRPr lang="en-US" sz="1200" dirty="0"/>
+          </a:p>
+        </p:txBody>
+      </p:sp>
+      <p:sp>
+        <p:nvSpPr>
+          <p:cNvPr id="9" name="Text 7"/>
+          <p:cNvSpPr/>
+          <p:nvPr/>
+        </p:nvSpPr>
+        <p:spPr>
+          <a:xfrm>
+            <a:off x="566928" y="2395728"/>
+            <a:ext cx="868680" cy="384048"/>
+          </a:xfrm>
+          <a:prstGeom prst="rect">
+            <a:avLst/>
+          </a:prstGeom>
+          <a:noFill/>
+          <a:ln/>
+        </p:spPr>
+        <p:txBody>
+          <a:bodyPr wrap="square" lIns="0" tIns="0" rIns="0" bIns="0" rtlCol="0" anchor="ctr"/>
+          <a:lstStyle/>
+          <a:p>
+            <a:pPr indent="0" marL="0">
+              <a:buNone/>
+            </a:pPr>
+            <a:r>
+              <a:rPr lang="en-US" sz="1200" b="1" dirty="0">
+                <a:solidFill>
+                  <a:srgbClr val="9A6310"/>
+                </a:solidFill>
+                <a:latin typeface="Courier New" pitchFamily="34" charset="0"/>
+                <a:ea typeface="Courier New" pitchFamily="34" charset="-122"/>
+                <a:cs typeface="Courier New" pitchFamily="34" charset="-120"/>
+              </a:rPr>
+              <a:t>15 min</a:t>
+            </a:r>
+            <a:endParaRPr lang="en-US" sz="1200" dirty="0"/>
+          </a:p>
+        </p:txBody>
+      </p:sp>
+      <p:sp>
+        <p:nvSpPr>
+          <p:cNvPr id="10" name="Text 8"/>
+          <p:cNvSpPr/>
+          <p:nvPr/>
+        </p:nvSpPr>
+        <p:spPr>
+          <a:xfrm>
+            <a:off x="1435608" y="2395728"/>
+            <a:ext cx="7141464" cy="384048"/>
+          </a:xfrm>
+          <a:prstGeom prst="rect">
+            <a:avLst/>
+          </a:prstGeom>
+          <a:noFill/>
+          <a:ln/>
+        </p:spPr>
+        <p:txBody>
+          <a:bodyPr wrap="square" lIns="0" tIns="0" rIns="0" bIns="0" rtlCol="0" anchor="ctr"/>
+          <a:lstStyle/>
+          <a:p>
+            <a:pPr indent="0" marL="0">
+              <a:buNone/>
+            </a:pPr>
+            <a:r>
+              <a:rPr lang="en-US" sz="1200" dirty="0">
+                <a:solidFill>
+                  <a:srgbClr val="434A63"/>
+                </a:solidFill>
+                <a:latin typeface="Arial" pitchFamily="34" charset="0"/>
+                <a:ea typeface="Arial" pitchFamily="34" charset="-122"/>
+                <a:cs typeface="Arial" pitchFamily="34" charset="-120"/>
+              </a:rPr>
+              <a:t>Größte zuerst: Präfixe wählen, Blöcke lückenlos schneiden</a:t>
+            </a:r>
+            <a:endParaRPr lang="en-US" sz="1200" dirty="0"/>
+          </a:p>
+        </p:txBody>
+      </p:sp>
+      <p:sp>
+        <p:nvSpPr>
+          <p:cNvPr id="11" name="Shape 9"/>
+          <p:cNvSpPr/>
+          <p:nvPr/>
+        </p:nvSpPr>
+        <p:spPr>
+          <a:xfrm>
+            <a:off x="438912" y="2779776"/>
+            <a:ext cx="8266176" cy="384048"/>
+          </a:xfrm>
+          <a:prstGeom prst="rect">
+            <a:avLst/>
+          </a:prstGeom>
+          <a:solidFill>
+            <a:srgbClr val="F5F6FC"/>
+          </a:solidFill>
+          <a:ln/>
+        </p:spPr>
+      </p:sp>
+      <p:sp>
+        <p:nvSpPr>
+          <p:cNvPr id="12" name="Text 10"/>
+          <p:cNvSpPr/>
+          <p:nvPr/>
+        </p:nvSpPr>
+        <p:spPr>
+          <a:xfrm>
+            <a:off x="566928" y="2779776"/>
+            <a:ext cx="868680" cy="384048"/>
+          </a:xfrm>
+          <a:prstGeom prst="rect">
+            <a:avLst/>
+          </a:prstGeom>
+          <a:noFill/>
+          <a:ln/>
+        </p:spPr>
+        <p:txBody>
+          <a:bodyPr wrap="square" lIns="0" tIns="0" rIns="0" bIns="0" rtlCol="0" anchor="ctr"/>
+          <a:lstStyle/>
+          <a:p>
+            <a:pPr indent="0" marL="0">
+              <a:buNone/>
+            </a:pPr>
+            <a:r>
+              <a:rPr lang="en-US" sz="1200" b="1" dirty="0">
+                <a:solidFill>
+                  <a:srgbClr val="9A6310"/>
+                </a:solidFill>
+                <a:latin typeface="Courier New" pitchFamily="34" charset="0"/>
+                <a:ea typeface="Courier New" pitchFamily="34" charset="-122"/>
+                <a:cs typeface="Courier New" pitchFamily="34" charset="-120"/>
+              </a:rPr>
+              <a:t>15 min</a:t>
+            </a:r>
+            <a:endParaRPr lang="en-US" sz="1200" dirty="0"/>
+          </a:p>
+        </p:txBody>
+      </p:sp>
+      <p:sp>
+        <p:nvSpPr>
+          <p:cNvPr id="13" name="Text 11"/>
+          <p:cNvSpPr/>
+          <p:nvPr/>
+        </p:nvSpPr>
+        <p:spPr>
+          <a:xfrm>
+            <a:off x="1435608" y="2779776"/>
+            <a:ext cx="7141464" cy="384048"/>
+          </a:xfrm>
+          <a:prstGeom prst="rect">
+            <a:avLst/>
+          </a:prstGeom>
+          <a:noFill/>
+          <a:ln/>
+        </p:spPr>
+        <p:txBody>
+          <a:bodyPr wrap="square" lIns="0" tIns="0" rIns="0" bIns="0" rtlCol="0" anchor="ctr"/>
+          <a:lstStyle/>
+          <a:p>
+            <a:pPr indent="0" marL="0">
+              <a:buNone/>
+            </a:pPr>
+            <a:r>
+              <a:rPr lang="en-US" sz="1200" dirty="0">
+                <a:solidFill>
+                  <a:srgbClr val="434A63"/>
+                </a:solidFill>
+                <a:latin typeface="Arial" pitchFamily="34" charset="0"/>
+                <a:ea typeface="Arial" pitchFamily="34" charset="-122"/>
+                <a:cs typeface="Arial" pitchFamily="34" charset="-120"/>
+              </a:rPr>
+              <a:t>Planungstabelle füllen: Netz, erste, letzte, Broadcast</a:t>
+            </a:r>
+            <a:endParaRPr lang="en-US" sz="1200" dirty="0"/>
+          </a:p>
+        </p:txBody>
+      </p:sp>
+      <p:sp>
+        <p:nvSpPr>
+          <p:cNvPr id="14" name="Text 12"/>
+          <p:cNvSpPr/>
+          <p:nvPr/>
+        </p:nvSpPr>
+        <p:spPr>
+          <a:xfrm>
+            <a:off x="566928" y="3163824"/>
+            <a:ext cx="868680" cy="384048"/>
+          </a:xfrm>
+          <a:prstGeom prst="rect">
+            <a:avLst/>
+          </a:prstGeom>
+          <a:noFill/>
+          <a:ln/>
+        </p:spPr>
+        <p:txBody>
+          <a:bodyPr wrap="square" lIns="0" tIns="0" rIns="0" bIns="0" rtlCol="0" anchor="ctr"/>
+          <a:lstStyle/>
+          <a:p>
+            <a:pPr indent="0" marL="0">
+              <a:buNone/>
+            </a:pPr>
+            <a:r>
+              <a:rPr lang="en-US" sz="1200" b="1" dirty="0">
+                <a:solidFill>
+                  <a:srgbClr val="9A6310"/>
+                </a:solidFill>
+                <a:latin typeface="Courier New" pitchFamily="34" charset="0"/>
+                <a:ea typeface="Courier New" pitchFamily="34" charset="-122"/>
+                <a:cs typeface="Courier New" pitchFamily="34" charset="-120"/>
+              </a:rPr>
+              <a:t>10 min</a:t>
+            </a:r>
+            <a:endParaRPr lang="en-US" sz="1200" dirty="0"/>
+          </a:p>
+        </p:txBody>
+      </p:sp>
+      <p:sp>
+        <p:nvSpPr>
+          <p:cNvPr id="15" name="Text 13"/>
+          <p:cNvSpPr/>
+          <p:nvPr/>
+        </p:nvSpPr>
+        <p:spPr>
+          <a:xfrm>
+            <a:off x="1435608" y="3163824"/>
+            <a:ext cx="7141464" cy="384048"/>
+          </a:xfrm>
+          <a:prstGeom prst="rect">
+            <a:avLst/>
+          </a:prstGeom>
+          <a:noFill/>
+          <a:ln/>
+        </p:spPr>
+        <p:txBody>
+          <a:bodyPr wrap="square" lIns="0" tIns="0" rIns="0" bIns="0" rtlCol="0" anchor="ctr"/>
+          <a:lstStyle/>
+          <a:p>
+            <a:pPr indent="0" marL="0">
+              <a:buNone/>
+            </a:pPr>
+            <a:r>
+              <a:rPr lang="en-US" sz="1200" dirty="0">
+                <a:solidFill>
+                  <a:srgbClr val="434A63"/>
+                </a:solidFill>
+                <a:latin typeface="Arial" pitchFamily="34" charset="0"/>
+                <a:ea typeface="Arial" pitchFamily="34" charset="-122"/>
+                <a:cs typeface="Arial" pitchFamily="34" charset="-120"/>
+              </a:rPr>
+              <a:t>Selbstcheck im Online-Subnetzrechner – jede Zeile muss exakt passen</a:t>
+            </a:r>
+            <a:endParaRPr lang="en-US" sz="1200" dirty="0"/>
+          </a:p>
+        </p:txBody>
+      </p:sp>
+      <p:sp>
+        <p:nvSpPr>
+          <p:cNvPr id="16" name="Shape 14"/>
+          <p:cNvSpPr/>
+          <p:nvPr/>
+        </p:nvSpPr>
+        <p:spPr>
+          <a:xfrm>
+            <a:off x="566928" y="3611880"/>
+            <a:ext cx="8010144" cy="841248"/>
+          </a:xfrm>
+          <a:prstGeom prst="rect">
+            <a:avLst/>
+          </a:prstGeom>
+          <a:solidFill>
+            <a:srgbClr val="EEF0FB"/>
+          </a:solidFill>
+          <a:ln/>
+        </p:spPr>
+      </p:sp>
+      <p:sp>
+        <p:nvSpPr>
+          <p:cNvPr id="17" name="Shape 15"/>
+          <p:cNvSpPr/>
+          <p:nvPr/>
+        </p:nvSpPr>
+        <p:spPr>
+          <a:xfrm>
+            <a:off x="566928" y="3611880"/>
+            <a:ext cx="41148" cy="841248"/>
+          </a:xfrm>
+          <a:prstGeom prst="rect">
+            <a:avLst/>
+          </a:prstGeom>
+          <a:solidFill>
+            <a:srgbClr val="9A6310"/>
+          </a:solidFill>
+          <a:ln/>
+        </p:spPr>
+      </p:sp>
+      <p:sp>
+        <p:nvSpPr>
+          <p:cNvPr id="18" name="Text 16"/>
+          <p:cNvSpPr/>
+          <p:nvPr/>
+        </p:nvSpPr>
+        <p:spPr>
+          <a:xfrm>
+            <a:off x="804672" y="3758184"/>
+            <a:ext cx="7607808" cy="242062"/>
+          </a:xfrm>
+          <a:prstGeom prst="rect">
+            <a:avLst/>
+          </a:prstGeom>
+          <a:noFill/>
+          <a:ln/>
+        </p:spPr>
+        <p:txBody>
+          <a:bodyPr wrap="square" lIns="0" tIns="0" rIns="0" bIns="0" rtlCol="0" anchor="t"/>
+          <a:lstStyle/>
+          <a:p>
+            <a:pPr indent="0" marL="0">
+              <a:buNone/>
+            </a:pPr>
+            <a:r>
+              <a:rPr lang="en-US" sz="1300" b="1" dirty="0">
+                <a:solidFill>
+                  <a:srgbClr val="272E52"/>
+                </a:solidFill>
+                <a:latin typeface="Arial" pitchFamily="34" charset="0"/>
+                <a:ea typeface="Arial" pitchFamily="34" charset="-122"/>
+                <a:cs typeface="Arial" pitchFamily="34" charset="-120"/>
+              </a:rPr>
+              <a:t>Jetzt öffnen – beides braucht ihr gleich im Raum</a:t>
+            </a:r>
+            <a:endParaRPr lang="en-US" sz="1300" dirty="0"/>
+          </a:p>
+        </p:txBody>
+      </p:sp>
+      <p:sp>
+        <p:nvSpPr>
+          <p:cNvPr id="19" name="Text 17"/>
+          <p:cNvSpPr/>
+          <p:nvPr/>
+        </p:nvSpPr>
+        <p:spPr>
+          <a:xfrm>
+            <a:off x="804672" y="4045966"/>
+            <a:ext cx="7607808" cy="288290"/>
+          </a:xfrm>
+          <a:prstGeom prst="rect">
+            <a:avLst/>
+          </a:prstGeom>
+          <a:noFill/>
+          <a:ln/>
+        </p:spPr>
+        <p:txBody>
+          <a:bodyPr wrap="square" lIns="0" tIns="0" rIns="0" bIns="0" rtlCol="0" anchor="t"/>
+          <a:lstStyle/>
+          <a:p>
             <a:pPr indent="0" marL="0">
               <a:lnSpc>
                 <a:spcPct val="92000"/>
               </a:lnSpc>
               <a:spcAft>
-                <a:spcPts val="900"/>
+                <a:spcPts val="500"/>
               </a:spcAft>
               <a:buNone/>
             </a:pPr>
             <a:r>
-              <a:rPr lang="en-US" sz="1250" dirty="0">
+              <a:rPr lang="en-US" sz="1050" dirty="0">
                 <a:solidFill>
                   <a:srgbClr val="434A63"/>
                 </a:solidFill>
@@ -8658,39 +8745,22 @@
                 <a:ea typeface="Arial" pitchFamily="34" charset="-122"/>
                 <a:cs typeface="Arial" pitchFamily="34" charset="-120"/>
               </a:rPr>
-              <a:t>Gruppen zu dritt oder viert. Eine Person teilt den Bildschirm.</a:t>
-            </a:r>
-            <a:endParaRPr lang="en-US" sz="1250" dirty="0"/>
-          </a:p>
-          <a:p>
-            <a:pPr indent="0" marL="0">
-              <a:lnSpc>
-                <a:spcPct val="92000"/>
-              </a:lnSpc>
-              <a:buNone/>
-            </a:pPr>
-            <a:r>
-              <a:rPr lang="en-US" sz="1250" b="1" dirty="0">
-                <a:solidFill>
-                  <a:srgbClr val="9A6310"/>
-                </a:solidFill>
-                <a:latin typeface="Arial" pitchFamily="34" charset="0"/>
-                <a:ea typeface="Arial" pitchFamily="34" charset="-122"/>
-                <a:cs typeface="Arial" pitchFamily="34" charset="-120"/>
-              </a:rPr>
-              <a:t>▸   </a:t>
-            </a:r>
+              <a:t>Aufgabe mit allen Zahlen:  jacobmenge.github.io/kurs-unterlagen/netzwerke/praxis-subnetting/</a:t>
+            </a:r>
+            <a:endParaRPr lang="en-US" sz="1050" dirty="0"/>
+          </a:p>
+          <a:p>
             <a:pPr indent="0" marL="0">
               <a:lnSpc>
                 <a:spcPct val="92000"/>
               </a:lnSpc>
               <a:spcAft>
-                <a:spcPts val="900"/>
+                <a:spcPts val="500"/>
               </a:spcAft>
               <a:buNone/>
             </a:pPr>
             <a:r>
-              <a:rPr lang="en-US" sz="1250" dirty="0">
+              <a:rPr lang="en-US" sz="1050" dirty="0">
                 <a:solidFill>
                   <a:srgbClr val="434A63"/>
                 </a:solidFill>
@@ -8698,256 +8768,15 @@
                 <a:ea typeface="Arial" pitchFamily="34" charset="-122"/>
                 <a:cs typeface="Arial" pitchFamily="34" charset="-120"/>
               </a:rPr>
-              <a:t>Öffnet den Link zur Kursseite jetzt – im Breakout-Raum seht ihr diese Folie nicht mehr.</a:t>
-            </a:r>
-            <a:endParaRPr lang="en-US" sz="1250" dirty="0"/>
-          </a:p>
-          <a:p>
-            <a:pPr indent="0" marL="0">
-              <a:lnSpc>
-                <a:spcPct val="92000"/>
-              </a:lnSpc>
-              <a:buNone/>
-            </a:pPr>
-            <a:r>
-              <a:rPr lang="en-US" sz="1250" b="1" dirty="0">
-                <a:solidFill>
-                  <a:srgbClr val="9A6310"/>
-                </a:solidFill>
-                <a:latin typeface="Arial" pitchFamily="34" charset="0"/>
-                <a:ea typeface="Arial" pitchFamily="34" charset="-122"/>
-                <a:cs typeface="Arial" pitchFamily="34" charset="-120"/>
-              </a:rPr>
-              <a:t>▸   </a:t>
-            </a:r>
-            <a:pPr indent="0" marL="0">
-              <a:lnSpc>
-                <a:spcPct val="92000"/>
-              </a:lnSpc>
-              <a:spcAft>
-                <a:spcPts val="900"/>
-              </a:spcAft>
-              <a:buNone/>
-            </a:pPr>
-            <a:r>
-              <a:rPr lang="en-US" sz="1250" dirty="0">
-                <a:solidFill>
-                  <a:srgbClr val="434A63"/>
-                </a:solidFill>
-                <a:latin typeface="Arial" pitchFamily="34" charset="0"/>
-                <a:ea typeface="Arial" pitchFamily="34" charset="-122"/>
-                <a:cs typeface="Arial" pitchFamily="34" charset="-120"/>
-              </a:rPr>
-              <a:t>Rechnet laut und gemeinsam. Wer einen anderen Weg hat: sagen, nicht schweigen.</a:t>
-            </a:r>
-            <a:endParaRPr lang="en-US" sz="1250" dirty="0"/>
-          </a:p>
-          <a:p>
-            <a:pPr indent="0" marL="0">
-              <a:lnSpc>
-                <a:spcPct val="92000"/>
-              </a:lnSpc>
-              <a:buNone/>
-            </a:pPr>
-            <a:r>
-              <a:rPr lang="en-US" sz="1250" b="1" dirty="0">
-                <a:solidFill>
-                  <a:srgbClr val="9A6310"/>
-                </a:solidFill>
-                <a:latin typeface="Arial" pitchFamily="34" charset="0"/>
-                <a:ea typeface="Arial" pitchFamily="34" charset="-122"/>
-                <a:cs typeface="Arial" pitchFamily="34" charset="-120"/>
-              </a:rPr>
-              <a:t>▸   </a:t>
-            </a:r>
-            <a:pPr indent="0" marL="0">
-              <a:lnSpc>
-                <a:spcPct val="92000"/>
-              </a:lnSpc>
-              <a:spcAft>
-                <a:spcPts val="900"/>
-              </a:spcAft>
-              <a:buNone/>
-            </a:pPr>
-            <a:r>
-              <a:rPr lang="en-US" sz="1250" dirty="0">
-                <a:solidFill>
-                  <a:srgbClr val="434A63"/>
-                </a:solidFill>
-                <a:latin typeface="Arial" pitchFamily="34" charset="0"/>
-                <a:ea typeface="Arial" pitchFamily="34" charset="-122"/>
-                <a:cs typeface="Arial" pitchFamily="34" charset="-120"/>
-              </a:rPr>
-              <a:t>Der Online-Rechner ist der Schiedsrichter – aber erst nach eurer Rechnung, nicht statt ihr.</a:t>
-            </a:r>
-            <a:endParaRPr lang="en-US" sz="1250" dirty="0"/>
-          </a:p>
-          <a:p>
-            <a:pPr indent="0" marL="0">
-              <a:lnSpc>
-                <a:spcPct val="92000"/>
-              </a:lnSpc>
-              <a:buNone/>
-            </a:pPr>
-            <a:r>
-              <a:rPr lang="en-US" sz="1250" b="1" dirty="0">
-                <a:solidFill>
-                  <a:srgbClr val="9A6310"/>
-                </a:solidFill>
-                <a:latin typeface="Arial" pitchFamily="34" charset="0"/>
-                <a:ea typeface="Arial" pitchFamily="34" charset="-122"/>
-                <a:cs typeface="Arial" pitchFamily="34" charset="-120"/>
-              </a:rPr>
-              <a:t>▸   </a:t>
-            </a:r>
-            <a:pPr indent="0" marL="0">
-              <a:lnSpc>
-                <a:spcPct val="92000"/>
-              </a:lnSpc>
-              <a:spcAft>
-                <a:spcPts val="900"/>
-              </a:spcAft>
-              <a:buNone/>
-            </a:pPr>
-            <a:r>
-              <a:rPr lang="en-US" sz="1250" dirty="0">
-                <a:solidFill>
-                  <a:srgbClr val="434A63"/>
-                </a:solidFill>
-                <a:latin typeface="Arial" pitchFamily="34" charset="0"/>
-                <a:ea typeface="Arial" pitchFamily="34" charset="-122"/>
-                <a:cs typeface="Arial" pitchFamily="34" charset="-120"/>
-              </a:rPr>
-              <a:t>Wenn es klemmt: in eurem Raum auf „Um Hilfe bitten“ klicken. Dann komme ich rein.</a:t>
-            </a:r>
-            <a:endParaRPr lang="en-US" sz="1250" dirty="0"/>
-          </a:p>
-        </p:txBody>
-      </p:sp>
-      <p:sp>
-        <p:nvSpPr>
-          <p:cNvPr id="6" name="Shape 4"/>
-          <p:cNvSpPr/>
-          <p:nvPr/>
-        </p:nvSpPr>
-        <p:spPr>
-          <a:xfrm>
-            <a:off x="566928" y="3602736"/>
-            <a:ext cx="8010144" cy="822960"/>
-          </a:xfrm>
-          <a:prstGeom prst="rect">
-            <a:avLst/>
-          </a:prstGeom>
-          <a:solidFill>
-            <a:srgbClr val="F5F6FC"/>
-          </a:solidFill>
-          <a:ln/>
-        </p:spPr>
-      </p:sp>
-      <p:sp>
-        <p:nvSpPr>
-          <p:cNvPr id="7" name="Shape 5"/>
-          <p:cNvSpPr/>
-          <p:nvPr/>
-        </p:nvSpPr>
-        <p:spPr>
-          <a:xfrm>
-            <a:off x="566928" y="3602736"/>
-            <a:ext cx="41148" cy="822960"/>
-          </a:xfrm>
-          <a:prstGeom prst="rect">
-            <a:avLst/>
-          </a:prstGeom>
-          <a:solidFill>
-            <a:srgbClr val="9A6310"/>
-          </a:solidFill>
-          <a:ln/>
-        </p:spPr>
-      </p:sp>
-      <p:sp>
-        <p:nvSpPr>
-          <p:cNvPr id="8" name="Text 6"/>
-          <p:cNvSpPr/>
-          <p:nvPr/>
-        </p:nvSpPr>
-        <p:spPr>
-          <a:xfrm>
-            <a:off x="804672" y="3749040"/>
-            <a:ext cx="7607808" cy="242062"/>
-          </a:xfrm>
-          <a:prstGeom prst="rect">
-            <a:avLst/>
-          </a:prstGeom>
-          <a:noFill/>
-          <a:ln/>
-        </p:spPr>
-        <p:txBody>
-          <a:bodyPr wrap="square" lIns="0" tIns="0" rIns="0" bIns="0" rtlCol="0" anchor="t"/>
-          <a:lstStyle/>
-          <a:p>
-            <a:pPr indent="0" marL="0">
-              <a:buNone/>
-            </a:pPr>
-            <a:r>
-              <a:rPr lang="en-US" sz="1300" b="1" dirty="0">
-                <a:solidFill>
-                  <a:srgbClr val="272E52"/>
-                </a:solidFill>
-                <a:latin typeface="Arial" pitchFamily="34" charset="0"/>
-                <a:ea typeface="Arial" pitchFamily="34" charset="-122"/>
-                <a:cs typeface="Arial" pitchFamily="34" charset="-120"/>
-              </a:rPr>
-              <a:t>Um 20:15 sind alle wieder hier</a:t>
-            </a:r>
-            <a:endParaRPr lang="en-US" sz="1300" dirty="0"/>
-          </a:p>
-        </p:txBody>
-      </p:sp>
-      <p:sp>
-        <p:nvSpPr>
-          <p:cNvPr id="9" name="Text 7"/>
-          <p:cNvSpPr/>
-          <p:nvPr/>
-        </p:nvSpPr>
-        <p:spPr>
-          <a:xfrm>
-            <a:off x="804672" y="4036822"/>
-            <a:ext cx="7607808" cy="270002"/>
-          </a:xfrm>
-          <a:prstGeom prst="rect">
-            <a:avLst/>
-          </a:prstGeom>
-          <a:noFill/>
-          <a:ln/>
-        </p:spPr>
-        <p:txBody>
-          <a:bodyPr wrap="square" lIns="0" tIns="0" rIns="0" bIns="0" rtlCol="0" anchor="t"/>
-          <a:lstStyle/>
-          <a:p>
-            <a:pPr indent="0" marL="0">
-              <a:lnSpc>
-                <a:spcPct val="92000"/>
-              </a:lnSpc>
-              <a:buNone/>
-            </a:pPr>
-            <a:r>
-              <a:rPr lang="en-US" sz="1150" dirty="0">
-                <a:solidFill>
-                  <a:srgbClr val="434A63"/>
-                </a:solidFill>
-                <a:latin typeface="Arial" pitchFamily="34" charset="0"/>
-                <a:ea typeface="Arial" pitchFamily="34" charset="-122"/>
-                <a:cs typeface="Arial" pitchFamily="34" charset="-120"/>
-              </a:rPr>
-              <a:t>Sprecher wie gehabt. Jede Gruppe zeigt nachher ihre Planungstabelle.</a:t>
-            </a:r>
-            <a:endParaRPr lang="en-US" sz="1150" dirty="0"/>
-          </a:p>
-        </p:txBody>
-      </p:sp>
-      <p:sp>
-        <p:nvSpPr>
-          <p:cNvPr id="10" name="Shape 8"/>
+              <a:t>Ergebnisse eintragen:  &lt;Link zum Ergebnis-Dokument hier eintragen&gt;</a:t>
+            </a:r>
+            <a:endParaRPr lang="en-US" sz="1050" dirty="0"/>
+          </a:p>
+        </p:txBody>
+      </p:sp>
+      <p:sp>
+        <p:nvSpPr>
+          <p:cNvPr id="20" name="Shape 18"/>
           <p:cNvSpPr/>
           <p:nvPr/>
         </p:nvSpPr>
@@ -8970,7 +8799,7 @@
       </p:sp>
       <p:sp>
         <p:nvSpPr>
-          <p:cNvPr id="11" name="Text 9"/>
+          <p:cNvPr id="21" name="Text 19"/>
           <p:cNvSpPr/>
           <p:nvPr/>
         </p:nvSpPr>
@@ -9009,7 +8838,7 @@
       </p:sp>
       <p:sp>
         <p:nvSpPr>
-          <p:cNvPr id="12" name="Text 10"/>
+          <p:cNvPr id="22" name="Text 20"/>
           <p:cNvSpPr/>
           <p:nvPr/>
         </p:nvSpPr>
@@ -9040,7 +8869,7 @@
                 <a:ea typeface="Arial" pitchFamily="34" charset="-122"/>
                 <a:cs typeface="Arial" pitchFamily="34" charset="-120"/>
               </a:rPr>
-              <a:t>16/20</a:t>
+              <a:t>16/21</a:t>
             </a:r>
             <a:endParaRPr lang="en-US" sz="1050" dirty="0"/>
           </a:p>
@@ -9086,107 +8915,368 @@
         </p:nvSpPr>
         <p:spPr>
           <a:xfrm>
-            <a:off x="6355080" y="0"/>
-            <a:ext cx="2788920" cy="5143500"/>
+            <a:off x="566928" y="201168"/>
+            <a:ext cx="475488" cy="50292"/>
           </a:xfrm>
           <a:prstGeom prst="rect">
             <a:avLst/>
           </a:prstGeom>
           <a:solidFill>
-            <a:srgbClr val="EEF0FB"/>
+            <a:srgbClr val="9A6310"/>
           </a:solidFill>
           <a:ln/>
         </p:spPr>
       </p:sp>
       <p:sp>
         <p:nvSpPr>
-          <p:cNvPr id="3" name="Shape 1"/>
-          <p:cNvSpPr/>
-          <p:nvPr/>
-        </p:nvSpPr>
-        <p:spPr>
-          <a:xfrm>
-            <a:off x="6355080" y="0"/>
-            <a:ext cx="45720" cy="5143500"/>
+          <p:cNvPr id="3" name="Text 1"/>
+          <p:cNvSpPr/>
+          <p:nvPr/>
+        </p:nvSpPr>
+        <p:spPr>
+          <a:xfrm>
+            <a:off x="566928" y="384048"/>
+            <a:ext cx="8010144" cy="237744"/>
+          </a:xfrm>
+          <a:prstGeom prst="rect">
+            <a:avLst/>
+          </a:prstGeom>
+          <a:noFill/>
+          <a:ln/>
+        </p:spPr>
+        <p:txBody>
+          <a:bodyPr wrap="square" lIns="0" tIns="0" rIns="0" bIns="0" rtlCol="0" anchor="ctr"/>
+          <a:lstStyle/>
+          <a:p>
+            <a:pPr indent="0" marL="0">
+              <a:buNone/>
+            </a:pPr>
+            <a:r>
+              <a:rPr lang="en-US" sz="1150" b="1" spc="180" kern="0" dirty="0">
+                <a:solidFill>
+                  <a:srgbClr val="9A6310"/>
+                </a:solidFill>
+                <a:latin typeface="Arial" pitchFamily="34" charset="0"/>
+                <a:ea typeface="Arial" pitchFamily="34" charset="-122"/>
+                <a:cs typeface="Arial" pitchFamily="34" charset="-120"/>
+              </a:rPr>
+              <a:t>SPIELREGELN</a:t>
+            </a:r>
+            <a:endParaRPr lang="en-US" sz="1150" dirty="0"/>
+          </a:p>
+        </p:txBody>
+      </p:sp>
+      <p:sp>
+        <p:nvSpPr>
+          <p:cNvPr id="4" name="Text 2"/>
+          <p:cNvSpPr/>
+          <p:nvPr/>
+        </p:nvSpPr>
+        <p:spPr>
+          <a:xfrm>
+            <a:off x="566928" y="731520"/>
+            <a:ext cx="8010144" cy="603504"/>
+          </a:xfrm>
+          <a:prstGeom prst="rect">
+            <a:avLst/>
+          </a:prstGeom>
+          <a:noFill/>
+          <a:ln/>
+        </p:spPr>
+        <p:txBody>
+          <a:bodyPr wrap="square" lIns="0" tIns="0" rIns="0" bIns="0" rtlCol="0" anchor="t"/>
+          <a:lstStyle/>
+          <a:p>
+            <a:pPr indent="0" marL="0">
+              <a:buNone/>
+            </a:pPr>
+            <a:r>
+              <a:rPr lang="en-US" sz="2600" b="1" dirty="0">
+                <a:solidFill>
+                  <a:srgbClr val="272E52"/>
+                </a:solidFill>
+                <a:latin typeface="Arial" pitchFamily="34" charset="0"/>
+                <a:ea typeface="Arial" pitchFamily="34" charset="-122"/>
+                <a:cs typeface="Arial" pitchFamily="34" charset="-120"/>
+              </a:rPr>
+              <a:t>So arbeitet ihr</a:t>
+            </a:r>
+            <a:endParaRPr lang="en-US" sz="2600" dirty="0"/>
+          </a:p>
+        </p:txBody>
+      </p:sp>
+      <p:sp>
+        <p:nvSpPr>
+          <p:cNvPr id="5" name="Text 3"/>
+          <p:cNvSpPr/>
+          <p:nvPr/>
+        </p:nvSpPr>
+        <p:spPr>
+          <a:xfrm>
+            <a:off x="566928" y="1700784"/>
+            <a:ext cx="8010144" cy="2011680"/>
+          </a:xfrm>
+          <a:prstGeom prst="rect">
+            <a:avLst/>
+          </a:prstGeom>
+          <a:noFill/>
+          <a:ln/>
+        </p:spPr>
+        <p:txBody>
+          <a:bodyPr wrap="square" lIns="0" tIns="0" rIns="0" bIns="0" rtlCol="0" anchor="t"/>
+          <a:lstStyle/>
+          <a:p>
+            <a:pPr indent="0" marL="0">
+              <a:lnSpc>
+                <a:spcPct val="92000"/>
+              </a:lnSpc>
+              <a:buNone/>
+            </a:pPr>
+            <a:r>
+              <a:rPr lang="en-US" sz="1250" b="1" dirty="0">
+                <a:solidFill>
+                  <a:srgbClr val="9A6310"/>
+                </a:solidFill>
+                <a:latin typeface="Arial" pitchFamily="34" charset="0"/>
+                <a:ea typeface="Arial" pitchFamily="34" charset="-122"/>
+                <a:cs typeface="Arial" pitchFamily="34" charset="-120"/>
+              </a:rPr>
+              <a:t>▸   </a:t>
+            </a:r>
+            <a:pPr indent="0" marL="0">
+              <a:lnSpc>
+                <a:spcPct val="92000"/>
+              </a:lnSpc>
+              <a:spcAft>
+                <a:spcPts val="900"/>
+              </a:spcAft>
+              <a:buNone/>
+            </a:pPr>
+            <a:r>
+              <a:rPr lang="en-US" sz="1250" dirty="0">
+                <a:solidFill>
+                  <a:srgbClr val="434A63"/>
+                </a:solidFill>
+                <a:latin typeface="Arial" pitchFamily="34" charset="0"/>
+                <a:ea typeface="Arial" pitchFamily="34" charset="-122"/>
+                <a:cs typeface="Arial" pitchFamily="34" charset="-120"/>
+              </a:rPr>
+              <a:t>Gruppen zu dritt oder viert. Eine Person teilt den Bildschirm.</a:t>
+            </a:r>
+            <a:endParaRPr lang="en-US" sz="1250" dirty="0"/>
+          </a:p>
+          <a:p>
+            <a:pPr indent="0" marL="0">
+              <a:lnSpc>
+                <a:spcPct val="92000"/>
+              </a:lnSpc>
+              <a:buNone/>
+            </a:pPr>
+            <a:r>
+              <a:rPr lang="en-US" sz="1250" b="1" dirty="0">
+                <a:solidFill>
+                  <a:srgbClr val="9A6310"/>
+                </a:solidFill>
+                <a:latin typeface="Arial" pitchFamily="34" charset="0"/>
+                <a:ea typeface="Arial" pitchFamily="34" charset="-122"/>
+                <a:cs typeface="Arial" pitchFamily="34" charset="-120"/>
+              </a:rPr>
+              <a:t>▸   </a:t>
+            </a:r>
+            <a:pPr indent="0" marL="0">
+              <a:lnSpc>
+                <a:spcPct val="92000"/>
+              </a:lnSpc>
+              <a:spcAft>
+                <a:spcPts val="900"/>
+              </a:spcAft>
+              <a:buNone/>
+            </a:pPr>
+            <a:r>
+              <a:rPr lang="en-US" sz="1250" dirty="0">
+                <a:solidFill>
+                  <a:srgbClr val="434A63"/>
+                </a:solidFill>
+                <a:latin typeface="Arial" pitchFamily="34" charset="0"/>
+                <a:ea typeface="Arial" pitchFamily="34" charset="-122"/>
+                <a:cs typeface="Arial" pitchFamily="34" charset="-120"/>
+              </a:rPr>
+              <a:t>Öffnet den Link zur Kursseite jetzt – im Breakout-Raum seht ihr diese Folie nicht mehr.</a:t>
+            </a:r>
+            <a:endParaRPr lang="en-US" sz="1250" dirty="0"/>
+          </a:p>
+          <a:p>
+            <a:pPr indent="0" marL="0">
+              <a:lnSpc>
+                <a:spcPct val="92000"/>
+              </a:lnSpc>
+              <a:buNone/>
+            </a:pPr>
+            <a:r>
+              <a:rPr lang="en-US" sz="1250" b="1" dirty="0">
+                <a:solidFill>
+                  <a:srgbClr val="9A6310"/>
+                </a:solidFill>
+                <a:latin typeface="Arial" pitchFamily="34" charset="0"/>
+                <a:ea typeface="Arial" pitchFamily="34" charset="-122"/>
+                <a:cs typeface="Arial" pitchFamily="34" charset="-120"/>
+              </a:rPr>
+              <a:t>▸   </a:t>
+            </a:r>
+            <a:pPr indent="0" marL="0">
+              <a:lnSpc>
+                <a:spcPct val="92000"/>
+              </a:lnSpc>
+              <a:spcAft>
+                <a:spcPts val="900"/>
+              </a:spcAft>
+              <a:buNone/>
+            </a:pPr>
+            <a:r>
+              <a:rPr lang="en-US" sz="1250" dirty="0">
+                <a:solidFill>
+                  <a:srgbClr val="434A63"/>
+                </a:solidFill>
+                <a:latin typeface="Arial" pitchFamily="34" charset="0"/>
+                <a:ea typeface="Arial" pitchFamily="34" charset="-122"/>
+                <a:cs typeface="Arial" pitchFamily="34" charset="-120"/>
+              </a:rPr>
+              <a:t>Rechnet laut und gemeinsam. Wer einen anderen Weg hat: sagen, nicht schweigen.</a:t>
+            </a:r>
+            <a:endParaRPr lang="en-US" sz="1250" dirty="0"/>
+          </a:p>
+          <a:p>
+            <a:pPr indent="0" marL="0">
+              <a:lnSpc>
+                <a:spcPct val="92000"/>
+              </a:lnSpc>
+              <a:buNone/>
+            </a:pPr>
+            <a:r>
+              <a:rPr lang="en-US" sz="1250" b="1" dirty="0">
+                <a:solidFill>
+                  <a:srgbClr val="9A6310"/>
+                </a:solidFill>
+                <a:latin typeface="Arial" pitchFamily="34" charset="0"/>
+                <a:ea typeface="Arial" pitchFamily="34" charset="-122"/>
+                <a:cs typeface="Arial" pitchFamily="34" charset="-120"/>
+              </a:rPr>
+              <a:t>▸   </a:t>
+            </a:r>
+            <a:pPr indent="0" marL="0">
+              <a:lnSpc>
+                <a:spcPct val="92000"/>
+              </a:lnSpc>
+              <a:spcAft>
+                <a:spcPts val="900"/>
+              </a:spcAft>
+              <a:buNone/>
+            </a:pPr>
+            <a:r>
+              <a:rPr lang="en-US" sz="1250" dirty="0">
+                <a:solidFill>
+                  <a:srgbClr val="434A63"/>
+                </a:solidFill>
+                <a:latin typeface="Arial" pitchFamily="34" charset="0"/>
+                <a:ea typeface="Arial" pitchFamily="34" charset="-122"/>
+                <a:cs typeface="Arial" pitchFamily="34" charset="-120"/>
+              </a:rPr>
+              <a:t>Der Online-Rechner ist der Schiedsrichter – aber erst nach eurer Rechnung, nicht statt ihr.</a:t>
+            </a:r>
+            <a:endParaRPr lang="en-US" sz="1250" dirty="0"/>
+          </a:p>
+          <a:p>
+            <a:pPr indent="0" marL="0">
+              <a:lnSpc>
+                <a:spcPct val="92000"/>
+              </a:lnSpc>
+              <a:buNone/>
+            </a:pPr>
+            <a:r>
+              <a:rPr lang="en-US" sz="1250" b="1" dirty="0">
+                <a:solidFill>
+                  <a:srgbClr val="9A6310"/>
+                </a:solidFill>
+                <a:latin typeface="Arial" pitchFamily="34" charset="0"/>
+                <a:ea typeface="Arial" pitchFamily="34" charset="-122"/>
+                <a:cs typeface="Arial" pitchFamily="34" charset="-120"/>
+              </a:rPr>
+              <a:t>▸   </a:t>
+            </a:r>
+            <a:pPr indent="0" marL="0">
+              <a:lnSpc>
+                <a:spcPct val="92000"/>
+              </a:lnSpc>
+              <a:spcAft>
+                <a:spcPts val="900"/>
+              </a:spcAft>
+              <a:buNone/>
+            </a:pPr>
+            <a:r>
+              <a:rPr lang="en-US" sz="1250" dirty="0">
+                <a:solidFill>
+                  <a:srgbClr val="434A63"/>
+                </a:solidFill>
+                <a:latin typeface="Arial" pitchFamily="34" charset="0"/>
+                <a:ea typeface="Arial" pitchFamily="34" charset="-122"/>
+                <a:cs typeface="Arial" pitchFamily="34" charset="-120"/>
+              </a:rPr>
+              <a:t>Wenn es klemmt: in eurem Raum auf „Um Hilfe bitten“ klicken. Dann komme ich rein.</a:t>
+            </a:r>
+            <a:endParaRPr lang="en-US" sz="1250" dirty="0"/>
+          </a:p>
+        </p:txBody>
+      </p:sp>
+      <p:sp>
+        <p:nvSpPr>
+          <p:cNvPr id="6" name="Shape 4"/>
+          <p:cNvSpPr/>
+          <p:nvPr/>
+        </p:nvSpPr>
+        <p:spPr>
+          <a:xfrm>
+            <a:off x="566928" y="3602736"/>
+            <a:ext cx="8010144" cy="822960"/>
           </a:xfrm>
           <a:prstGeom prst="rect">
             <a:avLst/>
           </a:prstGeom>
           <a:solidFill>
-            <a:srgbClr val="3843AF"/>
+            <a:srgbClr val="F5F6FC"/>
           </a:solidFill>
           <a:ln/>
         </p:spPr>
       </p:sp>
       <p:sp>
         <p:nvSpPr>
-          <p:cNvPr id="4" name="Text 2"/>
-          <p:cNvSpPr/>
-          <p:nvPr/>
-        </p:nvSpPr>
-        <p:spPr>
-          <a:xfrm>
-            <a:off x="6629400" y="1463040"/>
-            <a:ext cx="2194560" cy="1737360"/>
-          </a:xfrm>
-          <a:prstGeom prst="rect">
-            <a:avLst/>
-          </a:prstGeom>
-          <a:noFill/>
-          <a:ln/>
-        </p:spPr>
-        <p:txBody>
-          <a:bodyPr wrap="square" lIns="0" tIns="0" rIns="0" bIns="0" rtlCol="0" anchor="ctr"/>
-          <a:lstStyle/>
-          <a:p>
-            <a:pPr algn="ctr" indent="0" marL="0">
-              <a:buNone/>
-            </a:pPr>
-            <a:r>
-              <a:rPr lang="en-US" sz="8400" b="1" dirty="0">
-                <a:solidFill>
-                  <a:srgbClr val="3843AF"/>
-                </a:solidFill>
-                <a:latin typeface="Arial" pitchFamily="34" charset="0"/>
-                <a:ea typeface="Arial" pitchFamily="34" charset="-122"/>
-                <a:cs typeface="Arial" pitchFamily="34" charset="-120"/>
-              </a:rPr>
-              <a:t>05</a:t>
-            </a:r>
-            <a:endParaRPr lang="en-US" sz="8400" dirty="0"/>
-          </a:p>
-        </p:txBody>
-      </p:sp>
-      <p:sp>
-        <p:nvSpPr>
-          <p:cNvPr id="5" name="Shape 3"/>
-          <p:cNvSpPr/>
-          <p:nvPr/>
-        </p:nvSpPr>
-        <p:spPr>
-          <a:xfrm>
-            <a:off x="566928" y="1883664"/>
-            <a:ext cx="475488" cy="50292"/>
+          <p:cNvPr id="7" name="Shape 5"/>
+          <p:cNvSpPr/>
+          <p:nvPr/>
+        </p:nvSpPr>
+        <p:spPr>
+          <a:xfrm>
+            <a:off x="566928" y="3602736"/>
+            <a:ext cx="41148" cy="822960"/>
           </a:xfrm>
           <a:prstGeom prst="rect">
             <a:avLst/>
           </a:prstGeom>
           <a:solidFill>
-            <a:srgbClr val="3843AF"/>
+            <a:srgbClr val="9A6310"/>
           </a:solidFill>
           <a:ln/>
         </p:spPr>
       </p:sp>
       <p:sp>
         <p:nvSpPr>
-          <p:cNvPr id="6" name="Text 4"/>
-          <p:cNvSpPr/>
-          <p:nvPr/>
-        </p:nvSpPr>
-        <p:spPr>
-          <a:xfrm>
-            <a:off x="566928" y="2084832"/>
-            <a:ext cx="5394960" cy="868680"/>
+          <p:cNvPr id="8" name="Text 6"/>
+          <p:cNvSpPr/>
+          <p:nvPr/>
+        </p:nvSpPr>
+        <p:spPr>
+          <a:xfrm>
+            <a:off x="804672" y="3749040"/>
+            <a:ext cx="7607808" cy="242062"/>
           </a:xfrm>
           <a:prstGeom prst="rect">
             <a:avLst/>
@@ -9202,7 +9292,7 @@
               <a:buNone/>
             </a:pPr>
             <a:r>
-              <a:rPr lang="en-US" sz="3000" b="1" dirty="0">
+              <a:rPr lang="en-US" sz="1300" b="1" dirty="0">
                 <a:solidFill>
                   <a:srgbClr val="272E52"/>
                 </a:solidFill>
@@ -9210,22 +9300,22 @@
                 <a:ea typeface="Arial" pitchFamily="34" charset="-122"/>
                 <a:cs typeface="Arial" pitchFamily="34" charset="-120"/>
               </a:rPr>
-              <a:t>Eure Netzpläne</a:t>
-            </a:r>
-            <a:endParaRPr lang="en-US" sz="3000" dirty="0"/>
-          </a:p>
-        </p:txBody>
-      </p:sp>
-      <p:sp>
-        <p:nvSpPr>
-          <p:cNvPr id="7" name="Text 5"/>
-          <p:cNvSpPr/>
-          <p:nvPr/>
-        </p:nvSpPr>
-        <p:spPr>
-          <a:xfrm>
-            <a:off x="566928" y="3017520"/>
-            <a:ext cx="5394960" cy="548640"/>
+              <a:t>Um 20:15 sind alle wieder hier</a:t>
+            </a:r>
+            <a:endParaRPr lang="en-US" sz="1300" dirty="0"/>
+          </a:p>
+        </p:txBody>
+      </p:sp>
+      <p:sp>
+        <p:nvSpPr>
+          <p:cNvPr id="9" name="Text 7"/>
+          <p:cNvSpPr/>
+          <p:nvPr/>
+        </p:nvSpPr>
+        <p:spPr>
+          <a:xfrm>
+            <a:off x="804672" y="4036822"/>
+            <a:ext cx="7607808" cy="270002"/>
           </a:xfrm>
           <a:prstGeom prst="rect">
             <a:avLst/>
@@ -9238,10 +9328,75 @@
           <a:lstStyle/>
           <a:p>
             <a:pPr indent="0" marL="0">
-              <a:buNone/>
-            </a:pPr>
-            <a:r>
-              <a:rPr lang="en-US" sz="1350" dirty="0">
+              <a:lnSpc>
+                <a:spcPct val="92000"/>
+              </a:lnSpc>
+              <a:buNone/>
+            </a:pPr>
+            <a:r>
+              <a:rPr lang="en-US" sz="1150" dirty="0">
+                <a:solidFill>
+                  <a:srgbClr val="434A63"/>
+                </a:solidFill>
+                <a:latin typeface="Arial" pitchFamily="34" charset="0"/>
+                <a:ea typeface="Arial" pitchFamily="34" charset="-122"/>
+                <a:cs typeface="Arial" pitchFamily="34" charset="-120"/>
+              </a:rPr>
+              <a:t>Sprecher wie gehabt. Jede Gruppe zeigt nachher ihre Planungstabelle.</a:t>
+            </a:r>
+            <a:endParaRPr lang="en-US" sz="1150" dirty="0"/>
+          </a:p>
+        </p:txBody>
+      </p:sp>
+      <p:sp>
+        <p:nvSpPr>
+          <p:cNvPr id="10" name="Shape 8"/>
+          <p:cNvSpPr/>
+          <p:nvPr/>
+        </p:nvSpPr>
+        <p:spPr>
+          <a:xfrm>
+            <a:off x="566928" y="4631436"/>
+            <a:ext cx="8010144" cy="0"/>
+          </a:xfrm>
+          <a:prstGeom prst="line">
+            <a:avLst/>
+          </a:prstGeom>
+          <a:noFill/>
+          <a:ln w="9525">
+            <a:solidFill>
+              <a:srgbClr val="DFE3F0"/>
+            </a:solidFill>
+            <a:prstDash val="solid"/>
+          </a:ln>
+        </p:spPr>
+      </p:sp>
+      <p:sp>
+        <p:nvSpPr>
+          <p:cNvPr id="11" name="Text 9"/>
+          <p:cNvSpPr/>
+          <p:nvPr/>
+        </p:nvSpPr>
+        <p:spPr>
+          <a:xfrm>
+            <a:off x="566928" y="4722876"/>
+            <a:ext cx="5029200" cy="237744"/>
+          </a:xfrm>
+          <a:prstGeom prst="rect">
+            <a:avLst/>
+          </a:prstGeom>
+          <a:noFill/>
+          <a:ln/>
+        </p:spPr>
+        <p:txBody>
+          <a:bodyPr wrap="square" lIns="0" tIns="0" rIns="0" bIns="0" rtlCol="0" anchor="ctr"/>
+          <a:lstStyle/>
+          <a:p>
+            <a:pPr indent="0" marL="0">
+              <a:buNone/>
+            </a:pPr>
+            <a:r>
+              <a:rPr lang="en-US" sz="1050" spc="30" kern="0" dirty="0">
                 <a:solidFill>
                   <a:srgbClr val="5C6377"/>
                 </a:solidFill>
@@ -9249,9 +9404,48 @@
                 <a:ea typeface="Arial" pitchFamily="34" charset="-122"/>
                 <a:cs typeface="Arial" pitchFamily="34" charset="-120"/>
               </a:rPr>
-              <a:t>Vier Lösungen, ein Vergleich – und die Probe aufs Exempel</a:t>
-            </a:r>
-            <a:endParaRPr lang="en-US" sz="1350" dirty="0"/>
+              <a:t>Breakout</a:t>
+            </a:r>
+            <a:endParaRPr lang="en-US" sz="1050" dirty="0"/>
+          </a:p>
+        </p:txBody>
+      </p:sp>
+      <p:sp>
+        <p:nvSpPr>
+          <p:cNvPr id="12" name="Text 10"/>
+          <p:cNvSpPr/>
+          <p:nvPr/>
+        </p:nvSpPr>
+        <p:spPr>
+          <a:xfrm>
+            <a:off x="8028432" y="4722876"/>
+            <a:ext cx="548640" cy="237744"/>
+          </a:xfrm>
+          <a:prstGeom prst="rect">
+            <a:avLst/>
+          </a:prstGeom>
+          <a:noFill/>
+          <a:ln/>
+        </p:spPr>
+        <p:txBody>
+          <a:bodyPr wrap="square" lIns="0" tIns="0" rIns="0" bIns="0" rtlCol="0" anchor="ctr"/>
+          <a:lstStyle/>
+          <a:p>
+            <a:pPr algn="r" indent="0" marL="0">
+              <a:buNone/>
+            </a:pPr>
+            <a:r>
+              <a:rPr lang="en-US" sz="1050" dirty="0">
+                <a:solidFill>
+                  <a:srgbClr val="5C6377"/>
+                </a:solidFill>
+                <a:latin typeface="Arial" pitchFamily="34" charset="0"/>
+                <a:ea typeface="Arial" pitchFamily="34" charset="-122"/>
+                <a:cs typeface="Arial" pitchFamily="34" charset="-120"/>
+              </a:rPr>
+              <a:t>17/21</a:t>
+            </a:r>
+            <a:endParaRPr lang="en-US" sz="1050" dirty="0"/>
           </a:p>
         </p:txBody>
       </p:sp>
@@ -9295,8 +9489,28 @@
         </p:nvSpPr>
         <p:spPr>
           <a:xfrm>
-            <a:off x="566928" y="201168"/>
-            <a:ext cx="475488" cy="50292"/>
+            <a:off x="6355080" y="0"/>
+            <a:ext cx="2788920" cy="5143500"/>
+          </a:xfrm>
+          <a:prstGeom prst="rect">
+            <a:avLst/>
+          </a:prstGeom>
+          <a:solidFill>
+            <a:srgbClr val="EEF0FB"/>
+          </a:solidFill>
+          <a:ln/>
+        </p:spPr>
+      </p:sp>
+      <p:sp>
+        <p:nvSpPr>
+          <p:cNvPr id="3" name="Shape 1"/>
+          <p:cNvSpPr/>
+          <p:nvPr/>
+        </p:nvSpPr>
+        <p:spPr>
+          <a:xfrm>
+            <a:off x="6355080" y="0"/>
+            <a:ext cx="45720" cy="5143500"/>
           </a:xfrm>
           <a:prstGeom prst="rect">
             <a:avLst/>
@@ -9309,30 +9523,30 @@
       </p:sp>
       <p:sp>
         <p:nvSpPr>
-          <p:cNvPr id="3" name="Text 1"/>
-          <p:cNvSpPr/>
-          <p:nvPr/>
-        </p:nvSpPr>
-        <p:spPr>
-          <a:xfrm>
-            <a:off x="566928" y="384048"/>
-            <a:ext cx="8010144" cy="237744"/>
-          </a:xfrm>
-          <a:prstGeom prst="rect">
-            <a:avLst/>
-          </a:prstGeom>
-          <a:noFill/>
-          <a:ln/>
-        </p:spPr>
-        <p:txBody>
-          <a:bodyPr wrap="square" lIns="0" tIns="0" rIns="0" bIns="0" rtlCol="0" anchor="ctr"/>
-          <a:lstStyle/>
-          <a:p>
-            <a:pPr indent="0" marL="0">
-              <a:buNone/>
-            </a:pPr>
-            <a:r>
-              <a:rPr lang="en-US" sz="1150" b="1" spc="180" kern="0" dirty="0">
+          <p:cNvPr id="4" name="Text 2"/>
+          <p:cNvSpPr/>
+          <p:nvPr/>
+        </p:nvSpPr>
+        <p:spPr>
+          <a:xfrm>
+            <a:off x="6629400" y="1463040"/>
+            <a:ext cx="2194560" cy="1737360"/>
+          </a:xfrm>
+          <a:prstGeom prst="rect">
+            <a:avLst/>
+          </a:prstGeom>
+          <a:noFill/>
+          <a:ln/>
+        </p:spPr>
+        <p:txBody>
+          <a:bodyPr wrap="square" lIns="0" tIns="0" rIns="0" bIns="0" rtlCol="0" anchor="ctr"/>
+          <a:lstStyle/>
+          <a:p>
+            <a:pPr algn="ctr" indent="0" marL="0">
+              <a:buNone/>
+            </a:pPr>
+            <a:r>
+              <a:rPr lang="en-US" sz="8400" b="1" dirty="0">
                 <a:solidFill>
                   <a:srgbClr val="3843AF"/>
                 </a:solidFill>
@@ -9340,48 +9554,9 @@
                 <a:ea typeface="Arial" pitchFamily="34" charset="-122"/>
                 <a:cs typeface="Arial" pitchFamily="34" charset="-120"/>
               </a:rPr>
-              <a:t>AUSWERTUNG · 35 MINUTEN</a:t>
-            </a:r>
-            <a:endParaRPr lang="en-US" sz="1150" dirty="0"/>
-          </a:p>
-        </p:txBody>
-      </p:sp>
-      <p:sp>
-        <p:nvSpPr>
-          <p:cNvPr id="4" name="Text 2"/>
-          <p:cNvSpPr/>
-          <p:nvPr/>
-        </p:nvSpPr>
-        <p:spPr>
-          <a:xfrm>
-            <a:off x="566928" y="731520"/>
-            <a:ext cx="8010144" cy="603504"/>
-          </a:xfrm>
-          <a:prstGeom prst="rect">
-            <a:avLst/>
-          </a:prstGeom>
-          <a:noFill/>
-          <a:ln/>
-        </p:spPr>
-        <p:txBody>
-          <a:bodyPr wrap="square" lIns="0" tIns="0" rIns="0" bIns="0" rtlCol="0" anchor="t"/>
-          <a:lstStyle/>
-          <a:p>
-            <a:pPr indent="0" marL="0">
-              <a:buNone/>
-            </a:pPr>
-            <a:r>
-              <a:rPr lang="en-US" sz="2600" b="1" dirty="0">
-                <a:solidFill>
-                  <a:srgbClr val="272E52"/>
-                </a:solidFill>
-                <a:latin typeface="Arial" pitchFamily="34" charset="0"/>
-                <a:ea typeface="Arial" pitchFamily="34" charset="-122"/>
-                <a:cs typeface="Arial" pitchFamily="34" charset="-120"/>
-              </a:rPr>
-              <a:t>Das gehen wir gemeinsam durch</a:t>
-            </a:r>
-            <a:endParaRPr lang="en-US" sz="2600" dirty="0"/>
+              <a:t>05</a:t>
+            </a:r>
+            <a:endParaRPr lang="en-US" sz="8400" dirty="0"/>
           </a:p>
         </p:txBody>
       </p:sp>
@@ -9393,478 +9568,8 @@
         </p:nvSpPr>
         <p:spPr>
           <a:xfrm>
-            <a:off x="438912" y="1737360"/>
-            <a:ext cx="8266176" cy="384048"/>
-          </a:xfrm>
-          <a:prstGeom prst="rect">
-            <a:avLst/>
-          </a:prstGeom>
-          <a:solidFill>
-            <a:srgbClr val="F5F6FC"/>
-          </a:solidFill>
-          <a:ln/>
-        </p:spPr>
-      </p:sp>
-      <p:sp>
-        <p:nvSpPr>
-          <p:cNvPr id="6" name="Text 4"/>
-          <p:cNvSpPr/>
-          <p:nvPr/>
-        </p:nvSpPr>
-        <p:spPr>
-          <a:xfrm>
-            <a:off x="566928" y="1737360"/>
-            <a:ext cx="411480" cy="384048"/>
-          </a:xfrm>
-          <a:prstGeom prst="rect">
-            <a:avLst/>
-          </a:prstGeom>
-          <a:noFill/>
-          <a:ln/>
-        </p:spPr>
-        <p:txBody>
-          <a:bodyPr wrap="square" lIns="0" tIns="0" rIns="0" bIns="0" rtlCol="0" anchor="ctr"/>
-          <a:lstStyle/>
-          <a:p>
-            <a:pPr indent="0" marL="0">
-              <a:buNone/>
-            </a:pPr>
-            <a:r>
-              <a:rPr lang="en-US" sz="1200" b="1" dirty="0">
-                <a:solidFill>
-                  <a:srgbClr val="3843AF"/>
-                </a:solidFill>
-                <a:latin typeface="Courier New" pitchFamily="34" charset="0"/>
-                <a:ea typeface="Courier New" pitchFamily="34" charset="-122"/>
-                <a:cs typeface="Courier New" pitchFamily="34" charset="-120"/>
-              </a:rPr>
-              <a:t>1</a:t>
-            </a:r>
-            <a:endParaRPr lang="en-US" sz="1200" dirty="0"/>
-          </a:p>
-        </p:txBody>
-      </p:sp>
-      <p:sp>
-        <p:nvSpPr>
-          <p:cNvPr id="7" name="Text 5"/>
-          <p:cNvSpPr/>
-          <p:nvPr/>
-        </p:nvSpPr>
-        <p:spPr>
-          <a:xfrm>
-            <a:off x="978408" y="1737360"/>
-            <a:ext cx="7598664" cy="384048"/>
-          </a:xfrm>
-          <a:prstGeom prst="rect">
-            <a:avLst/>
-          </a:prstGeom>
-          <a:noFill/>
-          <a:ln/>
-        </p:spPr>
-        <p:txBody>
-          <a:bodyPr wrap="square" lIns="0" tIns="0" rIns="0" bIns="0" rtlCol="0" anchor="ctr"/>
-          <a:lstStyle/>
-          <a:p>
-            <a:pPr indent="0" marL="0">
-              <a:buNone/>
-            </a:pPr>
-            <a:r>
-              <a:rPr lang="en-US" sz="1200" dirty="0">
-                <a:solidFill>
-                  <a:srgbClr val="434A63"/>
-                </a:solidFill>
-                <a:latin typeface="Arial" pitchFamily="34" charset="0"/>
-                <a:ea typeface="Arial" pitchFamily="34" charset="-122"/>
-                <a:cs typeface="Arial" pitchFamily="34" charset="-120"/>
-              </a:rPr>
-              <a:t>Jede Gruppe zeigt ihre Planungstabelle – kurz, nur die Eckwerte</a:t>
-            </a:r>
-            <a:endParaRPr lang="en-US" sz="1200" dirty="0"/>
-          </a:p>
-        </p:txBody>
-      </p:sp>
-      <p:sp>
-        <p:nvSpPr>
-          <p:cNvPr id="8" name="Text 6"/>
-          <p:cNvSpPr/>
-          <p:nvPr/>
-        </p:nvSpPr>
-        <p:spPr>
-          <a:xfrm>
-            <a:off x="566928" y="2121408"/>
-            <a:ext cx="411480" cy="384048"/>
-          </a:xfrm>
-          <a:prstGeom prst="rect">
-            <a:avLst/>
-          </a:prstGeom>
-          <a:noFill/>
-          <a:ln/>
-        </p:spPr>
-        <p:txBody>
-          <a:bodyPr wrap="square" lIns="0" tIns="0" rIns="0" bIns="0" rtlCol="0" anchor="ctr"/>
-          <a:lstStyle/>
-          <a:p>
-            <a:pPr indent="0" marL="0">
-              <a:buNone/>
-            </a:pPr>
-            <a:r>
-              <a:rPr lang="en-US" sz="1200" b="1" dirty="0">
-                <a:solidFill>
-                  <a:srgbClr val="3843AF"/>
-                </a:solidFill>
-                <a:latin typeface="Courier New" pitchFamily="34" charset="0"/>
-                <a:ea typeface="Courier New" pitchFamily="34" charset="-122"/>
-                <a:cs typeface="Courier New" pitchFamily="34" charset="-120"/>
-              </a:rPr>
-              <a:t>2</a:t>
-            </a:r>
-            <a:endParaRPr lang="en-US" sz="1200" dirty="0"/>
-          </a:p>
-        </p:txBody>
-      </p:sp>
-      <p:sp>
-        <p:nvSpPr>
-          <p:cNvPr id="9" name="Text 7"/>
-          <p:cNvSpPr/>
-          <p:nvPr/>
-        </p:nvSpPr>
-        <p:spPr>
-          <a:xfrm>
-            <a:off x="978408" y="2121408"/>
-            <a:ext cx="7598664" cy="384048"/>
-          </a:xfrm>
-          <a:prstGeom prst="rect">
-            <a:avLst/>
-          </a:prstGeom>
-          <a:noFill/>
-          <a:ln/>
-        </p:spPr>
-        <p:txBody>
-          <a:bodyPr wrap="square" lIns="0" tIns="0" rIns="0" bIns="0" rtlCol="0" anchor="ctr"/>
-          <a:lstStyle/>
-          <a:p>
-            <a:pPr indent="0" marL="0">
-              <a:buNone/>
-            </a:pPr>
-            <a:r>
-              <a:rPr lang="en-US" sz="1200" dirty="0">
-                <a:solidFill>
-                  <a:srgbClr val="434A63"/>
-                </a:solidFill>
-                <a:latin typeface="Arial" pitchFamily="34" charset="0"/>
-                <a:ea typeface="Arial" pitchFamily="34" charset="-122"/>
-                <a:cs typeface="Arial" pitchFamily="34" charset="-120"/>
-              </a:rPr>
-              <a:t>Vergleich: Wo unterscheiden sich die Pläne – und sind beide richtig?</a:t>
-            </a:r>
-            <a:endParaRPr lang="en-US" sz="1200" dirty="0"/>
-          </a:p>
-        </p:txBody>
-      </p:sp>
-      <p:sp>
-        <p:nvSpPr>
-          <p:cNvPr id="10" name="Shape 8"/>
-          <p:cNvSpPr/>
-          <p:nvPr/>
-        </p:nvSpPr>
-        <p:spPr>
-          <a:xfrm>
-            <a:off x="438912" y="2505456"/>
-            <a:ext cx="8266176" cy="384048"/>
-          </a:xfrm>
-          <a:prstGeom prst="rect">
-            <a:avLst/>
-          </a:prstGeom>
-          <a:solidFill>
-            <a:srgbClr val="F5F6FC"/>
-          </a:solidFill>
-          <a:ln/>
-        </p:spPr>
-      </p:sp>
-      <p:sp>
-        <p:nvSpPr>
-          <p:cNvPr id="11" name="Text 9"/>
-          <p:cNvSpPr/>
-          <p:nvPr/>
-        </p:nvSpPr>
-        <p:spPr>
-          <a:xfrm>
-            <a:off x="566928" y="2505456"/>
-            <a:ext cx="411480" cy="384048"/>
-          </a:xfrm>
-          <a:prstGeom prst="rect">
-            <a:avLst/>
-          </a:prstGeom>
-          <a:noFill/>
-          <a:ln/>
-        </p:spPr>
-        <p:txBody>
-          <a:bodyPr wrap="square" lIns="0" tIns="0" rIns="0" bIns="0" rtlCol="0" anchor="ctr"/>
-          <a:lstStyle/>
-          <a:p>
-            <a:pPr indent="0" marL="0">
-              <a:buNone/>
-            </a:pPr>
-            <a:r>
-              <a:rPr lang="en-US" sz="1200" b="1" dirty="0">
-                <a:solidFill>
-                  <a:srgbClr val="3843AF"/>
-                </a:solidFill>
-                <a:latin typeface="Courier New" pitchFamily="34" charset="0"/>
-                <a:ea typeface="Courier New" pitchFamily="34" charset="-122"/>
-                <a:cs typeface="Courier New" pitchFamily="34" charset="-120"/>
-              </a:rPr>
-              <a:t>3</a:t>
-            </a:r>
-            <a:endParaRPr lang="en-US" sz="1200" dirty="0"/>
-          </a:p>
-        </p:txBody>
-      </p:sp>
-      <p:sp>
-        <p:nvSpPr>
-          <p:cNvPr id="12" name="Text 10"/>
-          <p:cNvSpPr/>
-          <p:nvPr/>
-        </p:nvSpPr>
-        <p:spPr>
-          <a:xfrm>
-            <a:off x="978408" y="2505456"/>
-            <a:ext cx="7598664" cy="384048"/>
-          </a:xfrm>
-          <a:prstGeom prst="rect">
-            <a:avLst/>
-          </a:prstGeom>
-          <a:noFill/>
-          <a:ln/>
-        </p:spPr>
-        <p:txBody>
-          <a:bodyPr wrap="square" lIns="0" tIns="0" rIns="0" bIns="0" rtlCol="0" anchor="ctr"/>
-          <a:lstStyle/>
-          <a:p>
-            <a:pPr indent="0" marL="0">
-              <a:buNone/>
-            </a:pPr>
-            <a:r>
-              <a:rPr lang="en-US" sz="1200" dirty="0">
-                <a:solidFill>
-                  <a:srgbClr val="434A63"/>
-                </a:solidFill>
-                <a:latin typeface="Arial" pitchFamily="34" charset="0"/>
-                <a:ea typeface="Arial" pitchFamily="34" charset="-122"/>
-                <a:cs typeface="Arial" pitchFamily="34" charset="-120"/>
-              </a:rPr>
-              <a:t>Die Probe: Passen alle Blöcke zusammen in das /24?</a:t>
-            </a:r>
-            <a:endParaRPr lang="en-US" sz="1200" dirty="0"/>
-          </a:p>
-        </p:txBody>
-      </p:sp>
-      <p:sp>
-        <p:nvSpPr>
-          <p:cNvPr id="13" name="Text 11"/>
-          <p:cNvSpPr/>
-          <p:nvPr/>
-        </p:nvSpPr>
-        <p:spPr>
-          <a:xfrm>
-            <a:off x="566928" y="2889504"/>
-            <a:ext cx="411480" cy="384048"/>
-          </a:xfrm>
-          <a:prstGeom prst="rect">
-            <a:avLst/>
-          </a:prstGeom>
-          <a:noFill/>
-          <a:ln/>
-        </p:spPr>
-        <p:txBody>
-          <a:bodyPr wrap="square" lIns="0" tIns="0" rIns="0" bIns="0" rtlCol="0" anchor="ctr"/>
-          <a:lstStyle/>
-          <a:p>
-            <a:pPr indent="0" marL="0">
-              <a:buNone/>
-            </a:pPr>
-            <a:r>
-              <a:rPr lang="en-US" sz="1200" b="1" dirty="0">
-                <a:solidFill>
-                  <a:srgbClr val="3843AF"/>
-                </a:solidFill>
-                <a:latin typeface="Courier New" pitchFamily="34" charset="0"/>
-                <a:ea typeface="Courier New" pitchFamily="34" charset="-122"/>
-                <a:cs typeface="Courier New" pitchFamily="34" charset="-120"/>
-              </a:rPr>
-              <a:t>4</a:t>
-            </a:r>
-            <a:endParaRPr lang="en-US" sz="1200" dirty="0"/>
-          </a:p>
-        </p:txBody>
-      </p:sp>
-      <p:sp>
-        <p:nvSpPr>
-          <p:cNvPr id="14" name="Text 12"/>
-          <p:cNvSpPr/>
-          <p:nvPr/>
-        </p:nvSpPr>
-        <p:spPr>
-          <a:xfrm>
-            <a:off x="978408" y="2889504"/>
-            <a:ext cx="7598664" cy="384048"/>
-          </a:xfrm>
-          <a:prstGeom prst="rect">
-            <a:avLst/>
-          </a:prstGeom>
-          <a:noFill/>
-          <a:ln/>
-        </p:spPr>
-        <p:txBody>
-          <a:bodyPr wrap="square" lIns="0" tIns="0" rIns="0" bIns="0" rtlCol="0" anchor="ctr"/>
-          <a:lstStyle/>
-          <a:p>
-            <a:pPr indent="0" marL="0">
-              <a:buNone/>
-            </a:pPr>
-            <a:r>
-              <a:rPr lang="en-US" sz="1200" dirty="0">
-                <a:solidFill>
-                  <a:srgbClr val="434A63"/>
-                </a:solidFill>
-                <a:latin typeface="Arial" pitchFamily="34" charset="0"/>
-                <a:ea typeface="Arial" pitchFamily="34" charset="-122"/>
-                <a:cs typeface="Arial" pitchFamily="34" charset="-120"/>
-              </a:rPr>
-              <a:t>Was bleibt übrig – und warum ist Reserve kein Fehler?</a:t>
-            </a:r>
-            <a:endParaRPr lang="en-US" sz="1200" dirty="0"/>
-          </a:p>
-        </p:txBody>
-      </p:sp>
-      <p:sp>
-        <p:nvSpPr>
-          <p:cNvPr id="15" name="Shape 13"/>
-          <p:cNvSpPr/>
-          <p:nvPr/>
-        </p:nvSpPr>
-        <p:spPr>
-          <a:xfrm>
-            <a:off x="438912" y="3273552"/>
-            <a:ext cx="8266176" cy="384048"/>
-          </a:xfrm>
-          <a:prstGeom prst="rect">
-            <a:avLst/>
-          </a:prstGeom>
-          <a:solidFill>
-            <a:srgbClr val="F5F6FC"/>
-          </a:solidFill>
-          <a:ln/>
-        </p:spPr>
-      </p:sp>
-      <p:sp>
-        <p:nvSpPr>
-          <p:cNvPr id="16" name="Text 14"/>
-          <p:cNvSpPr/>
-          <p:nvPr/>
-        </p:nvSpPr>
-        <p:spPr>
-          <a:xfrm>
-            <a:off x="566928" y="3273552"/>
-            <a:ext cx="411480" cy="384048"/>
-          </a:xfrm>
-          <a:prstGeom prst="rect">
-            <a:avLst/>
-          </a:prstGeom>
-          <a:noFill/>
-          <a:ln/>
-        </p:spPr>
-        <p:txBody>
-          <a:bodyPr wrap="square" lIns="0" tIns="0" rIns="0" bIns="0" rtlCol="0" anchor="ctr"/>
-          <a:lstStyle/>
-          <a:p>
-            <a:pPr indent="0" marL="0">
-              <a:buNone/>
-            </a:pPr>
-            <a:r>
-              <a:rPr lang="en-US" sz="1200" b="1" dirty="0">
-                <a:solidFill>
-                  <a:srgbClr val="3843AF"/>
-                </a:solidFill>
-                <a:latin typeface="Courier New" pitchFamily="34" charset="0"/>
-                <a:ea typeface="Courier New" pitchFamily="34" charset="-122"/>
-                <a:cs typeface="Courier New" pitchFamily="34" charset="-120"/>
-              </a:rPr>
-              <a:t>5</a:t>
-            </a:r>
-            <a:endParaRPr lang="en-US" sz="1200" dirty="0"/>
-          </a:p>
-        </p:txBody>
-      </p:sp>
-      <p:sp>
-        <p:nvSpPr>
-          <p:cNvPr id="17" name="Text 15"/>
-          <p:cNvSpPr/>
-          <p:nvPr/>
-        </p:nvSpPr>
-        <p:spPr>
-          <a:xfrm>
-            <a:off x="978408" y="3273552"/>
-            <a:ext cx="7598664" cy="384048"/>
-          </a:xfrm>
-          <a:prstGeom prst="rect">
-            <a:avLst/>
-          </a:prstGeom>
-          <a:noFill/>
-          <a:ln/>
-        </p:spPr>
-        <p:txBody>
-          <a:bodyPr wrap="square" lIns="0" tIns="0" rIns="0" bIns="0" rtlCol="0" anchor="ctr"/>
-          <a:lstStyle/>
-          <a:p>
-            <a:pPr indent="0" marL="0">
-              <a:buNone/>
-            </a:pPr>
-            <a:r>
-              <a:rPr lang="en-US" sz="1200" dirty="0">
-                <a:solidFill>
-                  <a:srgbClr val="434A63"/>
-                </a:solidFill>
-                <a:latin typeface="Arial" pitchFamily="34" charset="0"/>
-                <a:ea typeface="Arial" pitchFamily="34" charset="-122"/>
-                <a:cs typeface="Arial" pitchFamily="34" charset="-120"/>
-              </a:rPr>
-              <a:t>Zum Schluss für alle: /26 – wie viele Geräte? Jetzt kann es jeder</a:t>
-            </a:r>
-            <a:endParaRPr lang="en-US" sz="1200" dirty="0"/>
-          </a:p>
-        </p:txBody>
-      </p:sp>
-      <p:sp>
-        <p:nvSpPr>
-          <p:cNvPr id="18" name="Shape 16"/>
-          <p:cNvSpPr/>
-          <p:nvPr/>
-        </p:nvSpPr>
-        <p:spPr>
-          <a:xfrm>
-            <a:off x="566928" y="3794760"/>
-            <a:ext cx="8010144" cy="548640"/>
-          </a:xfrm>
-          <a:prstGeom prst="rect">
-            <a:avLst/>
-          </a:prstGeom>
-          <a:solidFill>
-            <a:srgbClr val="EEF0FB"/>
-          </a:solidFill>
-          <a:ln/>
-        </p:spPr>
-      </p:sp>
-      <p:sp>
-        <p:nvSpPr>
-          <p:cNvPr id="19" name="Shape 17"/>
-          <p:cNvSpPr/>
-          <p:nvPr/>
-        </p:nvSpPr>
-        <p:spPr>
-          <a:xfrm>
-            <a:off x="566928" y="3794760"/>
-            <a:ext cx="41148" cy="548640"/>
+            <a:off x="566928" y="1883664"/>
+            <a:ext cx="475488" cy="50292"/>
           </a:xfrm>
           <a:prstGeom prst="rect">
             <a:avLst/>
@@ -9877,14 +9582,14 @@
       </p:sp>
       <p:sp>
         <p:nvSpPr>
-          <p:cNvPr id="20" name="Text 18"/>
-          <p:cNvSpPr/>
-          <p:nvPr/>
-        </p:nvSpPr>
-        <p:spPr>
-          <a:xfrm>
-            <a:off x="804672" y="3941064"/>
-            <a:ext cx="7607808" cy="283464"/>
+          <p:cNvPr id="6" name="Text 4"/>
+          <p:cNvSpPr/>
+          <p:nvPr/>
+        </p:nvSpPr>
+        <p:spPr>
+          <a:xfrm>
+            <a:off x="566928" y="2084832"/>
+            <a:ext cx="5394960" cy="868680"/>
           </a:xfrm>
           <a:prstGeom prst="rect">
             <a:avLst/>
@@ -9897,75 +9602,49 @@
           <a:lstStyle/>
           <a:p>
             <a:pPr indent="0" marL="0">
-              <a:lnSpc>
-                <a:spcPct val="92000"/>
-              </a:lnSpc>
-              <a:buNone/>
-            </a:pPr>
-            <a:r>
-              <a:rPr lang="en-US" sz="1150" dirty="0">
-                <a:solidFill>
-                  <a:srgbClr val="434A63"/>
-                </a:solidFill>
-                <a:latin typeface="Arial" pitchFamily="34" charset="0"/>
-                <a:ea typeface="Arial" pitchFamily="34" charset="-122"/>
-                <a:cs typeface="Arial" pitchFamily="34" charset="-120"/>
-              </a:rPr>
-              <a:t>Es gibt mehrere richtige Pläne. Falsch ist nur, was sich überlappt oder nicht reicht.</a:t>
-            </a:r>
-            <a:endParaRPr lang="en-US" sz="1150" dirty="0"/>
-          </a:p>
-        </p:txBody>
-      </p:sp>
-      <p:sp>
-        <p:nvSpPr>
-          <p:cNvPr id="21" name="Shape 19"/>
-          <p:cNvSpPr/>
-          <p:nvPr/>
-        </p:nvSpPr>
-        <p:spPr>
-          <a:xfrm>
-            <a:off x="566928" y="4631436"/>
-            <a:ext cx="8010144" cy="0"/>
-          </a:xfrm>
-          <a:prstGeom prst="line">
-            <a:avLst/>
-          </a:prstGeom>
-          <a:noFill/>
-          <a:ln w="9525">
-            <a:solidFill>
-              <a:srgbClr val="DFE3F0"/>
-            </a:solidFill>
-            <a:prstDash val="solid"/>
-          </a:ln>
-        </p:spPr>
-      </p:sp>
-      <p:sp>
-        <p:nvSpPr>
-          <p:cNvPr id="22" name="Text 20"/>
-          <p:cNvSpPr/>
-          <p:nvPr/>
-        </p:nvSpPr>
-        <p:spPr>
-          <a:xfrm>
-            <a:off x="566928" y="4722876"/>
-            <a:ext cx="5029200" cy="237744"/>
-          </a:xfrm>
-          <a:prstGeom prst="rect">
-            <a:avLst/>
-          </a:prstGeom>
-          <a:noFill/>
-          <a:ln/>
-        </p:spPr>
-        <p:txBody>
-          <a:bodyPr wrap="square" lIns="0" tIns="0" rIns="0" bIns="0" rtlCol="0" anchor="ctr"/>
-          <a:lstStyle/>
-          <a:p>
-            <a:pPr indent="0" marL="0">
-              <a:buNone/>
-            </a:pPr>
-            <a:r>
-              <a:rPr lang="en-US" sz="1050" spc="30" kern="0" dirty="0">
+              <a:buNone/>
+            </a:pPr>
+            <a:r>
+              <a:rPr lang="en-US" sz="3000" b="1" dirty="0">
+                <a:solidFill>
+                  <a:srgbClr val="272E52"/>
+                </a:solidFill>
+                <a:latin typeface="Arial" pitchFamily="34" charset="0"/>
+                <a:ea typeface="Arial" pitchFamily="34" charset="-122"/>
+                <a:cs typeface="Arial" pitchFamily="34" charset="-120"/>
+              </a:rPr>
+              <a:t>Eure Netzpläne</a:t>
+            </a:r>
+            <a:endParaRPr lang="en-US" sz="3000" dirty="0"/>
+          </a:p>
+        </p:txBody>
+      </p:sp>
+      <p:sp>
+        <p:nvSpPr>
+          <p:cNvPr id="7" name="Text 5"/>
+          <p:cNvSpPr/>
+          <p:nvPr/>
+        </p:nvSpPr>
+        <p:spPr>
+          <a:xfrm>
+            <a:off x="566928" y="3017520"/>
+            <a:ext cx="5394960" cy="548640"/>
+          </a:xfrm>
+          <a:prstGeom prst="rect">
+            <a:avLst/>
+          </a:prstGeom>
+          <a:noFill/>
+          <a:ln/>
+        </p:spPr>
+        <p:txBody>
+          <a:bodyPr wrap="square" lIns="0" tIns="0" rIns="0" bIns="0" rtlCol="0" anchor="t"/>
+          <a:lstStyle/>
+          <a:p>
+            <a:pPr indent="0" marL="0">
+              <a:buNone/>
+            </a:pPr>
+            <a:r>
+              <a:rPr lang="en-US" sz="1350" dirty="0">
                 <a:solidFill>
                   <a:srgbClr val="5C6377"/>
                 </a:solidFill>
@@ -9973,48 +9652,9 @@
                 <a:ea typeface="Arial" pitchFamily="34" charset="-122"/>
                 <a:cs typeface="Arial" pitchFamily="34" charset="-120"/>
               </a:rPr>
-              <a:t>Auswertung</a:t>
-            </a:r>
-            <a:endParaRPr lang="en-US" sz="1050" dirty="0"/>
-          </a:p>
-        </p:txBody>
-      </p:sp>
-      <p:sp>
-        <p:nvSpPr>
-          <p:cNvPr id="23" name="Text 21"/>
-          <p:cNvSpPr/>
-          <p:nvPr/>
-        </p:nvSpPr>
-        <p:spPr>
-          <a:xfrm>
-            <a:off x="8028432" y="4722876"/>
-            <a:ext cx="548640" cy="237744"/>
-          </a:xfrm>
-          <a:prstGeom prst="rect">
-            <a:avLst/>
-          </a:prstGeom>
-          <a:noFill/>
-          <a:ln/>
-        </p:spPr>
-        <p:txBody>
-          <a:bodyPr wrap="square" lIns="0" tIns="0" rIns="0" bIns="0" rtlCol="0" anchor="ctr"/>
-          <a:lstStyle/>
-          <a:p>
-            <a:pPr algn="r" indent="0" marL="0">
-              <a:buNone/>
-            </a:pPr>
-            <a:r>
-              <a:rPr lang="en-US" sz="1050" dirty="0">
-                <a:solidFill>
-                  <a:srgbClr val="5C6377"/>
-                </a:solidFill>
-                <a:latin typeface="Arial" pitchFamily="34" charset="0"/>
-                <a:ea typeface="Arial" pitchFamily="34" charset="-122"/>
-                <a:cs typeface="Arial" pitchFamily="34" charset="-120"/>
-              </a:rPr>
-              <a:t>17/20</a:t>
-            </a:r>
-            <a:endParaRPr lang="en-US" sz="1050" dirty="0"/>
+              <a:t>Vier Lösungen, ein Vergleich – und die Probe aufs Exempel</a:t>
+            </a:r>
+            <a:endParaRPr lang="en-US" sz="1350" dirty="0"/>
           </a:p>
         </p:txBody>
       </p:sp>
@@ -10103,7 +9743,7 @@
                 <a:ea typeface="Arial" pitchFamily="34" charset="-122"/>
                 <a:cs typeface="Arial" pitchFamily="34" charset="-120"/>
               </a:rPr>
-              <a:t>AUSWERTUNG</a:t>
+              <a:t>AUSWERTUNG · 35 MINUTEN</a:t>
             </a:r>
             <a:endParaRPr lang="en-US" sz="1150" dirty="0"/>
           </a:p>
@@ -10142,7 +9782,7 @@
                 <a:ea typeface="Arial" pitchFamily="34" charset="-122"/>
                 <a:cs typeface="Arial" pitchFamily="34" charset="-120"/>
               </a:rPr>
-              <a:t>Eine mögliche Lösung</a:t>
+              <a:t>Das gehen wir gemeinsam durch</a:t>
             </a:r>
             <a:endParaRPr lang="en-US" sz="2600" dirty="0"/>
           </a:p>
@@ -10150,154 +9790,14 @@
       </p:sp>
       <p:sp>
         <p:nvSpPr>
-          <p:cNvPr id="5" name="Text 3"/>
-          <p:cNvSpPr/>
-          <p:nvPr/>
-        </p:nvSpPr>
-        <p:spPr>
-          <a:xfrm>
-            <a:off x="658368" y="1737360"/>
-            <a:ext cx="1554480" cy="274320"/>
-          </a:xfrm>
-          <a:prstGeom prst="rect">
-            <a:avLst/>
-          </a:prstGeom>
-          <a:noFill/>
-          <a:ln/>
-        </p:spPr>
-        <p:txBody>
-          <a:bodyPr wrap="square" lIns="0" tIns="0" rIns="0" bIns="0" rtlCol="0" anchor="ctr"/>
-          <a:lstStyle/>
-          <a:p>
-            <a:pPr indent="0" marL="0">
-              <a:buNone/>
-            </a:pPr>
-            <a:r>
-              <a:rPr lang="en-US" sz="1050" b="1" spc="80" kern="0" dirty="0">
-                <a:solidFill>
-                  <a:srgbClr val="3843AF"/>
-                </a:solidFill>
-                <a:latin typeface="Arial" pitchFamily="34" charset="0"/>
-                <a:ea typeface="Arial" pitchFamily="34" charset="-122"/>
-                <a:cs typeface="Arial" pitchFamily="34" charset="-120"/>
-              </a:rPr>
-              <a:t>Abteilung</a:t>
-            </a:r>
-            <a:endParaRPr lang="en-US" sz="1050" dirty="0"/>
-          </a:p>
-        </p:txBody>
-      </p:sp>
-      <p:sp>
-        <p:nvSpPr>
-          <p:cNvPr id="6" name="Text 4"/>
-          <p:cNvSpPr/>
-          <p:nvPr/>
-        </p:nvSpPr>
-        <p:spPr>
-          <a:xfrm>
-            <a:off x="2395728" y="1737360"/>
-            <a:ext cx="731520" cy="274320"/>
-          </a:xfrm>
-          <a:prstGeom prst="rect">
-            <a:avLst/>
-          </a:prstGeom>
-          <a:noFill/>
-          <a:ln/>
-        </p:spPr>
-        <p:txBody>
-          <a:bodyPr wrap="square" lIns="0" tIns="0" rIns="0" bIns="0" rtlCol="0" anchor="ctr"/>
-          <a:lstStyle/>
-          <a:p>
-            <a:pPr indent="0" marL="0">
-              <a:buNone/>
-            </a:pPr>
-            <a:r>
-              <a:rPr lang="en-US" sz="1050" b="1" spc="80" kern="0" dirty="0">
-                <a:solidFill>
-                  <a:srgbClr val="3843AF"/>
-                </a:solidFill>
-                <a:latin typeface="Arial" pitchFamily="34" charset="0"/>
-                <a:ea typeface="Arial" pitchFamily="34" charset="-122"/>
-                <a:cs typeface="Arial" pitchFamily="34" charset="-120"/>
-              </a:rPr>
-              <a:t>Präfix</a:t>
-            </a:r>
-            <a:endParaRPr lang="en-US" sz="1050" dirty="0"/>
-          </a:p>
-        </p:txBody>
-      </p:sp>
-      <p:sp>
-        <p:nvSpPr>
-          <p:cNvPr id="7" name="Text 5"/>
-          <p:cNvSpPr/>
-          <p:nvPr/>
-        </p:nvSpPr>
-        <p:spPr>
-          <a:xfrm>
-            <a:off x="3310128" y="1737360"/>
-            <a:ext cx="5175504" cy="274320"/>
-          </a:xfrm>
-          <a:prstGeom prst="rect">
-            <a:avLst/>
-          </a:prstGeom>
-          <a:noFill/>
-          <a:ln/>
-        </p:spPr>
-        <p:txBody>
-          <a:bodyPr wrap="square" lIns="0" tIns="0" rIns="0" bIns="0" rtlCol="0" anchor="ctr"/>
-          <a:lstStyle/>
-          <a:p>
-            <a:pPr indent="0" marL="0">
-              <a:buNone/>
-            </a:pPr>
-            <a:r>
-              <a:rPr lang="en-US" sz="1050" b="1" spc="80" kern="0" dirty="0">
-                <a:solidFill>
-                  <a:srgbClr val="3843AF"/>
-                </a:solidFill>
-                <a:latin typeface="Arial" pitchFamily="34" charset="0"/>
-                <a:ea typeface="Arial" pitchFamily="34" charset="-122"/>
-                <a:cs typeface="Arial" pitchFamily="34" charset="-120"/>
-              </a:rPr>
-              <a:t>Netz · nutzbar · Broadcast</a:t>
-            </a:r>
-            <a:endParaRPr lang="en-US" sz="1050" dirty="0"/>
-          </a:p>
-        </p:txBody>
-      </p:sp>
-      <p:sp>
-        <p:nvSpPr>
-          <p:cNvPr id="8" name="Shape 6"/>
-          <p:cNvSpPr/>
-          <p:nvPr/>
-        </p:nvSpPr>
-        <p:spPr>
-          <a:xfrm>
-            <a:off x="566928" y="2029968"/>
-            <a:ext cx="8010144" cy="0"/>
-          </a:xfrm>
-          <a:prstGeom prst="line">
-            <a:avLst/>
-          </a:prstGeom>
-          <a:noFill/>
-          <a:ln w="12700">
-            <a:solidFill>
-              <a:srgbClr val="DFE3F0"/>
-            </a:solidFill>
-            <a:prstDash val="solid"/>
-          </a:ln>
-        </p:spPr>
-      </p:sp>
-      <p:sp>
-        <p:nvSpPr>
-          <p:cNvPr id="9" name="Shape 7"/>
-          <p:cNvSpPr/>
-          <p:nvPr/>
-        </p:nvSpPr>
-        <p:spPr>
-          <a:xfrm>
-            <a:off x="475488" y="2103120"/>
-            <a:ext cx="8193024" cy="365760"/>
+          <p:cNvPr id="5" name="Shape 3"/>
+          <p:cNvSpPr/>
+          <p:nvPr/>
+        </p:nvSpPr>
+        <p:spPr>
+          <a:xfrm>
+            <a:off x="438912" y="1737360"/>
+            <a:ext cx="8266176" cy="384048"/>
           </a:xfrm>
           <a:prstGeom prst="rect">
             <a:avLst/>
@@ -10310,69 +9810,69 @@
       </p:sp>
       <p:sp>
         <p:nvSpPr>
-          <p:cNvPr id="10" name="Text 8"/>
-          <p:cNvSpPr/>
-          <p:nvPr/>
-        </p:nvSpPr>
-        <p:spPr>
-          <a:xfrm>
-            <a:off x="658368" y="2103120"/>
-            <a:ext cx="1554480" cy="365760"/>
-          </a:xfrm>
-          <a:prstGeom prst="rect">
-            <a:avLst/>
-          </a:prstGeom>
-          <a:noFill/>
-          <a:ln/>
-        </p:spPr>
-        <p:txBody>
-          <a:bodyPr wrap="square" lIns="0" tIns="0" rIns="0" bIns="0" rtlCol="0" anchor="ctr"/>
-          <a:lstStyle/>
-          <a:p>
-            <a:pPr indent="0" marL="0">
-              <a:buNone/>
-            </a:pPr>
-            <a:r>
-              <a:rPr lang="en-US" sz="1150" b="1" dirty="0">
-                <a:solidFill>
-                  <a:srgbClr val="272E52"/>
-                </a:solidFill>
-                <a:latin typeface="Arial" pitchFamily="34" charset="0"/>
-                <a:ea typeface="Arial" pitchFamily="34" charset="-122"/>
-                <a:cs typeface="Arial" pitchFamily="34" charset="-120"/>
-              </a:rPr>
-              <a:t>Büro (100)</a:t>
-            </a:r>
-            <a:endParaRPr lang="en-US" sz="1150" dirty="0"/>
-          </a:p>
-        </p:txBody>
-      </p:sp>
-      <p:sp>
-        <p:nvSpPr>
-          <p:cNvPr id="11" name="Text 9"/>
-          <p:cNvSpPr/>
-          <p:nvPr/>
-        </p:nvSpPr>
-        <p:spPr>
-          <a:xfrm>
-            <a:off x="2395728" y="2103120"/>
-            <a:ext cx="731520" cy="365760"/>
-          </a:xfrm>
-          <a:prstGeom prst="rect">
-            <a:avLst/>
-          </a:prstGeom>
-          <a:noFill/>
-          <a:ln/>
-        </p:spPr>
-        <p:txBody>
-          <a:bodyPr wrap="square" lIns="0" tIns="0" rIns="0" bIns="0" rtlCol="0" anchor="ctr"/>
-          <a:lstStyle/>
-          <a:p>
-            <a:pPr indent="0" marL="0">
-              <a:buNone/>
-            </a:pPr>
-            <a:r>
-              <a:rPr lang="en-US" sz="1150" dirty="0">
+          <p:cNvPr id="6" name="Text 4"/>
+          <p:cNvSpPr/>
+          <p:nvPr/>
+        </p:nvSpPr>
+        <p:spPr>
+          <a:xfrm>
+            <a:off x="566928" y="1737360"/>
+            <a:ext cx="411480" cy="384048"/>
+          </a:xfrm>
+          <a:prstGeom prst="rect">
+            <a:avLst/>
+          </a:prstGeom>
+          <a:noFill/>
+          <a:ln/>
+        </p:spPr>
+        <p:txBody>
+          <a:bodyPr wrap="square" lIns="0" tIns="0" rIns="0" bIns="0" rtlCol="0" anchor="ctr"/>
+          <a:lstStyle/>
+          <a:p>
+            <a:pPr indent="0" marL="0">
+              <a:buNone/>
+            </a:pPr>
+            <a:r>
+              <a:rPr lang="en-US" sz="1200" b="1" dirty="0">
+                <a:solidFill>
+                  <a:srgbClr val="3843AF"/>
+                </a:solidFill>
+                <a:latin typeface="Courier New" pitchFamily="34" charset="0"/>
+                <a:ea typeface="Courier New" pitchFamily="34" charset="-122"/>
+                <a:cs typeface="Courier New" pitchFamily="34" charset="-120"/>
+              </a:rPr>
+              <a:t>1</a:t>
+            </a:r>
+            <a:endParaRPr lang="en-US" sz="1200" dirty="0"/>
+          </a:p>
+        </p:txBody>
+      </p:sp>
+      <p:sp>
+        <p:nvSpPr>
+          <p:cNvPr id="7" name="Text 5"/>
+          <p:cNvSpPr/>
+          <p:nvPr/>
+        </p:nvSpPr>
+        <p:spPr>
+          <a:xfrm>
+            <a:off x="978408" y="1737360"/>
+            <a:ext cx="7598664" cy="384048"/>
+          </a:xfrm>
+          <a:prstGeom prst="rect">
+            <a:avLst/>
+          </a:prstGeom>
+          <a:noFill/>
+          <a:ln/>
+        </p:spPr>
+        <p:txBody>
+          <a:bodyPr wrap="square" lIns="0" tIns="0" rIns="0" bIns="0" rtlCol="0" anchor="ctr"/>
+          <a:lstStyle/>
+          <a:p>
+            <a:pPr indent="0" marL="0">
+              <a:buNone/>
+            </a:pPr>
+            <a:r>
+              <a:rPr lang="en-US" sz="1200" dirty="0">
                 <a:solidFill>
                   <a:srgbClr val="434A63"/>
                 </a:solidFill>
@@ -10380,38 +9880,77 @@
                 <a:ea typeface="Arial" pitchFamily="34" charset="-122"/>
                 <a:cs typeface="Arial" pitchFamily="34" charset="-120"/>
               </a:rPr>
-              <a:t>/25</a:t>
-            </a:r>
-            <a:endParaRPr lang="en-US" sz="1150" dirty="0"/>
-          </a:p>
-        </p:txBody>
-      </p:sp>
-      <p:sp>
-        <p:nvSpPr>
-          <p:cNvPr id="12" name="Text 10"/>
-          <p:cNvSpPr/>
-          <p:nvPr/>
-        </p:nvSpPr>
-        <p:spPr>
-          <a:xfrm>
-            <a:off x="3310128" y="2103120"/>
-            <a:ext cx="5175504" cy="365760"/>
-          </a:xfrm>
-          <a:prstGeom prst="rect">
-            <a:avLst/>
-          </a:prstGeom>
-          <a:noFill/>
-          <a:ln/>
-        </p:spPr>
-        <p:txBody>
-          <a:bodyPr wrap="square" lIns="0" tIns="0" rIns="0" bIns="0" rtlCol="0" anchor="ctr"/>
-          <a:lstStyle/>
-          <a:p>
-            <a:pPr indent="0" marL="0">
-              <a:buNone/>
-            </a:pPr>
-            <a:r>
-              <a:rPr lang="en-US" sz="1150" dirty="0">
+              <a:t>Jede Gruppe zeigt ihre Planungstabelle – kurz, nur die Eckwerte</a:t>
+            </a:r>
+            <a:endParaRPr lang="en-US" sz="1200" dirty="0"/>
+          </a:p>
+        </p:txBody>
+      </p:sp>
+      <p:sp>
+        <p:nvSpPr>
+          <p:cNvPr id="8" name="Text 6"/>
+          <p:cNvSpPr/>
+          <p:nvPr/>
+        </p:nvSpPr>
+        <p:spPr>
+          <a:xfrm>
+            <a:off x="566928" y="2121408"/>
+            <a:ext cx="411480" cy="384048"/>
+          </a:xfrm>
+          <a:prstGeom prst="rect">
+            <a:avLst/>
+          </a:prstGeom>
+          <a:noFill/>
+          <a:ln/>
+        </p:spPr>
+        <p:txBody>
+          <a:bodyPr wrap="square" lIns="0" tIns="0" rIns="0" bIns="0" rtlCol="0" anchor="ctr"/>
+          <a:lstStyle/>
+          <a:p>
+            <a:pPr indent="0" marL="0">
+              <a:buNone/>
+            </a:pPr>
+            <a:r>
+              <a:rPr lang="en-US" sz="1200" b="1" dirty="0">
+                <a:solidFill>
+                  <a:srgbClr val="3843AF"/>
+                </a:solidFill>
+                <a:latin typeface="Courier New" pitchFamily="34" charset="0"/>
+                <a:ea typeface="Courier New" pitchFamily="34" charset="-122"/>
+                <a:cs typeface="Courier New" pitchFamily="34" charset="-120"/>
+              </a:rPr>
+              <a:t>2</a:t>
+            </a:r>
+            <a:endParaRPr lang="en-US" sz="1200" dirty="0"/>
+          </a:p>
+        </p:txBody>
+      </p:sp>
+      <p:sp>
+        <p:nvSpPr>
+          <p:cNvPr id="9" name="Text 7"/>
+          <p:cNvSpPr/>
+          <p:nvPr/>
+        </p:nvSpPr>
+        <p:spPr>
+          <a:xfrm>
+            <a:off x="978408" y="2121408"/>
+            <a:ext cx="7598664" cy="384048"/>
+          </a:xfrm>
+          <a:prstGeom prst="rect">
+            <a:avLst/>
+          </a:prstGeom>
+          <a:noFill/>
+          <a:ln/>
+        </p:spPr>
+        <p:txBody>
+          <a:bodyPr wrap="square" lIns="0" tIns="0" rIns="0" bIns="0" rtlCol="0" anchor="ctr"/>
+          <a:lstStyle/>
+          <a:p>
+            <a:pPr indent="0" marL="0">
+              <a:buNone/>
+            </a:pPr>
+            <a:r>
+              <a:rPr lang="en-US" sz="1200" dirty="0">
                 <a:solidFill>
                   <a:srgbClr val="434A63"/>
                 </a:solidFill>
@@ -10419,139 +9958,22 @@
                 <a:ea typeface="Arial" pitchFamily="34" charset="-122"/>
                 <a:cs typeface="Arial" pitchFamily="34" charset="-120"/>
               </a:rPr>
-              <a:t>192.168.10.0 · .1–.126 · .127</a:t>
-            </a:r>
-            <a:endParaRPr lang="en-US" sz="1150" dirty="0"/>
-          </a:p>
-        </p:txBody>
-      </p:sp>
-      <p:sp>
-        <p:nvSpPr>
-          <p:cNvPr id="13" name="Text 11"/>
-          <p:cNvSpPr/>
-          <p:nvPr/>
-        </p:nvSpPr>
-        <p:spPr>
-          <a:xfrm>
-            <a:off x="658368" y="2468880"/>
-            <a:ext cx="1554480" cy="365760"/>
-          </a:xfrm>
-          <a:prstGeom prst="rect">
-            <a:avLst/>
-          </a:prstGeom>
-          <a:noFill/>
-          <a:ln/>
-        </p:spPr>
-        <p:txBody>
-          <a:bodyPr wrap="square" lIns="0" tIns="0" rIns="0" bIns="0" rtlCol="0" anchor="ctr"/>
-          <a:lstStyle/>
-          <a:p>
-            <a:pPr indent="0" marL="0">
-              <a:buNone/>
-            </a:pPr>
-            <a:r>
-              <a:rPr lang="en-US" sz="1150" b="1" dirty="0">
-                <a:solidFill>
-                  <a:srgbClr val="272E52"/>
-                </a:solidFill>
-                <a:latin typeface="Arial" pitchFamily="34" charset="0"/>
-                <a:ea typeface="Arial" pitchFamily="34" charset="-122"/>
-                <a:cs typeface="Arial" pitchFamily="34" charset="-120"/>
-              </a:rPr>
-              <a:t>Gäste-WLAN (50)</a:t>
-            </a:r>
-            <a:endParaRPr lang="en-US" sz="1150" dirty="0"/>
-          </a:p>
-        </p:txBody>
-      </p:sp>
-      <p:sp>
-        <p:nvSpPr>
-          <p:cNvPr id="14" name="Text 12"/>
-          <p:cNvSpPr/>
-          <p:nvPr/>
-        </p:nvSpPr>
-        <p:spPr>
-          <a:xfrm>
-            <a:off x="2395728" y="2468880"/>
-            <a:ext cx="731520" cy="365760"/>
-          </a:xfrm>
-          <a:prstGeom prst="rect">
-            <a:avLst/>
-          </a:prstGeom>
-          <a:noFill/>
-          <a:ln/>
-        </p:spPr>
-        <p:txBody>
-          <a:bodyPr wrap="square" lIns="0" tIns="0" rIns="0" bIns="0" rtlCol="0" anchor="ctr"/>
-          <a:lstStyle/>
-          <a:p>
-            <a:pPr indent="0" marL="0">
-              <a:buNone/>
-            </a:pPr>
-            <a:r>
-              <a:rPr lang="en-US" sz="1150" dirty="0">
-                <a:solidFill>
-                  <a:srgbClr val="434A63"/>
-                </a:solidFill>
-                <a:latin typeface="Arial" pitchFamily="34" charset="0"/>
-                <a:ea typeface="Arial" pitchFamily="34" charset="-122"/>
-                <a:cs typeface="Arial" pitchFamily="34" charset="-120"/>
-              </a:rPr>
-              <a:t>/26</a:t>
-            </a:r>
-            <a:endParaRPr lang="en-US" sz="1150" dirty="0"/>
-          </a:p>
-        </p:txBody>
-      </p:sp>
-      <p:sp>
-        <p:nvSpPr>
-          <p:cNvPr id="15" name="Text 13"/>
-          <p:cNvSpPr/>
-          <p:nvPr/>
-        </p:nvSpPr>
-        <p:spPr>
-          <a:xfrm>
-            <a:off x="3310128" y="2468880"/>
-            <a:ext cx="5175504" cy="365760"/>
-          </a:xfrm>
-          <a:prstGeom prst="rect">
-            <a:avLst/>
-          </a:prstGeom>
-          <a:noFill/>
-          <a:ln/>
-        </p:spPr>
-        <p:txBody>
-          <a:bodyPr wrap="square" lIns="0" tIns="0" rIns="0" bIns="0" rtlCol="0" anchor="ctr"/>
-          <a:lstStyle/>
-          <a:p>
-            <a:pPr indent="0" marL="0">
-              <a:buNone/>
-            </a:pPr>
-            <a:r>
-              <a:rPr lang="en-US" sz="1150" dirty="0">
-                <a:solidFill>
-                  <a:srgbClr val="434A63"/>
-                </a:solidFill>
-                <a:latin typeface="Arial" pitchFamily="34" charset="0"/>
-                <a:ea typeface="Arial" pitchFamily="34" charset="-122"/>
-                <a:cs typeface="Arial" pitchFamily="34" charset="-120"/>
-              </a:rPr>
-              <a:t>192.168.10.128 · .129–.190 · .191</a:t>
-            </a:r>
-            <a:endParaRPr lang="en-US" sz="1150" dirty="0"/>
-          </a:p>
-        </p:txBody>
-      </p:sp>
-      <p:sp>
-        <p:nvSpPr>
-          <p:cNvPr id="16" name="Shape 14"/>
-          <p:cNvSpPr/>
-          <p:nvPr/>
-        </p:nvSpPr>
-        <p:spPr>
-          <a:xfrm>
-            <a:off x="475488" y="2834640"/>
-            <a:ext cx="8193024" cy="365760"/>
+              <a:t>Vergleich: Wo unterscheiden sich die Pläne – und sind beide richtig?</a:t>
+            </a:r>
+            <a:endParaRPr lang="en-US" sz="1200" dirty="0"/>
+          </a:p>
+        </p:txBody>
+      </p:sp>
+      <p:sp>
+        <p:nvSpPr>
+          <p:cNvPr id="10" name="Shape 8"/>
+          <p:cNvSpPr/>
+          <p:nvPr/>
+        </p:nvSpPr>
+        <p:spPr>
+          <a:xfrm>
+            <a:off x="438912" y="2505456"/>
+            <a:ext cx="8266176" cy="384048"/>
           </a:xfrm>
           <a:prstGeom prst="rect">
             <a:avLst/>
@@ -10564,69 +9986,69 @@
       </p:sp>
       <p:sp>
         <p:nvSpPr>
-          <p:cNvPr id="17" name="Text 15"/>
-          <p:cNvSpPr/>
-          <p:nvPr/>
-        </p:nvSpPr>
-        <p:spPr>
-          <a:xfrm>
-            <a:off x="658368" y="2834640"/>
-            <a:ext cx="1554480" cy="365760"/>
-          </a:xfrm>
-          <a:prstGeom prst="rect">
-            <a:avLst/>
-          </a:prstGeom>
-          <a:noFill/>
-          <a:ln/>
-        </p:spPr>
-        <p:txBody>
-          <a:bodyPr wrap="square" lIns="0" tIns="0" rIns="0" bIns="0" rtlCol="0" anchor="ctr"/>
-          <a:lstStyle/>
-          <a:p>
-            <a:pPr indent="0" marL="0">
-              <a:buNone/>
-            </a:pPr>
-            <a:r>
-              <a:rPr lang="en-US" sz="1150" b="1" dirty="0">
-                <a:solidFill>
-                  <a:srgbClr val="272E52"/>
-                </a:solidFill>
-                <a:latin typeface="Arial" pitchFamily="34" charset="0"/>
-                <a:ea typeface="Arial" pitchFamily="34" charset="-122"/>
-                <a:cs typeface="Arial" pitchFamily="34" charset="-120"/>
-              </a:rPr>
-              <a:t>Produktion (20)</a:t>
-            </a:r>
-            <a:endParaRPr lang="en-US" sz="1150" dirty="0"/>
-          </a:p>
-        </p:txBody>
-      </p:sp>
-      <p:sp>
-        <p:nvSpPr>
-          <p:cNvPr id="18" name="Text 16"/>
-          <p:cNvSpPr/>
-          <p:nvPr/>
-        </p:nvSpPr>
-        <p:spPr>
-          <a:xfrm>
-            <a:off x="2395728" y="2834640"/>
-            <a:ext cx="731520" cy="365760"/>
-          </a:xfrm>
-          <a:prstGeom prst="rect">
-            <a:avLst/>
-          </a:prstGeom>
-          <a:noFill/>
-          <a:ln/>
-        </p:spPr>
-        <p:txBody>
-          <a:bodyPr wrap="square" lIns="0" tIns="0" rIns="0" bIns="0" rtlCol="0" anchor="ctr"/>
-          <a:lstStyle/>
-          <a:p>
-            <a:pPr indent="0" marL="0">
-              <a:buNone/>
-            </a:pPr>
-            <a:r>
-              <a:rPr lang="en-US" sz="1150" dirty="0">
+          <p:cNvPr id="11" name="Text 9"/>
+          <p:cNvSpPr/>
+          <p:nvPr/>
+        </p:nvSpPr>
+        <p:spPr>
+          <a:xfrm>
+            <a:off x="566928" y="2505456"/>
+            <a:ext cx="411480" cy="384048"/>
+          </a:xfrm>
+          <a:prstGeom prst="rect">
+            <a:avLst/>
+          </a:prstGeom>
+          <a:noFill/>
+          <a:ln/>
+        </p:spPr>
+        <p:txBody>
+          <a:bodyPr wrap="square" lIns="0" tIns="0" rIns="0" bIns="0" rtlCol="0" anchor="ctr"/>
+          <a:lstStyle/>
+          <a:p>
+            <a:pPr indent="0" marL="0">
+              <a:buNone/>
+            </a:pPr>
+            <a:r>
+              <a:rPr lang="en-US" sz="1200" b="1" dirty="0">
+                <a:solidFill>
+                  <a:srgbClr val="3843AF"/>
+                </a:solidFill>
+                <a:latin typeface="Courier New" pitchFamily="34" charset="0"/>
+                <a:ea typeface="Courier New" pitchFamily="34" charset="-122"/>
+                <a:cs typeface="Courier New" pitchFamily="34" charset="-120"/>
+              </a:rPr>
+              <a:t>3</a:t>
+            </a:r>
+            <a:endParaRPr lang="en-US" sz="1200" dirty="0"/>
+          </a:p>
+        </p:txBody>
+      </p:sp>
+      <p:sp>
+        <p:nvSpPr>
+          <p:cNvPr id="12" name="Text 10"/>
+          <p:cNvSpPr/>
+          <p:nvPr/>
+        </p:nvSpPr>
+        <p:spPr>
+          <a:xfrm>
+            <a:off x="978408" y="2505456"/>
+            <a:ext cx="7598664" cy="384048"/>
+          </a:xfrm>
+          <a:prstGeom prst="rect">
+            <a:avLst/>
+          </a:prstGeom>
+          <a:noFill/>
+          <a:ln/>
+        </p:spPr>
+        <p:txBody>
+          <a:bodyPr wrap="square" lIns="0" tIns="0" rIns="0" bIns="0" rtlCol="0" anchor="ctr"/>
+          <a:lstStyle/>
+          <a:p>
+            <a:pPr indent="0" marL="0">
+              <a:buNone/>
+            </a:pPr>
+            <a:r>
+              <a:rPr lang="en-US" sz="1200" dirty="0">
                 <a:solidFill>
                   <a:srgbClr val="434A63"/>
                 </a:solidFill>
@@ -10634,38 +10056,77 @@
                 <a:ea typeface="Arial" pitchFamily="34" charset="-122"/>
                 <a:cs typeface="Arial" pitchFamily="34" charset="-120"/>
               </a:rPr>
-              <a:t>/27</a:t>
-            </a:r>
-            <a:endParaRPr lang="en-US" sz="1150" dirty="0"/>
-          </a:p>
-        </p:txBody>
-      </p:sp>
-      <p:sp>
-        <p:nvSpPr>
-          <p:cNvPr id="19" name="Text 17"/>
-          <p:cNvSpPr/>
-          <p:nvPr/>
-        </p:nvSpPr>
-        <p:spPr>
-          <a:xfrm>
-            <a:off x="3310128" y="2834640"/>
-            <a:ext cx="5175504" cy="365760"/>
-          </a:xfrm>
-          <a:prstGeom prst="rect">
-            <a:avLst/>
-          </a:prstGeom>
-          <a:noFill/>
-          <a:ln/>
-        </p:spPr>
-        <p:txBody>
-          <a:bodyPr wrap="square" lIns="0" tIns="0" rIns="0" bIns="0" rtlCol="0" anchor="ctr"/>
-          <a:lstStyle/>
-          <a:p>
-            <a:pPr indent="0" marL="0">
-              <a:buNone/>
-            </a:pPr>
-            <a:r>
-              <a:rPr lang="en-US" sz="1150" dirty="0">
+              <a:t>Die Probe: Passen alle Blöcke zusammen in das /24?</a:t>
+            </a:r>
+            <a:endParaRPr lang="en-US" sz="1200" dirty="0"/>
+          </a:p>
+        </p:txBody>
+      </p:sp>
+      <p:sp>
+        <p:nvSpPr>
+          <p:cNvPr id="13" name="Text 11"/>
+          <p:cNvSpPr/>
+          <p:nvPr/>
+        </p:nvSpPr>
+        <p:spPr>
+          <a:xfrm>
+            <a:off x="566928" y="2889504"/>
+            <a:ext cx="411480" cy="384048"/>
+          </a:xfrm>
+          <a:prstGeom prst="rect">
+            <a:avLst/>
+          </a:prstGeom>
+          <a:noFill/>
+          <a:ln/>
+        </p:spPr>
+        <p:txBody>
+          <a:bodyPr wrap="square" lIns="0" tIns="0" rIns="0" bIns="0" rtlCol="0" anchor="ctr"/>
+          <a:lstStyle/>
+          <a:p>
+            <a:pPr indent="0" marL="0">
+              <a:buNone/>
+            </a:pPr>
+            <a:r>
+              <a:rPr lang="en-US" sz="1200" b="1" dirty="0">
+                <a:solidFill>
+                  <a:srgbClr val="3843AF"/>
+                </a:solidFill>
+                <a:latin typeface="Courier New" pitchFamily="34" charset="0"/>
+                <a:ea typeface="Courier New" pitchFamily="34" charset="-122"/>
+                <a:cs typeface="Courier New" pitchFamily="34" charset="-120"/>
+              </a:rPr>
+              <a:t>4</a:t>
+            </a:r>
+            <a:endParaRPr lang="en-US" sz="1200" dirty="0"/>
+          </a:p>
+        </p:txBody>
+      </p:sp>
+      <p:sp>
+        <p:nvSpPr>
+          <p:cNvPr id="14" name="Text 12"/>
+          <p:cNvSpPr/>
+          <p:nvPr/>
+        </p:nvSpPr>
+        <p:spPr>
+          <a:xfrm>
+            <a:off x="978408" y="2889504"/>
+            <a:ext cx="7598664" cy="384048"/>
+          </a:xfrm>
+          <a:prstGeom prst="rect">
+            <a:avLst/>
+          </a:prstGeom>
+          <a:noFill/>
+          <a:ln/>
+        </p:spPr>
+        <p:txBody>
+          <a:bodyPr wrap="square" lIns="0" tIns="0" rIns="0" bIns="0" rtlCol="0" anchor="ctr"/>
+          <a:lstStyle/>
+          <a:p>
+            <a:pPr indent="0" marL="0">
+              <a:buNone/>
+            </a:pPr>
+            <a:r>
+              <a:rPr lang="en-US" sz="1200" dirty="0">
                 <a:solidFill>
                   <a:srgbClr val="434A63"/>
                 </a:solidFill>
@@ -10673,139 +10134,22 @@
                 <a:ea typeface="Arial" pitchFamily="34" charset="-122"/>
                 <a:cs typeface="Arial" pitchFamily="34" charset="-120"/>
               </a:rPr>
-              <a:t>192.168.10.192 · .193–.222 · .223</a:t>
-            </a:r>
-            <a:endParaRPr lang="en-US" sz="1150" dirty="0"/>
-          </a:p>
-        </p:txBody>
-      </p:sp>
-      <p:sp>
-        <p:nvSpPr>
-          <p:cNvPr id="20" name="Text 18"/>
-          <p:cNvSpPr/>
-          <p:nvPr/>
-        </p:nvSpPr>
-        <p:spPr>
-          <a:xfrm>
-            <a:off x="658368" y="3200400"/>
-            <a:ext cx="1554480" cy="365760"/>
-          </a:xfrm>
-          <a:prstGeom prst="rect">
-            <a:avLst/>
-          </a:prstGeom>
-          <a:noFill/>
-          <a:ln/>
-        </p:spPr>
-        <p:txBody>
-          <a:bodyPr wrap="square" lIns="0" tIns="0" rIns="0" bIns="0" rtlCol="0" anchor="ctr"/>
-          <a:lstStyle/>
-          <a:p>
-            <a:pPr indent="0" marL="0">
-              <a:buNone/>
-            </a:pPr>
-            <a:r>
-              <a:rPr lang="en-US" sz="1150" b="1" dirty="0">
-                <a:solidFill>
-                  <a:srgbClr val="272E52"/>
-                </a:solidFill>
-                <a:latin typeface="Arial" pitchFamily="34" charset="0"/>
-                <a:ea typeface="Arial" pitchFamily="34" charset="-122"/>
-                <a:cs typeface="Arial" pitchFamily="34" charset="-120"/>
-              </a:rPr>
-              <a:t>Server (10)</a:t>
-            </a:r>
-            <a:endParaRPr lang="en-US" sz="1150" dirty="0"/>
-          </a:p>
-        </p:txBody>
-      </p:sp>
-      <p:sp>
-        <p:nvSpPr>
-          <p:cNvPr id="21" name="Text 19"/>
-          <p:cNvSpPr/>
-          <p:nvPr/>
-        </p:nvSpPr>
-        <p:spPr>
-          <a:xfrm>
-            <a:off x="2395728" y="3200400"/>
-            <a:ext cx="731520" cy="365760"/>
-          </a:xfrm>
-          <a:prstGeom prst="rect">
-            <a:avLst/>
-          </a:prstGeom>
-          <a:noFill/>
-          <a:ln/>
-        </p:spPr>
-        <p:txBody>
-          <a:bodyPr wrap="square" lIns="0" tIns="0" rIns="0" bIns="0" rtlCol="0" anchor="ctr"/>
-          <a:lstStyle/>
-          <a:p>
-            <a:pPr indent="0" marL="0">
-              <a:buNone/>
-            </a:pPr>
-            <a:r>
-              <a:rPr lang="en-US" sz="1150" dirty="0">
-                <a:solidFill>
-                  <a:srgbClr val="434A63"/>
-                </a:solidFill>
-                <a:latin typeface="Arial" pitchFamily="34" charset="0"/>
-                <a:ea typeface="Arial" pitchFamily="34" charset="-122"/>
-                <a:cs typeface="Arial" pitchFamily="34" charset="-120"/>
-              </a:rPr>
-              <a:t>/28</a:t>
-            </a:r>
-            <a:endParaRPr lang="en-US" sz="1150" dirty="0"/>
-          </a:p>
-        </p:txBody>
-      </p:sp>
-      <p:sp>
-        <p:nvSpPr>
-          <p:cNvPr id="22" name="Text 20"/>
-          <p:cNvSpPr/>
-          <p:nvPr/>
-        </p:nvSpPr>
-        <p:spPr>
-          <a:xfrm>
-            <a:off x="3310128" y="3200400"/>
-            <a:ext cx="5175504" cy="365760"/>
-          </a:xfrm>
-          <a:prstGeom prst="rect">
-            <a:avLst/>
-          </a:prstGeom>
-          <a:noFill/>
-          <a:ln/>
-        </p:spPr>
-        <p:txBody>
-          <a:bodyPr wrap="square" lIns="0" tIns="0" rIns="0" bIns="0" rtlCol="0" anchor="ctr"/>
-          <a:lstStyle/>
-          <a:p>
-            <a:pPr indent="0" marL="0">
-              <a:buNone/>
-            </a:pPr>
-            <a:r>
-              <a:rPr lang="en-US" sz="1150" dirty="0">
-                <a:solidFill>
-                  <a:srgbClr val="434A63"/>
-                </a:solidFill>
-                <a:latin typeface="Arial" pitchFamily="34" charset="0"/>
-                <a:ea typeface="Arial" pitchFamily="34" charset="-122"/>
-                <a:cs typeface="Arial" pitchFamily="34" charset="-120"/>
-              </a:rPr>
-              <a:t>192.168.10.224 · .225–.238 · .239</a:t>
-            </a:r>
-            <a:endParaRPr lang="en-US" sz="1150" dirty="0"/>
-          </a:p>
-        </p:txBody>
-      </p:sp>
-      <p:sp>
-        <p:nvSpPr>
-          <p:cNvPr id="23" name="Shape 21"/>
-          <p:cNvSpPr/>
-          <p:nvPr/>
-        </p:nvSpPr>
-        <p:spPr>
-          <a:xfrm>
-            <a:off x="475488" y="3566160"/>
-            <a:ext cx="8193024" cy="365760"/>
+              <a:t>Was bleibt übrig – und warum ist Reserve kein Fehler?</a:t>
+            </a:r>
+            <a:endParaRPr lang="en-US" sz="1200" dirty="0"/>
+          </a:p>
+        </p:txBody>
+      </p:sp>
+      <p:sp>
+        <p:nvSpPr>
+          <p:cNvPr id="15" name="Shape 13"/>
+          <p:cNvSpPr/>
+          <p:nvPr/>
+        </p:nvSpPr>
+        <p:spPr>
+          <a:xfrm>
+            <a:off x="438912" y="3273552"/>
+            <a:ext cx="8266176" cy="384048"/>
           </a:xfrm>
           <a:prstGeom prst="rect">
             <a:avLst/>
@@ -10818,69 +10162,69 @@
       </p:sp>
       <p:sp>
         <p:nvSpPr>
-          <p:cNvPr id="24" name="Text 22"/>
-          <p:cNvSpPr/>
-          <p:nvPr/>
-        </p:nvSpPr>
-        <p:spPr>
-          <a:xfrm>
-            <a:off x="658368" y="3566160"/>
-            <a:ext cx="1554480" cy="365760"/>
-          </a:xfrm>
-          <a:prstGeom prst="rect">
-            <a:avLst/>
-          </a:prstGeom>
-          <a:noFill/>
-          <a:ln/>
-        </p:spPr>
-        <p:txBody>
-          <a:bodyPr wrap="square" lIns="0" tIns="0" rIns="0" bIns="0" rtlCol="0" anchor="ctr"/>
-          <a:lstStyle/>
-          <a:p>
-            <a:pPr indent="0" marL="0">
-              <a:buNone/>
-            </a:pPr>
-            <a:r>
-              <a:rPr lang="en-US" sz="1150" b="1" dirty="0">
-                <a:solidFill>
-                  <a:srgbClr val="272E52"/>
-                </a:solidFill>
-                <a:latin typeface="Arial" pitchFamily="34" charset="0"/>
-                <a:ea typeface="Arial" pitchFamily="34" charset="-122"/>
-                <a:cs typeface="Arial" pitchFamily="34" charset="-120"/>
-              </a:rPr>
-              <a:t>Reserve</a:t>
-            </a:r>
-            <a:endParaRPr lang="en-US" sz="1150" dirty="0"/>
-          </a:p>
-        </p:txBody>
-      </p:sp>
-      <p:sp>
-        <p:nvSpPr>
-          <p:cNvPr id="25" name="Text 23"/>
-          <p:cNvSpPr/>
-          <p:nvPr/>
-        </p:nvSpPr>
-        <p:spPr>
-          <a:xfrm>
-            <a:off x="2395728" y="3566160"/>
-            <a:ext cx="731520" cy="365760"/>
-          </a:xfrm>
-          <a:prstGeom prst="rect">
-            <a:avLst/>
-          </a:prstGeom>
-          <a:noFill/>
-          <a:ln/>
-        </p:spPr>
-        <p:txBody>
-          <a:bodyPr wrap="square" lIns="0" tIns="0" rIns="0" bIns="0" rtlCol="0" anchor="ctr"/>
-          <a:lstStyle/>
-          <a:p>
-            <a:pPr indent="0" marL="0">
-              <a:buNone/>
-            </a:pPr>
-            <a:r>
-              <a:rPr lang="en-US" sz="1150" dirty="0">
+          <p:cNvPr id="16" name="Text 14"/>
+          <p:cNvSpPr/>
+          <p:nvPr/>
+        </p:nvSpPr>
+        <p:spPr>
+          <a:xfrm>
+            <a:off x="566928" y="3273552"/>
+            <a:ext cx="411480" cy="384048"/>
+          </a:xfrm>
+          <a:prstGeom prst="rect">
+            <a:avLst/>
+          </a:prstGeom>
+          <a:noFill/>
+          <a:ln/>
+        </p:spPr>
+        <p:txBody>
+          <a:bodyPr wrap="square" lIns="0" tIns="0" rIns="0" bIns="0" rtlCol="0" anchor="ctr"/>
+          <a:lstStyle/>
+          <a:p>
+            <a:pPr indent="0" marL="0">
+              <a:buNone/>
+            </a:pPr>
+            <a:r>
+              <a:rPr lang="en-US" sz="1200" b="1" dirty="0">
+                <a:solidFill>
+                  <a:srgbClr val="3843AF"/>
+                </a:solidFill>
+                <a:latin typeface="Courier New" pitchFamily="34" charset="0"/>
+                <a:ea typeface="Courier New" pitchFamily="34" charset="-122"/>
+                <a:cs typeface="Courier New" pitchFamily="34" charset="-120"/>
+              </a:rPr>
+              <a:t>5</a:t>
+            </a:r>
+            <a:endParaRPr lang="en-US" sz="1200" dirty="0"/>
+          </a:p>
+        </p:txBody>
+      </p:sp>
+      <p:sp>
+        <p:nvSpPr>
+          <p:cNvPr id="17" name="Text 15"/>
+          <p:cNvSpPr/>
+          <p:nvPr/>
+        </p:nvSpPr>
+        <p:spPr>
+          <a:xfrm>
+            <a:off x="978408" y="3273552"/>
+            <a:ext cx="7598664" cy="384048"/>
+          </a:xfrm>
+          <a:prstGeom prst="rect">
+            <a:avLst/>
+          </a:prstGeom>
+          <a:noFill/>
+          <a:ln/>
+        </p:spPr>
+        <p:txBody>
+          <a:bodyPr wrap="square" lIns="0" tIns="0" rIns="0" bIns="0" rtlCol="0" anchor="ctr"/>
+          <a:lstStyle/>
+          <a:p>
+            <a:pPr indent="0" marL="0">
+              <a:buNone/>
+            </a:pPr>
+            <a:r>
+              <a:rPr lang="en-US" sz="1200" dirty="0">
                 <a:solidFill>
                   <a:srgbClr val="434A63"/>
                 </a:solidFill>
@@ -10888,61 +10232,42 @@
                 <a:ea typeface="Arial" pitchFamily="34" charset="-122"/>
                 <a:cs typeface="Arial" pitchFamily="34" charset="-120"/>
               </a:rPr>
-              <a:t>–</a:t>
-            </a:r>
-            <a:endParaRPr lang="en-US" sz="1150" dirty="0"/>
-          </a:p>
-        </p:txBody>
-      </p:sp>
-      <p:sp>
-        <p:nvSpPr>
-          <p:cNvPr id="26" name="Text 24"/>
-          <p:cNvSpPr/>
-          <p:nvPr/>
-        </p:nvSpPr>
-        <p:spPr>
-          <a:xfrm>
-            <a:off x="3310128" y="3566160"/>
-            <a:ext cx="5175504" cy="365760"/>
-          </a:xfrm>
-          <a:prstGeom prst="rect">
-            <a:avLst/>
-          </a:prstGeom>
-          <a:noFill/>
-          <a:ln/>
-        </p:spPr>
-        <p:txBody>
-          <a:bodyPr wrap="square" lIns="0" tIns="0" rIns="0" bIns="0" rtlCol="0" anchor="ctr"/>
-          <a:lstStyle/>
-          <a:p>
-            <a:pPr indent="0" marL="0">
-              <a:buNone/>
-            </a:pPr>
-            <a:r>
-              <a:rPr lang="en-US" sz="1150" dirty="0">
-                <a:solidFill>
-                  <a:srgbClr val="434A63"/>
-                </a:solidFill>
-                <a:latin typeface="Arial" pitchFamily="34" charset="0"/>
-                <a:ea typeface="Arial" pitchFamily="34" charset="-122"/>
-                <a:cs typeface="Arial" pitchFamily="34" charset="-120"/>
-              </a:rPr>
-              <a:t>.240 bis .255 bleiben frei – Platz zum Wachsen</a:t>
-            </a:r>
-            <a:endParaRPr lang="en-US" sz="1150" dirty="0"/>
-          </a:p>
-        </p:txBody>
-      </p:sp>
-      <p:sp>
-        <p:nvSpPr>
-          <p:cNvPr id="27" name="Shape 25"/>
-          <p:cNvSpPr/>
-          <p:nvPr/>
-        </p:nvSpPr>
-        <p:spPr>
-          <a:xfrm>
-            <a:off x="566928" y="4160520"/>
-            <a:ext cx="32004" cy="256032"/>
+              <a:t>Zum Schluss für alle: /26 – wie viele Geräte? Jetzt kann es jeder</a:t>
+            </a:r>
+            <a:endParaRPr lang="en-US" sz="1200" dirty="0"/>
+          </a:p>
+        </p:txBody>
+      </p:sp>
+      <p:sp>
+        <p:nvSpPr>
+          <p:cNvPr id="18" name="Shape 16"/>
+          <p:cNvSpPr/>
+          <p:nvPr/>
+        </p:nvSpPr>
+        <p:spPr>
+          <a:xfrm>
+            <a:off x="566928" y="3794760"/>
+            <a:ext cx="8010144" cy="548640"/>
+          </a:xfrm>
+          <a:prstGeom prst="rect">
+            <a:avLst/>
+          </a:prstGeom>
+          <a:solidFill>
+            <a:srgbClr val="EEF0FB"/>
+          </a:solidFill>
+          <a:ln/>
+        </p:spPr>
+      </p:sp>
+      <p:sp>
+        <p:nvSpPr>
+          <p:cNvPr id="19" name="Shape 17"/>
+          <p:cNvSpPr/>
+          <p:nvPr/>
+        </p:nvSpPr>
+        <p:spPr>
+          <a:xfrm>
+            <a:off x="566928" y="3794760"/>
+            <a:ext cx="41148" cy="548640"/>
           </a:xfrm>
           <a:prstGeom prst="rect">
             <a:avLst/>
@@ -10955,30 +10280,33 @@
       </p:sp>
       <p:sp>
         <p:nvSpPr>
-          <p:cNvPr id="28" name="Text 26"/>
-          <p:cNvSpPr/>
-          <p:nvPr/>
-        </p:nvSpPr>
-        <p:spPr>
-          <a:xfrm>
-            <a:off x="749808" y="4114800"/>
-            <a:ext cx="7827264" cy="402336"/>
-          </a:xfrm>
-          <a:prstGeom prst="rect">
-            <a:avLst/>
-          </a:prstGeom>
-          <a:noFill/>
-          <a:ln/>
-        </p:spPr>
-        <p:txBody>
-          <a:bodyPr wrap="square" lIns="0" tIns="0" rIns="0" bIns="0" rtlCol="0" anchor="ctr"/>
-          <a:lstStyle/>
-          <a:p>
-            <a:pPr indent="0" marL="0">
-              <a:buNone/>
-            </a:pPr>
-            <a:r>
-              <a:rPr lang="en-US" sz="1200" b="1" dirty="0">
+          <p:cNvPr id="20" name="Text 18"/>
+          <p:cNvSpPr/>
+          <p:nvPr/>
+        </p:nvSpPr>
+        <p:spPr>
+          <a:xfrm>
+            <a:off x="804672" y="3941064"/>
+            <a:ext cx="7607808" cy="283464"/>
+          </a:xfrm>
+          <a:prstGeom prst="rect">
+            <a:avLst/>
+          </a:prstGeom>
+          <a:noFill/>
+          <a:ln/>
+        </p:spPr>
+        <p:txBody>
+          <a:bodyPr wrap="square" lIns="0" tIns="0" rIns="0" bIns="0" rtlCol="0" anchor="t"/>
+          <a:lstStyle/>
+          <a:p>
+            <a:pPr indent="0" marL="0">
+              <a:lnSpc>
+                <a:spcPct val="92000"/>
+              </a:lnSpc>
+              <a:buNone/>
+            </a:pPr>
+            <a:r>
+              <a:rPr lang="en-US" sz="1150" dirty="0">
                 <a:solidFill>
                   <a:srgbClr val="434A63"/>
                 </a:solidFill>
@@ -10986,15 +10314,15 @@
                 <a:ea typeface="Arial" pitchFamily="34" charset="-122"/>
                 <a:cs typeface="Arial" pitchFamily="34" charset="-120"/>
               </a:rPr>
-              <a:t>Größte zuerst vermeidet Lücken. Probe: 128 + 64 + 32 + 16 = 240 ≤ 256 – passt.</a:t>
-            </a:r>
-            <a:endParaRPr lang="en-US" sz="1200" dirty="0"/>
-          </a:p>
-        </p:txBody>
-      </p:sp>
-      <p:sp>
-        <p:nvSpPr>
-          <p:cNvPr id="29" name="Shape 27"/>
+              <a:t>Es gibt mehrere richtige Pläne. Falsch ist nur, was sich überlappt oder nicht reicht.</a:t>
+            </a:r>
+            <a:endParaRPr lang="en-US" sz="1150" dirty="0"/>
+          </a:p>
+        </p:txBody>
+      </p:sp>
+      <p:sp>
+        <p:nvSpPr>
+          <p:cNvPr id="21" name="Shape 19"/>
           <p:cNvSpPr/>
           <p:nvPr/>
         </p:nvSpPr>
@@ -11017,7 +10345,7 @@
       </p:sp>
       <p:sp>
         <p:nvSpPr>
-          <p:cNvPr id="30" name="Text 28"/>
+          <p:cNvPr id="22" name="Text 20"/>
           <p:cNvSpPr/>
           <p:nvPr/>
         </p:nvSpPr>
@@ -11056,7 +10384,7 @@
       </p:sp>
       <p:sp>
         <p:nvSpPr>
-          <p:cNvPr id="31" name="Text 29"/>
+          <p:cNvPr id="23" name="Text 21"/>
           <p:cNvSpPr/>
           <p:nvPr/>
         </p:nvSpPr>
@@ -11087,7 +10415,7 @@
                 <a:ea typeface="Arial" pitchFamily="34" charset="-122"/>
                 <a:cs typeface="Arial" pitchFamily="34" charset="-120"/>
               </a:rPr>
-              <a:t>18/20</a:t>
+              <a:t>18/21</a:t>
             </a:r>
             <a:endParaRPr lang="en-US" sz="1050" dirty="0"/>
           </a:p>
@@ -11178,7 +10506,7 @@
                 <a:ea typeface="Arial" pitchFamily="34" charset="-122"/>
                 <a:cs typeface="Arial" pitchFamily="34" charset="-120"/>
               </a:rPr>
-              <a:t>KERN DES ABENDS</a:t>
+              <a:t>AUSWERTUNG</a:t>
             </a:r>
             <a:endParaRPr lang="en-US" sz="1150" dirty="0"/>
           </a:p>
@@ -11217,7 +10545,7 @@
                 <a:ea typeface="Arial" pitchFamily="34" charset="-122"/>
                 <a:cs typeface="Arial" pitchFamily="34" charset="-120"/>
               </a:rPr>
-              <a:t>Das nehmt ihr heute mit</a:t>
+              <a:t>Eine mögliche Lösung</a:t>
             </a:r>
             <a:endParaRPr lang="en-US" sz="2600" dirty="0"/>
           </a:p>
@@ -11231,27 +10559,24 @@
         </p:nvSpPr>
         <p:spPr>
           <a:xfrm>
-            <a:off x="566928" y="1691640"/>
-            <a:ext cx="8010144" cy="1828800"/>
-          </a:xfrm>
-          <a:prstGeom prst="rect">
-            <a:avLst/>
-          </a:prstGeom>
-          <a:noFill/>
-          <a:ln/>
-        </p:spPr>
-        <p:txBody>
-          <a:bodyPr wrap="square" lIns="0" tIns="0" rIns="0" bIns="0" rtlCol="0" anchor="t"/>
-          <a:lstStyle/>
-          <a:p>
-            <a:pPr indent="0" marL="0">
-              <a:lnSpc>
-                <a:spcPct val="92000"/>
-              </a:lnSpc>
-              <a:buNone/>
-            </a:pPr>
-            <a:r>
-              <a:rPr lang="en-US" sz="1350" b="1" dirty="0">
+            <a:off x="658368" y="1737360"/>
+            <a:ext cx="1554480" cy="274320"/>
+          </a:xfrm>
+          <a:prstGeom prst="rect">
+            <a:avLst/>
+          </a:prstGeom>
+          <a:noFill/>
+          <a:ln/>
+        </p:spPr>
+        <p:txBody>
+          <a:bodyPr wrap="square" lIns="0" tIns="0" rIns="0" bIns="0" rtlCol="0" anchor="ctr"/>
+          <a:lstStyle/>
+          <a:p>
+            <a:pPr indent="0" marL="0">
+              <a:buNone/>
+            </a:pPr>
+            <a:r>
+              <a:rPr lang="en-US" sz="1050" b="1" spc="80" kern="0" dirty="0">
                 <a:solidFill>
                   <a:srgbClr val="3843AF"/>
                 </a:solidFill>
@@ -11259,19 +10584,198 @@
                 <a:ea typeface="Arial" pitchFamily="34" charset="-122"/>
                 <a:cs typeface="Arial" pitchFamily="34" charset="-120"/>
               </a:rPr>
-              <a:t>▸   </a:t>
-            </a:r>
-            <a:pPr indent="0" marL="0">
-              <a:lnSpc>
-                <a:spcPct val="92000"/>
-              </a:lnSpc>
-              <a:spcAft>
-                <a:spcPts val="900"/>
-              </a:spcAft>
-              <a:buNone/>
-            </a:pPr>
-            <a:r>
-              <a:rPr lang="en-US" sz="1350" b="1" dirty="0">
+              <a:t>Abteilung</a:t>
+            </a:r>
+            <a:endParaRPr lang="en-US" sz="1050" dirty="0"/>
+          </a:p>
+        </p:txBody>
+      </p:sp>
+      <p:sp>
+        <p:nvSpPr>
+          <p:cNvPr id="6" name="Text 4"/>
+          <p:cNvSpPr/>
+          <p:nvPr/>
+        </p:nvSpPr>
+        <p:spPr>
+          <a:xfrm>
+            <a:off x="2395728" y="1737360"/>
+            <a:ext cx="731520" cy="274320"/>
+          </a:xfrm>
+          <a:prstGeom prst="rect">
+            <a:avLst/>
+          </a:prstGeom>
+          <a:noFill/>
+          <a:ln/>
+        </p:spPr>
+        <p:txBody>
+          <a:bodyPr wrap="square" lIns="0" tIns="0" rIns="0" bIns="0" rtlCol="0" anchor="ctr"/>
+          <a:lstStyle/>
+          <a:p>
+            <a:pPr indent="0" marL="0">
+              <a:buNone/>
+            </a:pPr>
+            <a:r>
+              <a:rPr lang="en-US" sz="1050" b="1" spc="80" kern="0" dirty="0">
+                <a:solidFill>
+                  <a:srgbClr val="3843AF"/>
+                </a:solidFill>
+                <a:latin typeface="Arial" pitchFamily="34" charset="0"/>
+                <a:ea typeface="Arial" pitchFamily="34" charset="-122"/>
+                <a:cs typeface="Arial" pitchFamily="34" charset="-120"/>
+              </a:rPr>
+              <a:t>Präfix</a:t>
+            </a:r>
+            <a:endParaRPr lang="en-US" sz="1050" dirty="0"/>
+          </a:p>
+        </p:txBody>
+      </p:sp>
+      <p:sp>
+        <p:nvSpPr>
+          <p:cNvPr id="7" name="Text 5"/>
+          <p:cNvSpPr/>
+          <p:nvPr/>
+        </p:nvSpPr>
+        <p:spPr>
+          <a:xfrm>
+            <a:off x="3310128" y="1737360"/>
+            <a:ext cx="5175504" cy="274320"/>
+          </a:xfrm>
+          <a:prstGeom prst="rect">
+            <a:avLst/>
+          </a:prstGeom>
+          <a:noFill/>
+          <a:ln/>
+        </p:spPr>
+        <p:txBody>
+          <a:bodyPr wrap="square" lIns="0" tIns="0" rIns="0" bIns="0" rtlCol="0" anchor="ctr"/>
+          <a:lstStyle/>
+          <a:p>
+            <a:pPr indent="0" marL="0">
+              <a:buNone/>
+            </a:pPr>
+            <a:r>
+              <a:rPr lang="en-US" sz="1050" b="1" spc="80" kern="0" dirty="0">
+                <a:solidFill>
+                  <a:srgbClr val="3843AF"/>
+                </a:solidFill>
+                <a:latin typeface="Arial" pitchFamily="34" charset="0"/>
+                <a:ea typeface="Arial" pitchFamily="34" charset="-122"/>
+                <a:cs typeface="Arial" pitchFamily="34" charset="-120"/>
+              </a:rPr>
+              <a:t>Netz · nutzbar · Broadcast</a:t>
+            </a:r>
+            <a:endParaRPr lang="en-US" sz="1050" dirty="0"/>
+          </a:p>
+        </p:txBody>
+      </p:sp>
+      <p:sp>
+        <p:nvSpPr>
+          <p:cNvPr id="8" name="Shape 6"/>
+          <p:cNvSpPr/>
+          <p:nvPr/>
+        </p:nvSpPr>
+        <p:spPr>
+          <a:xfrm>
+            <a:off x="566928" y="2029968"/>
+            <a:ext cx="8010144" cy="0"/>
+          </a:xfrm>
+          <a:prstGeom prst="line">
+            <a:avLst/>
+          </a:prstGeom>
+          <a:noFill/>
+          <a:ln w="12700">
+            <a:solidFill>
+              <a:srgbClr val="DFE3F0"/>
+            </a:solidFill>
+            <a:prstDash val="solid"/>
+          </a:ln>
+        </p:spPr>
+      </p:sp>
+      <p:sp>
+        <p:nvSpPr>
+          <p:cNvPr id="9" name="Shape 7"/>
+          <p:cNvSpPr/>
+          <p:nvPr/>
+        </p:nvSpPr>
+        <p:spPr>
+          <a:xfrm>
+            <a:off x="475488" y="2103120"/>
+            <a:ext cx="8193024" cy="365760"/>
+          </a:xfrm>
+          <a:prstGeom prst="rect">
+            <a:avLst/>
+          </a:prstGeom>
+          <a:solidFill>
+            <a:srgbClr val="F5F6FC"/>
+          </a:solidFill>
+          <a:ln/>
+        </p:spPr>
+      </p:sp>
+      <p:sp>
+        <p:nvSpPr>
+          <p:cNvPr id="10" name="Text 8"/>
+          <p:cNvSpPr/>
+          <p:nvPr/>
+        </p:nvSpPr>
+        <p:spPr>
+          <a:xfrm>
+            <a:off x="658368" y="2103120"/>
+            <a:ext cx="1554480" cy="365760"/>
+          </a:xfrm>
+          <a:prstGeom prst="rect">
+            <a:avLst/>
+          </a:prstGeom>
+          <a:noFill/>
+          <a:ln/>
+        </p:spPr>
+        <p:txBody>
+          <a:bodyPr wrap="square" lIns="0" tIns="0" rIns="0" bIns="0" rtlCol="0" anchor="ctr"/>
+          <a:lstStyle/>
+          <a:p>
+            <a:pPr indent="0" marL="0">
+              <a:buNone/>
+            </a:pPr>
+            <a:r>
+              <a:rPr lang="en-US" sz="1150" b="1" dirty="0">
+                <a:solidFill>
+                  <a:srgbClr val="272E52"/>
+                </a:solidFill>
+                <a:latin typeface="Arial" pitchFamily="34" charset="0"/>
+                <a:ea typeface="Arial" pitchFamily="34" charset="-122"/>
+                <a:cs typeface="Arial" pitchFamily="34" charset="-120"/>
+              </a:rPr>
+              <a:t>Büro (100)</a:t>
+            </a:r>
+            <a:endParaRPr lang="en-US" sz="1150" dirty="0"/>
+          </a:p>
+        </p:txBody>
+      </p:sp>
+      <p:sp>
+        <p:nvSpPr>
+          <p:cNvPr id="11" name="Text 9"/>
+          <p:cNvSpPr/>
+          <p:nvPr/>
+        </p:nvSpPr>
+        <p:spPr>
+          <a:xfrm>
+            <a:off x="2395728" y="2103120"/>
+            <a:ext cx="731520" cy="365760"/>
+          </a:xfrm>
+          <a:prstGeom prst="rect">
+            <a:avLst/>
+          </a:prstGeom>
+          <a:noFill/>
+          <a:ln/>
+        </p:spPr>
+        <p:txBody>
+          <a:bodyPr wrap="square" lIns="0" tIns="0" rIns="0" bIns="0" rtlCol="0" anchor="ctr"/>
+          <a:lstStyle/>
+          <a:p>
+            <a:pPr indent="0" marL="0">
+              <a:buNone/>
+            </a:pPr>
+            <a:r>
+              <a:rPr lang="en-US" sz="1150" dirty="0">
                 <a:solidFill>
                   <a:srgbClr val="434A63"/>
                 </a:solidFill>
@@ -11279,39 +10783,38 @@
                 <a:ea typeface="Arial" pitchFamily="34" charset="-122"/>
                 <a:cs typeface="Arial" pitchFamily="34" charset="-120"/>
               </a:rPr>
-              <a:t>Die Maske zieht die Grenze zwischen Netzanteil und Hostanteil.</a:t>
-            </a:r>
-            <a:endParaRPr lang="en-US" sz="1350" dirty="0"/>
-          </a:p>
-          <a:p>
-            <a:pPr indent="0" marL="0">
-              <a:lnSpc>
-                <a:spcPct val="92000"/>
-              </a:lnSpc>
-              <a:buNone/>
-            </a:pPr>
-            <a:r>
-              <a:rPr lang="en-US" sz="1350" b="1" dirty="0">
-                <a:solidFill>
-                  <a:srgbClr val="3843AF"/>
-                </a:solidFill>
-                <a:latin typeface="Arial" pitchFamily="34" charset="0"/>
-                <a:ea typeface="Arial" pitchFamily="34" charset="-122"/>
-                <a:cs typeface="Arial" pitchFamily="34" charset="-120"/>
-              </a:rPr>
-              <a:t>▸   </a:t>
-            </a:r>
-            <a:pPr indent="0" marL="0">
-              <a:lnSpc>
-                <a:spcPct val="92000"/>
-              </a:lnSpc>
-              <a:spcAft>
-                <a:spcPts val="900"/>
-              </a:spcAft>
-              <a:buNone/>
-            </a:pPr>
-            <a:r>
-              <a:rPr lang="en-US" sz="1350" b="1" dirty="0">
+              <a:t>/25</a:t>
+            </a:r>
+            <a:endParaRPr lang="en-US" sz="1150" dirty="0"/>
+          </a:p>
+        </p:txBody>
+      </p:sp>
+      <p:sp>
+        <p:nvSpPr>
+          <p:cNvPr id="12" name="Text 10"/>
+          <p:cNvSpPr/>
+          <p:nvPr/>
+        </p:nvSpPr>
+        <p:spPr>
+          <a:xfrm>
+            <a:off x="3310128" y="2103120"/>
+            <a:ext cx="5175504" cy="365760"/>
+          </a:xfrm>
+          <a:prstGeom prst="rect">
+            <a:avLst/>
+          </a:prstGeom>
+          <a:noFill/>
+          <a:ln/>
+        </p:spPr>
+        <p:txBody>
+          <a:bodyPr wrap="square" lIns="0" tIns="0" rIns="0" bIns="0" rtlCol="0" anchor="ctr"/>
+          <a:lstStyle/>
+          <a:p>
+            <a:pPr indent="0" marL="0">
+              <a:buNone/>
+            </a:pPr>
+            <a:r>
+              <a:rPr lang="en-US" sz="1150" dirty="0">
                 <a:solidFill>
                   <a:srgbClr val="434A63"/>
                 </a:solidFill>
@@ -11319,39 +10822,77 @@
                 <a:ea typeface="Arial" pitchFamily="34" charset="-122"/>
                 <a:cs typeface="Arial" pitchFamily="34" charset="-120"/>
               </a:rPr>
-              <a:t>Blockgröße = 2 hoch Hostbits. Nutzbar = Blockgröße minus zwei.</a:t>
-            </a:r>
-            <a:endParaRPr lang="en-US" sz="1350" dirty="0"/>
-          </a:p>
-          <a:p>
-            <a:pPr indent="0" marL="0">
-              <a:lnSpc>
-                <a:spcPct val="92000"/>
-              </a:lnSpc>
-              <a:buNone/>
-            </a:pPr>
-            <a:r>
-              <a:rPr lang="en-US" sz="1350" b="1" dirty="0">
-                <a:solidFill>
-                  <a:srgbClr val="3843AF"/>
-                </a:solidFill>
-                <a:latin typeface="Arial" pitchFamily="34" charset="0"/>
-                <a:ea typeface="Arial" pitchFamily="34" charset="-122"/>
-                <a:cs typeface="Arial" pitchFamily="34" charset="-120"/>
-              </a:rPr>
-              <a:t>▸   </a:t>
-            </a:r>
-            <a:pPr indent="0" marL="0">
-              <a:lnSpc>
-                <a:spcPct val="92000"/>
-              </a:lnSpc>
-              <a:spcAft>
-                <a:spcPts val="900"/>
-              </a:spcAft>
-              <a:buNone/>
-            </a:pPr>
-            <a:r>
-              <a:rPr lang="en-US" sz="1350" b="1" dirty="0">
+              <a:t>192.168.10.0 · .1–.126 · .127</a:t>
+            </a:r>
+            <a:endParaRPr lang="en-US" sz="1150" dirty="0"/>
+          </a:p>
+        </p:txBody>
+      </p:sp>
+      <p:sp>
+        <p:nvSpPr>
+          <p:cNvPr id="13" name="Text 11"/>
+          <p:cNvSpPr/>
+          <p:nvPr/>
+        </p:nvSpPr>
+        <p:spPr>
+          <a:xfrm>
+            <a:off x="658368" y="2468880"/>
+            <a:ext cx="1554480" cy="365760"/>
+          </a:xfrm>
+          <a:prstGeom prst="rect">
+            <a:avLst/>
+          </a:prstGeom>
+          <a:noFill/>
+          <a:ln/>
+        </p:spPr>
+        <p:txBody>
+          <a:bodyPr wrap="square" lIns="0" tIns="0" rIns="0" bIns="0" rtlCol="0" anchor="ctr"/>
+          <a:lstStyle/>
+          <a:p>
+            <a:pPr indent="0" marL="0">
+              <a:buNone/>
+            </a:pPr>
+            <a:r>
+              <a:rPr lang="en-US" sz="1150" b="1" dirty="0">
+                <a:solidFill>
+                  <a:srgbClr val="272E52"/>
+                </a:solidFill>
+                <a:latin typeface="Arial" pitchFamily="34" charset="0"/>
+                <a:ea typeface="Arial" pitchFamily="34" charset="-122"/>
+                <a:cs typeface="Arial" pitchFamily="34" charset="-120"/>
+              </a:rPr>
+              <a:t>Gäste-WLAN (50)</a:t>
+            </a:r>
+            <a:endParaRPr lang="en-US" sz="1150" dirty="0"/>
+          </a:p>
+        </p:txBody>
+      </p:sp>
+      <p:sp>
+        <p:nvSpPr>
+          <p:cNvPr id="14" name="Text 12"/>
+          <p:cNvSpPr/>
+          <p:nvPr/>
+        </p:nvSpPr>
+        <p:spPr>
+          <a:xfrm>
+            <a:off x="2395728" y="2468880"/>
+            <a:ext cx="731520" cy="365760"/>
+          </a:xfrm>
+          <a:prstGeom prst="rect">
+            <a:avLst/>
+          </a:prstGeom>
+          <a:noFill/>
+          <a:ln/>
+        </p:spPr>
+        <p:txBody>
+          <a:bodyPr wrap="square" lIns="0" tIns="0" rIns="0" bIns="0" rtlCol="0" anchor="ctr"/>
+          <a:lstStyle/>
+          <a:p>
+            <a:pPr indent="0" marL="0">
+              <a:buNone/>
+            </a:pPr>
+            <a:r>
+              <a:rPr lang="en-US" sz="1150" dirty="0">
                 <a:solidFill>
                   <a:srgbClr val="434A63"/>
                 </a:solidFill>
@@ -11359,39 +10900,38 @@
                 <a:ea typeface="Arial" pitchFamily="34" charset="-122"/>
                 <a:cs typeface="Arial" pitchFamily="34" charset="-120"/>
               </a:rPr>
-              <a:t>Netzadresse benennt das Netz, Broadcast ruft alle – beide sind reserviert.</a:t>
-            </a:r>
-            <a:endParaRPr lang="en-US" sz="1350" dirty="0"/>
-          </a:p>
-          <a:p>
-            <a:pPr indent="0" marL="0">
-              <a:lnSpc>
-                <a:spcPct val="92000"/>
-              </a:lnSpc>
-              <a:buNone/>
-            </a:pPr>
-            <a:r>
-              <a:rPr lang="en-US" sz="1350" b="1" dirty="0">
-                <a:solidFill>
-                  <a:srgbClr val="3843AF"/>
-                </a:solidFill>
-                <a:latin typeface="Arial" pitchFamily="34" charset="0"/>
-                <a:ea typeface="Arial" pitchFamily="34" charset="-122"/>
-                <a:cs typeface="Arial" pitchFamily="34" charset="-120"/>
-              </a:rPr>
-              <a:t>▸   </a:t>
-            </a:r>
-            <a:pPr indent="0" marL="0">
-              <a:lnSpc>
-                <a:spcPct val="92000"/>
-              </a:lnSpc>
-              <a:spcAft>
-                <a:spcPts val="900"/>
-              </a:spcAft>
-              <a:buNone/>
-            </a:pPr>
-            <a:r>
-              <a:rPr lang="en-US" sz="1350" b="1" dirty="0">
+              <a:t>/26</a:t>
+            </a:r>
+            <a:endParaRPr lang="en-US" sz="1150" dirty="0"/>
+          </a:p>
+        </p:txBody>
+      </p:sp>
+      <p:sp>
+        <p:nvSpPr>
+          <p:cNvPr id="15" name="Text 13"/>
+          <p:cNvSpPr/>
+          <p:nvPr/>
+        </p:nvSpPr>
+        <p:spPr>
+          <a:xfrm>
+            <a:off x="3310128" y="2468880"/>
+            <a:ext cx="5175504" cy="365760"/>
+          </a:xfrm>
+          <a:prstGeom prst="rect">
+            <a:avLst/>
+          </a:prstGeom>
+          <a:noFill/>
+          <a:ln/>
+        </p:spPr>
+        <p:txBody>
+          <a:bodyPr wrap="square" lIns="0" tIns="0" rIns="0" bIns="0" rtlCol="0" anchor="ctr"/>
+          <a:lstStyle/>
+          <a:p>
+            <a:pPr indent="0" marL="0">
+              <a:buNone/>
+            </a:pPr>
+            <a:r>
+              <a:rPr lang="en-US" sz="1150" dirty="0">
                 <a:solidFill>
                   <a:srgbClr val="434A63"/>
                 </a:solidFill>
@@ -11399,39 +10939,97 @@
                 <a:ea typeface="Arial" pitchFamily="34" charset="-122"/>
                 <a:cs typeface="Arial" pitchFamily="34" charset="-120"/>
               </a:rPr>
-              <a:t>Privat heißt 10er, 172.16er, 192.168er – NAT übersetzt am Router nach draußen.</a:t>
-            </a:r>
-            <a:endParaRPr lang="en-US" sz="1350" dirty="0"/>
-          </a:p>
-          <a:p>
-            <a:pPr indent="0" marL="0">
-              <a:lnSpc>
-                <a:spcPct val="92000"/>
-              </a:lnSpc>
-              <a:buNone/>
-            </a:pPr>
-            <a:r>
-              <a:rPr lang="en-US" sz="1350" b="1" dirty="0">
-                <a:solidFill>
-                  <a:srgbClr val="3843AF"/>
-                </a:solidFill>
-                <a:latin typeface="Arial" pitchFamily="34" charset="0"/>
-                <a:ea typeface="Arial" pitchFamily="34" charset="-122"/>
-                <a:cs typeface="Arial" pitchFamily="34" charset="-120"/>
-              </a:rPr>
-              <a:t>▸   </a:t>
-            </a:r>
-            <a:pPr indent="0" marL="0">
-              <a:lnSpc>
-                <a:spcPct val="92000"/>
-              </a:lnSpc>
-              <a:spcAft>
-                <a:spcPts val="900"/>
-              </a:spcAft>
-              <a:buNone/>
-            </a:pPr>
-            <a:r>
-              <a:rPr lang="en-US" sz="1350" b="1" dirty="0">
+              <a:t>192.168.10.128 · .129–.190 · .191</a:t>
+            </a:r>
+            <a:endParaRPr lang="en-US" sz="1150" dirty="0"/>
+          </a:p>
+        </p:txBody>
+      </p:sp>
+      <p:sp>
+        <p:nvSpPr>
+          <p:cNvPr id="16" name="Shape 14"/>
+          <p:cNvSpPr/>
+          <p:nvPr/>
+        </p:nvSpPr>
+        <p:spPr>
+          <a:xfrm>
+            <a:off x="475488" y="2834640"/>
+            <a:ext cx="8193024" cy="365760"/>
+          </a:xfrm>
+          <a:prstGeom prst="rect">
+            <a:avLst/>
+          </a:prstGeom>
+          <a:solidFill>
+            <a:srgbClr val="F5F6FC"/>
+          </a:solidFill>
+          <a:ln/>
+        </p:spPr>
+      </p:sp>
+      <p:sp>
+        <p:nvSpPr>
+          <p:cNvPr id="17" name="Text 15"/>
+          <p:cNvSpPr/>
+          <p:nvPr/>
+        </p:nvSpPr>
+        <p:spPr>
+          <a:xfrm>
+            <a:off x="658368" y="2834640"/>
+            <a:ext cx="1554480" cy="365760"/>
+          </a:xfrm>
+          <a:prstGeom prst="rect">
+            <a:avLst/>
+          </a:prstGeom>
+          <a:noFill/>
+          <a:ln/>
+        </p:spPr>
+        <p:txBody>
+          <a:bodyPr wrap="square" lIns="0" tIns="0" rIns="0" bIns="0" rtlCol="0" anchor="ctr"/>
+          <a:lstStyle/>
+          <a:p>
+            <a:pPr indent="0" marL="0">
+              <a:buNone/>
+            </a:pPr>
+            <a:r>
+              <a:rPr lang="en-US" sz="1150" b="1" dirty="0">
+                <a:solidFill>
+                  <a:srgbClr val="272E52"/>
+                </a:solidFill>
+                <a:latin typeface="Arial" pitchFamily="34" charset="0"/>
+                <a:ea typeface="Arial" pitchFamily="34" charset="-122"/>
+                <a:cs typeface="Arial" pitchFamily="34" charset="-120"/>
+              </a:rPr>
+              <a:t>Produktion (20)</a:t>
+            </a:r>
+            <a:endParaRPr lang="en-US" sz="1150" dirty="0"/>
+          </a:p>
+        </p:txBody>
+      </p:sp>
+      <p:sp>
+        <p:nvSpPr>
+          <p:cNvPr id="18" name="Text 16"/>
+          <p:cNvSpPr/>
+          <p:nvPr/>
+        </p:nvSpPr>
+        <p:spPr>
+          <a:xfrm>
+            <a:off x="2395728" y="2834640"/>
+            <a:ext cx="731520" cy="365760"/>
+          </a:xfrm>
+          <a:prstGeom prst="rect">
+            <a:avLst/>
+          </a:prstGeom>
+          <a:noFill/>
+          <a:ln/>
+        </p:spPr>
+        <p:txBody>
+          <a:bodyPr wrap="square" lIns="0" tIns="0" rIns="0" bIns="0" rtlCol="0" anchor="ctr"/>
+          <a:lstStyle/>
+          <a:p>
+            <a:pPr indent="0" marL="0">
+              <a:buNone/>
+            </a:pPr>
+            <a:r>
+              <a:rPr lang="en-US" sz="1150" dirty="0">
                 <a:solidFill>
                   <a:srgbClr val="434A63"/>
                 </a:solidFill>
@@ -11439,42 +11037,315 @@
                 <a:ea typeface="Arial" pitchFamily="34" charset="-122"/>
                 <a:cs typeface="Arial" pitchFamily="34" charset="-120"/>
               </a:rPr>
-              <a:t>IPv6 nimmt euch das Rechnen ab – das Netz ist fast immer ein /64.</a:t>
-            </a:r>
-            <a:endParaRPr lang="en-US" sz="1350" dirty="0"/>
-          </a:p>
-        </p:txBody>
-      </p:sp>
-      <p:sp>
-        <p:nvSpPr>
-          <p:cNvPr id="6" name="Shape 4"/>
-          <p:cNvSpPr/>
-          <p:nvPr/>
-        </p:nvSpPr>
-        <p:spPr>
-          <a:xfrm>
-            <a:off x="566928" y="3566160"/>
-            <a:ext cx="8010144" cy="960120"/>
+              <a:t>/27</a:t>
+            </a:r>
+            <a:endParaRPr lang="en-US" sz="1150" dirty="0"/>
+          </a:p>
+        </p:txBody>
+      </p:sp>
+      <p:sp>
+        <p:nvSpPr>
+          <p:cNvPr id="19" name="Text 17"/>
+          <p:cNvSpPr/>
+          <p:nvPr/>
+        </p:nvSpPr>
+        <p:spPr>
+          <a:xfrm>
+            <a:off x="3310128" y="2834640"/>
+            <a:ext cx="5175504" cy="365760"/>
+          </a:xfrm>
+          <a:prstGeom prst="rect">
+            <a:avLst/>
+          </a:prstGeom>
+          <a:noFill/>
+          <a:ln/>
+        </p:spPr>
+        <p:txBody>
+          <a:bodyPr wrap="square" lIns="0" tIns="0" rIns="0" bIns="0" rtlCol="0" anchor="ctr"/>
+          <a:lstStyle/>
+          <a:p>
+            <a:pPr indent="0" marL="0">
+              <a:buNone/>
+            </a:pPr>
+            <a:r>
+              <a:rPr lang="en-US" sz="1150" dirty="0">
+                <a:solidFill>
+                  <a:srgbClr val="434A63"/>
+                </a:solidFill>
+                <a:latin typeface="Arial" pitchFamily="34" charset="0"/>
+                <a:ea typeface="Arial" pitchFamily="34" charset="-122"/>
+                <a:cs typeface="Arial" pitchFamily="34" charset="-120"/>
+              </a:rPr>
+              <a:t>192.168.10.192 · .193–.222 · .223</a:t>
+            </a:r>
+            <a:endParaRPr lang="en-US" sz="1150" dirty="0"/>
+          </a:p>
+        </p:txBody>
+      </p:sp>
+      <p:sp>
+        <p:nvSpPr>
+          <p:cNvPr id="20" name="Text 18"/>
+          <p:cNvSpPr/>
+          <p:nvPr/>
+        </p:nvSpPr>
+        <p:spPr>
+          <a:xfrm>
+            <a:off x="658368" y="3200400"/>
+            <a:ext cx="1554480" cy="365760"/>
+          </a:xfrm>
+          <a:prstGeom prst="rect">
+            <a:avLst/>
+          </a:prstGeom>
+          <a:noFill/>
+          <a:ln/>
+        </p:spPr>
+        <p:txBody>
+          <a:bodyPr wrap="square" lIns="0" tIns="0" rIns="0" bIns="0" rtlCol="0" anchor="ctr"/>
+          <a:lstStyle/>
+          <a:p>
+            <a:pPr indent="0" marL="0">
+              <a:buNone/>
+            </a:pPr>
+            <a:r>
+              <a:rPr lang="en-US" sz="1150" b="1" dirty="0">
+                <a:solidFill>
+                  <a:srgbClr val="272E52"/>
+                </a:solidFill>
+                <a:latin typeface="Arial" pitchFamily="34" charset="0"/>
+                <a:ea typeface="Arial" pitchFamily="34" charset="-122"/>
+                <a:cs typeface="Arial" pitchFamily="34" charset="-120"/>
+              </a:rPr>
+              <a:t>Server (10)</a:t>
+            </a:r>
+            <a:endParaRPr lang="en-US" sz="1150" dirty="0"/>
+          </a:p>
+        </p:txBody>
+      </p:sp>
+      <p:sp>
+        <p:nvSpPr>
+          <p:cNvPr id="21" name="Text 19"/>
+          <p:cNvSpPr/>
+          <p:nvPr/>
+        </p:nvSpPr>
+        <p:spPr>
+          <a:xfrm>
+            <a:off x="2395728" y="3200400"/>
+            <a:ext cx="731520" cy="365760"/>
+          </a:xfrm>
+          <a:prstGeom prst="rect">
+            <a:avLst/>
+          </a:prstGeom>
+          <a:noFill/>
+          <a:ln/>
+        </p:spPr>
+        <p:txBody>
+          <a:bodyPr wrap="square" lIns="0" tIns="0" rIns="0" bIns="0" rtlCol="0" anchor="ctr"/>
+          <a:lstStyle/>
+          <a:p>
+            <a:pPr indent="0" marL="0">
+              <a:buNone/>
+            </a:pPr>
+            <a:r>
+              <a:rPr lang="en-US" sz="1150" dirty="0">
+                <a:solidFill>
+                  <a:srgbClr val="434A63"/>
+                </a:solidFill>
+                <a:latin typeface="Arial" pitchFamily="34" charset="0"/>
+                <a:ea typeface="Arial" pitchFamily="34" charset="-122"/>
+                <a:cs typeface="Arial" pitchFamily="34" charset="-120"/>
+              </a:rPr>
+              <a:t>/28</a:t>
+            </a:r>
+            <a:endParaRPr lang="en-US" sz="1150" dirty="0"/>
+          </a:p>
+        </p:txBody>
+      </p:sp>
+      <p:sp>
+        <p:nvSpPr>
+          <p:cNvPr id="22" name="Text 20"/>
+          <p:cNvSpPr/>
+          <p:nvPr/>
+        </p:nvSpPr>
+        <p:spPr>
+          <a:xfrm>
+            <a:off x="3310128" y="3200400"/>
+            <a:ext cx="5175504" cy="365760"/>
+          </a:xfrm>
+          <a:prstGeom prst="rect">
+            <a:avLst/>
+          </a:prstGeom>
+          <a:noFill/>
+          <a:ln/>
+        </p:spPr>
+        <p:txBody>
+          <a:bodyPr wrap="square" lIns="0" tIns="0" rIns="0" bIns="0" rtlCol="0" anchor="ctr"/>
+          <a:lstStyle/>
+          <a:p>
+            <a:pPr indent="0" marL="0">
+              <a:buNone/>
+            </a:pPr>
+            <a:r>
+              <a:rPr lang="en-US" sz="1150" dirty="0">
+                <a:solidFill>
+                  <a:srgbClr val="434A63"/>
+                </a:solidFill>
+                <a:latin typeface="Arial" pitchFamily="34" charset="0"/>
+                <a:ea typeface="Arial" pitchFamily="34" charset="-122"/>
+                <a:cs typeface="Arial" pitchFamily="34" charset="-120"/>
+              </a:rPr>
+              <a:t>192.168.10.224 · .225–.238 · .239</a:t>
+            </a:r>
+            <a:endParaRPr lang="en-US" sz="1150" dirty="0"/>
+          </a:p>
+        </p:txBody>
+      </p:sp>
+      <p:sp>
+        <p:nvSpPr>
+          <p:cNvPr id="23" name="Shape 21"/>
+          <p:cNvSpPr/>
+          <p:nvPr/>
+        </p:nvSpPr>
+        <p:spPr>
+          <a:xfrm>
+            <a:off x="475488" y="3566160"/>
+            <a:ext cx="8193024" cy="365760"/>
           </a:xfrm>
           <a:prstGeom prst="rect">
             <a:avLst/>
           </a:prstGeom>
           <a:solidFill>
-            <a:srgbClr val="EEF0FB"/>
+            <a:srgbClr val="F5F6FC"/>
           </a:solidFill>
           <a:ln/>
         </p:spPr>
       </p:sp>
       <p:sp>
         <p:nvSpPr>
-          <p:cNvPr id="7" name="Shape 5"/>
-          <p:cNvSpPr/>
-          <p:nvPr/>
-        </p:nvSpPr>
-        <p:spPr>
-          <a:xfrm>
-            <a:off x="566928" y="3566160"/>
-            <a:ext cx="41148" cy="960120"/>
+          <p:cNvPr id="24" name="Text 22"/>
+          <p:cNvSpPr/>
+          <p:nvPr/>
+        </p:nvSpPr>
+        <p:spPr>
+          <a:xfrm>
+            <a:off x="658368" y="3566160"/>
+            <a:ext cx="1554480" cy="365760"/>
+          </a:xfrm>
+          <a:prstGeom prst="rect">
+            <a:avLst/>
+          </a:prstGeom>
+          <a:noFill/>
+          <a:ln/>
+        </p:spPr>
+        <p:txBody>
+          <a:bodyPr wrap="square" lIns="0" tIns="0" rIns="0" bIns="0" rtlCol="0" anchor="ctr"/>
+          <a:lstStyle/>
+          <a:p>
+            <a:pPr indent="0" marL="0">
+              <a:buNone/>
+            </a:pPr>
+            <a:r>
+              <a:rPr lang="en-US" sz="1150" b="1" dirty="0">
+                <a:solidFill>
+                  <a:srgbClr val="272E52"/>
+                </a:solidFill>
+                <a:latin typeface="Arial" pitchFamily="34" charset="0"/>
+                <a:ea typeface="Arial" pitchFamily="34" charset="-122"/>
+                <a:cs typeface="Arial" pitchFamily="34" charset="-120"/>
+              </a:rPr>
+              <a:t>Reserve</a:t>
+            </a:r>
+            <a:endParaRPr lang="en-US" sz="1150" dirty="0"/>
+          </a:p>
+        </p:txBody>
+      </p:sp>
+      <p:sp>
+        <p:nvSpPr>
+          <p:cNvPr id="25" name="Text 23"/>
+          <p:cNvSpPr/>
+          <p:nvPr/>
+        </p:nvSpPr>
+        <p:spPr>
+          <a:xfrm>
+            <a:off x="2395728" y="3566160"/>
+            <a:ext cx="731520" cy="365760"/>
+          </a:xfrm>
+          <a:prstGeom prst="rect">
+            <a:avLst/>
+          </a:prstGeom>
+          <a:noFill/>
+          <a:ln/>
+        </p:spPr>
+        <p:txBody>
+          <a:bodyPr wrap="square" lIns="0" tIns="0" rIns="0" bIns="0" rtlCol="0" anchor="ctr"/>
+          <a:lstStyle/>
+          <a:p>
+            <a:pPr indent="0" marL="0">
+              <a:buNone/>
+            </a:pPr>
+            <a:r>
+              <a:rPr lang="en-US" sz="1150" dirty="0">
+                <a:solidFill>
+                  <a:srgbClr val="434A63"/>
+                </a:solidFill>
+                <a:latin typeface="Arial" pitchFamily="34" charset="0"/>
+                <a:ea typeface="Arial" pitchFamily="34" charset="-122"/>
+                <a:cs typeface="Arial" pitchFamily="34" charset="-120"/>
+              </a:rPr>
+              <a:t>–</a:t>
+            </a:r>
+            <a:endParaRPr lang="en-US" sz="1150" dirty="0"/>
+          </a:p>
+        </p:txBody>
+      </p:sp>
+      <p:sp>
+        <p:nvSpPr>
+          <p:cNvPr id="26" name="Text 24"/>
+          <p:cNvSpPr/>
+          <p:nvPr/>
+        </p:nvSpPr>
+        <p:spPr>
+          <a:xfrm>
+            <a:off x="3310128" y="3566160"/>
+            <a:ext cx="5175504" cy="365760"/>
+          </a:xfrm>
+          <a:prstGeom prst="rect">
+            <a:avLst/>
+          </a:prstGeom>
+          <a:noFill/>
+          <a:ln/>
+        </p:spPr>
+        <p:txBody>
+          <a:bodyPr wrap="square" lIns="0" tIns="0" rIns="0" bIns="0" rtlCol="0" anchor="ctr"/>
+          <a:lstStyle/>
+          <a:p>
+            <a:pPr indent="0" marL="0">
+              <a:buNone/>
+            </a:pPr>
+            <a:r>
+              <a:rPr lang="en-US" sz="1150" dirty="0">
+                <a:solidFill>
+                  <a:srgbClr val="434A63"/>
+                </a:solidFill>
+                <a:latin typeface="Arial" pitchFamily="34" charset="0"/>
+                <a:ea typeface="Arial" pitchFamily="34" charset="-122"/>
+                <a:cs typeface="Arial" pitchFamily="34" charset="-120"/>
+              </a:rPr>
+              <a:t>.240 bis .255 bleiben frei – Platz zum Wachsen</a:t>
+            </a:r>
+            <a:endParaRPr lang="en-US" sz="1150" dirty="0"/>
+          </a:p>
+        </p:txBody>
+      </p:sp>
+      <p:sp>
+        <p:nvSpPr>
+          <p:cNvPr id="27" name="Shape 25"/>
+          <p:cNvSpPr/>
+          <p:nvPr/>
+        </p:nvSpPr>
+        <p:spPr>
+          <a:xfrm>
+            <a:off x="566928" y="4160520"/>
+            <a:ext cx="32004" cy="256032"/>
           </a:xfrm>
           <a:prstGeom prst="rect">
             <a:avLst/>
@@ -11487,72 +11358,30 @@
       </p:sp>
       <p:sp>
         <p:nvSpPr>
-          <p:cNvPr id="8" name="Text 6"/>
-          <p:cNvSpPr/>
-          <p:nvPr/>
-        </p:nvSpPr>
-        <p:spPr>
-          <a:xfrm>
-            <a:off x="804672" y="3712464"/>
-            <a:ext cx="7607808" cy="242062"/>
-          </a:xfrm>
-          <a:prstGeom prst="rect">
-            <a:avLst/>
-          </a:prstGeom>
-          <a:noFill/>
-          <a:ln/>
-        </p:spPr>
-        <p:txBody>
-          <a:bodyPr wrap="square" lIns="0" tIns="0" rIns="0" bIns="0" rtlCol="0" anchor="t"/>
-          <a:lstStyle/>
-          <a:p>
-            <a:pPr indent="0" marL="0">
-              <a:buNone/>
-            </a:pPr>
-            <a:r>
-              <a:rPr lang="en-US" sz="1300" b="1" dirty="0">
-                <a:solidFill>
-                  <a:srgbClr val="272E52"/>
-                </a:solidFill>
-                <a:latin typeface="Arial" pitchFamily="34" charset="0"/>
-                <a:ea typeface="Arial" pitchFamily="34" charset="-122"/>
-                <a:cs typeface="Arial" pitchFamily="34" charset="-120"/>
-              </a:rPr>
-              <a:t>Die Begriffe von heute</a:t>
-            </a:r>
-            <a:endParaRPr lang="en-US" sz="1300" dirty="0"/>
-          </a:p>
-        </p:txBody>
-      </p:sp>
-      <p:sp>
-        <p:nvSpPr>
-          <p:cNvPr id="9" name="Text 7"/>
-          <p:cNvSpPr/>
-          <p:nvPr/>
-        </p:nvSpPr>
-        <p:spPr>
-          <a:xfrm>
-            <a:off x="804672" y="4000246"/>
-            <a:ext cx="7607808" cy="407162"/>
-          </a:xfrm>
-          <a:prstGeom prst="rect">
-            <a:avLst/>
-          </a:prstGeom>
-          <a:noFill/>
-          <a:ln/>
-        </p:spPr>
-        <p:txBody>
-          <a:bodyPr wrap="square" lIns="0" tIns="0" rIns="0" bIns="0" rtlCol="0" anchor="t"/>
-          <a:lstStyle/>
-          <a:p>
-            <a:pPr indent="0" marL="0">
-              <a:lnSpc>
-                <a:spcPct val="92000"/>
-              </a:lnSpc>
-              <a:buNone/>
-            </a:pPr>
-            <a:r>
-              <a:rPr lang="en-US" sz="1100" dirty="0">
+          <p:cNvPr id="28" name="Text 26"/>
+          <p:cNvSpPr/>
+          <p:nvPr/>
+        </p:nvSpPr>
+        <p:spPr>
+          <a:xfrm>
+            <a:off x="749808" y="4114800"/>
+            <a:ext cx="7827264" cy="402336"/>
+          </a:xfrm>
+          <a:prstGeom prst="rect">
+            <a:avLst/>
+          </a:prstGeom>
+          <a:noFill/>
+          <a:ln/>
+        </p:spPr>
+        <p:txBody>
+          <a:bodyPr wrap="square" lIns="0" tIns="0" rIns="0" bIns="0" rtlCol="0" anchor="ctr"/>
+          <a:lstStyle/>
+          <a:p>
+            <a:pPr indent="0" marL="0">
+              <a:buNone/>
+            </a:pPr>
+            <a:r>
+              <a:rPr lang="en-US" sz="1200" b="1" dirty="0">
                 <a:solidFill>
                   <a:srgbClr val="434A63"/>
                 </a:solidFill>
@@ -11560,15 +11389,15 @@
                 <a:ea typeface="Arial" pitchFamily="34" charset="-122"/>
                 <a:cs typeface="Arial" pitchFamily="34" charset="-120"/>
               </a:rPr>
-              <a:t>Oktett · Maske · Präfix (CIDR) · Netzanteil, Hostanteil · Blockgröße · Netzadresse, Broadcast · RFC-1918-Bereiche · NAT · Link-local. Die Begriffe begleiten euch bis zum Schluss – im Kurs wie in der Prüfung.</a:t>
-            </a:r>
-            <a:endParaRPr lang="en-US" sz="1100" dirty="0"/>
-          </a:p>
-        </p:txBody>
-      </p:sp>
-      <p:sp>
-        <p:nvSpPr>
-          <p:cNvPr id="10" name="Shape 8"/>
+              <a:t>Größte zuerst vermeidet Lücken. Probe: 128 + 64 + 32 + 16 = 240 ≤ 256 – passt.</a:t>
+            </a:r>
+            <a:endParaRPr lang="en-US" sz="1200" dirty="0"/>
+          </a:p>
+        </p:txBody>
+      </p:sp>
+      <p:sp>
+        <p:nvSpPr>
+          <p:cNvPr id="29" name="Shape 27"/>
           <p:cNvSpPr/>
           <p:nvPr/>
         </p:nvSpPr>
@@ -11591,7 +11420,7 @@
       </p:sp>
       <p:sp>
         <p:nvSpPr>
-          <p:cNvPr id="11" name="Text 9"/>
+          <p:cNvPr id="30" name="Text 28"/>
           <p:cNvSpPr/>
           <p:nvPr/>
         </p:nvSpPr>
@@ -11622,7 +11451,7 @@
                 <a:ea typeface="Arial" pitchFamily="34" charset="-122"/>
                 <a:cs typeface="Arial" pitchFamily="34" charset="-120"/>
               </a:rPr>
-              <a:t>Abschluss</a:t>
+              <a:t>Auswertung</a:t>
             </a:r>
             <a:endParaRPr lang="en-US" sz="1050" dirty="0"/>
           </a:p>
@@ -11630,7 +11459,7 @@
       </p:sp>
       <p:sp>
         <p:nvSpPr>
-          <p:cNvPr id="12" name="Text 10"/>
+          <p:cNvPr id="31" name="Text 29"/>
           <p:cNvSpPr/>
           <p:nvPr/>
         </p:nvSpPr>
@@ -11661,7 +11490,7 @@
                 <a:ea typeface="Arial" pitchFamily="34" charset="-122"/>
                 <a:cs typeface="Arial" pitchFamily="34" charset="-120"/>
               </a:rPr>
-              <a:t>19/20</a:t>
+              <a:t>19/21</a:t>
             </a:r>
             <a:endParaRPr lang="en-US" sz="1050" dirty="0"/>
           </a:p>
@@ -11752,7 +11581,7 @@
                 <a:ea typeface="Arial" pitchFamily="34" charset="-122"/>
                 <a:cs typeface="Arial" pitchFamily="34" charset="-120"/>
               </a:rPr>
-              <a:t>NACHARBEIT</a:t>
+              <a:t>KERN DES ABENDS</a:t>
             </a:r>
             <a:endParaRPr lang="en-US" sz="1150" dirty="0"/>
           </a:p>
@@ -11791,7 +11620,7 @@
                 <a:ea typeface="Arial" pitchFamily="34" charset="-122"/>
                 <a:cs typeface="Arial" pitchFamily="34" charset="-120"/>
               </a:rPr>
-              <a:t>Bis Donnerstag</a:t>
+              <a:t>Das nehmt ihr heute mit</a:t>
             </a:r>
             <a:endParaRPr lang="en-US" sz="2600" dirty="0"/>
           </a:p>
@@ -11805,8 +11634,8 @@
         </p:nvSpPr>
         <p:spPr>
           <a:xfrm>
-            <a:off x="566928" y="1444752"/>
-            <a:ext cx="8010144" cy="438912"/>
+            <a:off x="566928" y="1691640"/>
+            <a:ext cx="8010144" cy="1828800"/>
           </a:xfrm>
           <a:prstGeom prst="rect">
             <a:avLst/>
@@ -11819,20 +11648,203 @@
           <a:lstStyle/>
           <a:p>
             <a:pPr indent="0" marL="0">
-              <a:buNone/>
-            </a:pPr>
-            <a:r>
-              <a:rPr lang="en-US" sz="1300" dirty="0">
-                <a:solidFill>
-                  <a:srgbClr val="5C6377"/>
-                </a:solidFill>
-                <a:latin typeface="Arial" pitchFamily="34" charset="0"/>
-                <a:ea typeface="Arial" pitchFamily="34" charset="-122"/>
-                <a:cs typeface="Arial" pitchFamily="34" charset="-120"/>
-              </a:rPr>
-              <a:t>Zwei Angebote, keine Pflicht – Donnerstag machen wir das Netz fertig.</a:t>
-            </a:r>
-            <a:endParaRPr lang="en-US" sz="1300" dirty="0"/>
+              <a:lnSpc>
+                <a:spcPct val="92000"/>
+              </a:lnSpc>
+              <a:buNone/>
+            </a:pPr>
+            <a:r>
+              <a:rPr lang="en-US" sz="1350" b="1" dirty="0">
+                <a:solidFill>
+                  <a:srgbClr val="3843AF"/>
+                </a:solidFill>
+                <a:latin typeface="Arial" pitchFamily="34" charset="0"/>
+                <a:ea typeface="Arial" pitchFamily="34" charset="-122"/>
+                <a:cs typeface="Arial" pitchFamily="34" charset="-120"/>
+              </a:rPr>
+              <a:t>▸   </a:t>
+            </a:r>
+            <a:pPr indent="0" marL="0">
+              <a:lnSpc>
+                <a:spcPct val="92000"/>
+              </a:lnSpc>
+              <a:spcAft>
+                <a:spcPts val="900"/>
+              </a:spcAft>
+              <a:buNone/>
+            </a:pPr>
+            <a:r>
+              <a:rPr lang="en-US" sz="1350" b="1" dirty="0">
+                <a:solidFill>
+                  <a:srgbClr val="434A63"/>
+                </a:solidFill>
+                <a:latin typeface="Arial" pitchFamily="34" charset="0"/>
+                <a:ea typeface="Arial" pitchFamily="34" charset="-122"/>
+                <a:cs typeface="Arial" pitchFamily="34" charset="-120"/>
+              </a:rPr>
+              <a:t>Die Maske zieht die Grenze zwischen Netzanteil und Hostanteil.</a:t>
+            </a:r>
+            <a:endParaRPr lang="en-US" sz="1350" dirty="0"/>
+          </a:p>
+          <a:p>
+            <a:pPr indent="0" marL="0">
+              <a:lnSpc>
+                <a:spcPct val="92000"/>
+              </a:lnSpc>
+              <a:buNone/>
+            </a:pPr>
+            <a:r>
+              <a:rPr lang="en-US" sz="1350" b="1" dirty="0">
+                <a:solidFill>
+                  <a:srgbClr val="3843AF"/>
+                </a:solidFill>
+                <a:latin typeface="Arial" pitchFamily="34" charset="0"/>
+                <a:ea typeface="Arial" pitchFamily="34" charset="-122"/>
+                <a:cs typeface="Arial" pitchFamily="34" charset="-120"/>
+              </a:rPr>
+              <a:t>▸   </a:t>
+            </a:r>
+            <a:pPr indent="0" marL="0">
+              <a:lnSpc>
+                <a:spcPct val="92000"/>
+              </a:lnSpc>
+              <a:spcAft>
+                <a:spcPts val="900"/>
+              </a:spcAft>
+              <a:buNone/>
+            </a:pPr>
+            <a:r>
+              <a:rPr lang="en-US" sz="1350" b="1" dirty="0">
+                <a:solidFill>
+                  <a:srgbClr val="434A63"/>
+                </a:solidFill>
+                <a:latin typeface="Arial" pitchFamily="34" charset="0"/>
+                <a:ea typeface="Arial" pitchFamily="34" charset="-122"/>
+                <a:cs typeface="Arial" pitchFamily="34" charset="-120"/>
+              </a:rPr>
+              <a:t>Blockgröße = 2 hoch Hostbits. Nutzbar = Blockgröße minus zwei.</a:t>
+            </a:r>
+            <a:endParaRPr lang="en-US" sz="1350" dirty="0"/>
+          </a:p>
+          <a:p>
+            <a:pPr indent="0" marL="0">
+              <a:lnSpc>
+                <a:spcPct val="92000"/>
+              </a:lnSpc>
+              <a:buNone/>
+            </a:pPr>
+            <a:r>
+              <a:rPr lang="en-US" sz="1350" b="1" dirty="0">
+                <a:solidFill>
+                  <a:srgbClr val="3843AF"/>
+                </a:solidFill>
+                <a:latin typeface="Arial" pitchFamily="34" charset="0"/>
+                <a:ea typeface="Arial" pitchFamily="34" charset="-122"/>
+                <a:cs typeface="Arial" pitchFamily="34" charset="-120"/>
+              </a:rPr>
+              <a:t>▸   </a:t>
+            </a:r>
+            <a:pPr indent="0" marL="0">
+              <a:lnSpc>
+                <a:spcPct val="92000"/>
+              </a:lnSpc>
+              <a:spcAft>
+                <a:spcPts val="900"/>
+              </a:spcAft>
+              <a:buNone/>
+            </a:pPr>
+            <a:r>
+              <a:rPr lang="en-US" sz="1350" b="1" dirty="0">
+                <a:solidFill>
+                  <a:srgbClr val="434A63"/>
+                </a:solidFill>
+                <a:latin typeface="Arial" pitchFamily="34" charset="0"/>
+                <a:ea typeface="Arial" pitchFamily="34" charset="-122"/>
+                <a:cs typeface="Arial" pitchFamily="34" charset="-120"/>
+              </a:rPr>
+              <a:t>Netzadresse benennt das Netz, Broadcast ruft alle – beide sind reserviert.</a:t>
+            </a:r>
+            <a:endParaRPr lang="en-US" sz="1350" dirty="0"/>
+          </a:p>
+          <a:p>
+            <a:pPr indent="0" marL="0">
+              <a:lnSpc>
+                <a:spcPct val="92000"/>
+              </a:lnSpc>
+              <a:buNone/>
+            </a:pPr>
+            <a:r>
+              <a:rPr lang="en-US" sz="1350" b="1" dirty="0">
+                <a:solidFill>
+                  <a:srgbClr val="3843AF"/>
+                </a:solidFill>
+                <a:latin typeface="Arial" pitchFamily="34" charset="0"/>
+                <a:ea typeface="Arial" pitchFamily="34" charset="-122"/>
+                <a:cs typeface="Arial" pitchFamily="34" charset="-120"/>
+              </a:rPr>
+              <a:t>▸   </a:t>
+            </a:r>
+            <a:pPr indent="0" marL="0">
+              <a:lnSpc>
+                <a:spcPct val="92000"/>
+              </a:lnSpc>
+              <a:spcAft>
+                <a:spcPts val="900"/>
+              </a:spcAft>
+              <a:buNone/>
+            </a:pPr>
+            <a:r>
+              <a:rPr lang="en-US" sz="1350" b="1" dirty="0">
+                <a:solidFill>
+                  <a:srgbClr val="434A63"/>
+                </a:solidFill>
+                <a:latin typeface="Arial" pitchFamily="34" charset="0"/>
+                <a:ea typeface="Arial" pitchFamily="34" charset="-122"/>
+                <a:cs typeface="Arial" pitchFamily="34" charset="-120"/>
+              </a:rPr>
+              <a:t>Privat heißt 10er, 172.16er, 192.168er – NAT übersetzt am Router nach draußen.</a:t>
+            </a:r>
+            <a:endParaRPr lang="en-US" sz="1350" dirty="0"/>
+          </a:p>
+          <a:p>
+            <a:pPr indent="0" marL="0">
+              <a:lnSpc>
+                <a:spcPct val="92000"/>
+              </a:lnSpc>
+              <a:buNone/>
+            </a:pPr>
+            <a:r>
+              <a:rPr lang="en-US" sz="1350" b="1" dirty="0">
+                <a:solidFill>
+                  <a:srgbClr val="3843AF"/>
+                </a:solidFill>
+                <a:latin typeface="Arial" pitchFamily="34" charset="0"/>
+                <a:ea typeface="Arial" pitchFamily="34" charset="-122"/>
+                <a:cs typeface="Arial" pitchFamily="34" charset="-120"/>
+              </a:rPr>
+              <a:t>▸   </a:t>
+            </a:r>
+            <a:pPr indent="0" marL="0">
+              <a:lnSpc>
+                <a:spcPct val="92000"/>
+              </a:lnSpc>
+              <a:spcAft>
+                <a:spcPts val="900"/>
+              </a:spcAft>
+              <a:buNone/>
+            </a:pPr>
+            <a:r>
+              <a:rPr lang="en-US" sz="1350" b="1" dirty="0">
+                <a:solidFill>
+                  <a:srgbClr val="434A63"/>
+                </a:solidFill>
+                <a:latin typeface="Arial" pitchFamily="34" charset="0"/>
+                <a:ea typeface="Arial" pitchFamily="34" charset="-122"/>
+                <a:cs typeface="Arial" pitchFamily="34" charset="-120"/>
+              </a:rPr>
+              <a:t>IPv6 nimmt euch das Rechnen ab – das Netz ist fast immer ein /64.</a:t>
+            </a:r>
+            <a:endParaRPr lang="en-US" sz="1350" dirty="0"/>
           </a:p>
         </p:txBody>
       </p:sp>
@@ -11844,14 +11856,14 @@
         </p:nvSpPr>
         <p:spPr>
           <a:xfrm>
-            <a:off x="566928" y="1975104"/>
-            <a:ext cx="2523744" cy="1920240"/>
+            <a:off x="566928" y="3566160"/>
+            <a:ext cx="8010144" cy="960120"/>
           </a:xfrm>
           <a:prstGeom prst="rect">
             <a:avLst/>
           </a:prstGeom>
           <a:solidFill>
-            <a:srgbClr val="F5F6FC"/>
+            <a:srgbClr val="EEF0FB"/>
           </a:solidFill>
           <a:ln/>
         </p:spPr>
@@ -11864,8 +11876,8 @@
         </p:nvSpPr>
         <p:spPr>
           <a:xfrm>
-            <a:off x="566928" y="1975104"/>
-            <a:ext cx="41148" cy="1920240"/>
+            <a:off x="566928" y="3566160"/>
+            <a:ext cx="41148" cy="960120"/>
           </a:xfrm>
           <a:prstGeom prst="rect">
             <a:avLst/>
@@ -11884,8 +11896,8 @@
         </p:nvSpPr>
         <p:spPr>
           <a:xfrm>
-            <a:off x="804672" y="2121408"/>
-            <a:ext cx="2121408" cy="256032"/>
+            <a:off x="804672" y="3712464"/>
+            <a:ext cx="7607808" cy="242062"/>
           </a:xfrm>
           <a:prstGeom prst="rect">
             <a:avLst/>
@@ -11909,7 +11921,7 @@
                 <a:ea typeface="Arial" pitchFamily="34" charset="-122"/>
                 <a:cs typeface="Arial" pitchFamily="34" charset="-120"/>
               </a:rPr>
-              <a:t>Nachrechnen</a:t>
+              <a:t>Die Begriffe von heute</a:t>
             </a:r>
             <a:endParaRPr lang="en-US" sz="1300" dirty="0"/>
           </a:p>
@@ -11923,8 +11935,8 @@
         </p:nvSpPr>
         <p:spPr>
           <a:xfrm>
-            <a:off x="804672" y="2423160"/>
-            <a:ext cx="2121408" cy="1353312"/>
+            <a:off x="804672" y="4000246"/>
+            <a:ext cx="7607808" cy="407162"/>
           </a:xfrm>
           <a:prstGeom prst="rect">
             <a:avLst/>
@@ -11943,7 +11955,7 @@
               <a:buNone/>
             </a:pPr>
             <a:r>
-              <a:rPr lang="en-US" sz="1150" dirty="0">
+              <a:rPr lang="en-US" sz="1100" dirty="0">
                 <a:solidFill>
                   <a:srgbClr val="434A63"/>
                 </a:solidFill>
@@ -11951,316 +11963,15 @@
                 <a:ea typeface="Arial" pitchFamily="34" charset="-122"/>
                 <a:cs typeface="Arial" pitchFamily="34" charset="-120"/>
               </a:rPr>
-              <a:t>Wer heute noch gestolpert ist: Auf der Seite „Adressierung“ stehen weitere Aufgaben mit Lösungsweg – zwei davon reichen.</a:t>
-            </a:r>
-            <a:endParaRPr lang="en-US" sz="1150" dirty="0"/>
+              <a:t>Oktett · Maske · Präfix (CIDR) · Netzanteil, Hostanteil · Blockgröße · Netzadresse, Broadcast · RFC-1918-Bereiche · NAT · Link-local. Die Begriffe begleiten euch bis zum Schluss – im Kurs wie in der Prüfung.</a:t>
+            </a:r>
+            <a:endParaRPr lang="en-US" sz="1100" dirty="0"/>
           </a:p>
         </p:txBody>
       </p:sp>
       <p:sp>
         <p:nvSpPr>
           <p:cNvPr id="10" name="Shape 8"/>
-          <p:cNvSpPr/>
-          <p:nvPr/>
-        </p:nvSpPr>
-        <p:spPr>
-          <a:xfrm>
-            <a:off x="3310128" y="1975104"/>
-            <a:ext cx="2523744" cy="1920240"/>
-          </a:xfrm>
-          <a:prstGeom prst="rect">
-            <a:avLst/>
-          </a:prstGeom>
-          <a:solidFill>
-            <a:srgbClr val="F5F6FC"/>
-          </a:solidFill>
-          <a:ln/>
-        </p:spPr>
-      </p:sp>
-      <p:sp>
-        <p:nvSpPr>
-          <p:cNvPr id="11" name="Shape 9"/>
-          <p:cNvSpPr/>
-          <p:nvPr/>
-        </p:nvSpPr>
-        <p:spPr>
-          <a:xfrm>
-            <a:off x="3310128" y="1975104"/>
-            <a:ext cx="41148" cy="1920240"/>
-          </a:xfrm>
-          <a:prstGeom prst="rect">
-            <a:avLst/>
-          </a:prstGeom>
-          <a:solidFill>
-            <a:srgbClr val="3843AF"/>
-          </a:solidFill>
-          <a:ln/>
-        </p:spPr>
-      </p:sp>
-      <p:sp>
-        <p:nvSpPr>
-          <p:cNvPr id="12" name="Text 10"/>
-          <p:cNvSpPr/>
-          <p:nvPr/>
-        </p:nvSpPr>
-        <p:spPr>
-          <a:xfrm>
-            <a:off x="3547872" y="2121408"/>
-            <a:ext cx="2121408" cy="256032"/>
-          </a:xfrm>
-          <a:prstGeom prst="rect">
-            <a:avLst/>
-          </a:prstGeom>
-          <a:noFill/>
-          <a:ln/>
-        </p:spPr>
-        <p:txBody>
-          <a:bodyPr wrap="square" lIns="0" tIns="0" rIns="0" bIns="0" rtlCol="0" anchor="t"/>
-          <a:lstStyle/>
-          <a:p>
-            <a:pPr indent="0" marL="0">
-              <a:buNone/>
-            </a:pPr>
-            <a:r>
-              <a:rPr lang="en-US" sz="1300" b="1" dirty="0">
-                <a:solidFill>
-                  <a:srgbClr val="272E52"/>
-                </a:solidFill>
-                <a:latin typeface="Arial" pitchFamily="34" charset="0"/>
-                <a:ea typeface="Arial" pitchFamily="34" charset="-122"/>
-                <a:cs typeface="Arial" pitchFamily="34" charset="-120"/>
-              </a:rPr>
-              <a:t>Weiterlesen</a:t>
-            </a:r>
-            <a:endParaRPr lang="en-US" sz="1300" dirty="0"/>
-          </a:p>
-        </p:txBody>
-      </p:sp>
-      <p:sp>
-        <p:nvSpPr>
-          <p:cNvPr id="13" name="Text 11"/>
-          <p:cNvSpPr/>
-          <p:nvPr/>
-        </p:nvSpPr>
-        <p:spPr>
-          <a:xfrm>
-            <a:off x="3547872" y="2423160"/>
-            <a:ext cx="2121408" cy="1353312"/>
-          </a:xfrm>
-          <a:prstGeom prst="rect">
-            <a:avLst/>
-          </a:prstGeom>
-          <a:noFill/>
-          <a:ln/>
-        </p:spPr>
-        <p:txBody>
-          <a:bodyPr wrap="square" lIns="0" tIns="0" rIns="0" bIns="0" rtlCol="0" anchor="t"/>
-          <a:lstStyle/>
-          <a:p>
-            <a:pPr indent="0" marL="0">
-              <a:lnSpc>
-                <a:spcPct val="92000"/>
-              </a:lnSpc>
-              <a:buNone/>
-            </a:pPr>
-            <a:r>
-              <a:rPr lang="en-US" sz="1150" dirty="0">
-                <a:solidFill>
-                  <a:srgbClr val="434A63"/>
-                </a:solidFill>
-                <a:latin typeface="Arial" pitchFamily="34" charset="0"/>
-                <a:ea typeface="Arial" pitchFamily="34" charset="-122"/>
-                <a:cs typeface="Arial" pitchFamily="34" charset="-120"/>
-              </a:rPr>
-              <a:t>Wer wissen will, wie der Weg eines Aufrufs wirklich aussieht: „Praxis: github.com – die Spurensuche“ auf der Kursseite.</a:t>
-            </a:r>
-            <a:endParaRPr lang="en-US" sz="1150" dirty="0"/>
-          </a:p>
-        </p:txBody>
-      </p:sp>
-      <p:sp>
-        <p:nvSpPr>
-          <p:cNvPr id="14" name="Shape 12"/>
-          <p:cNvSpPr/>
-          <p:nvPr/>
-        </p:nvSpPr>
-        <p:spPr>
-          <a:xfrm>
-            <a:off x="6053328" y="1975104"/>
-            <a:ext cx="2523744" cy="1920240"/>
-          </a:xfrm>
-          <a:prstGeom prst="rect">
-            <a:avLst/>
-          </a:prstGeom>
-          <a:solidFill>
-            <a:srgbClr val="F5F6FC"/>
-          </a:solidFill>
-          <a:ln/>
-        </p:spPr>
-      </p:sp>
-      <p:sp>
-        <p:nvSpPr>
-          <p:cNvPr id="15" name="Shape 13"/>
-          <p:cNvSpPr/>
-          <p:nvPr/>
-        </p:nvSpPr>
-        <p:spPr>
-          <a:xfrm>
-            <a:off x="6053328" y="1975104"/>
-            <a:ext cx="41148" cy="1920240"/>
-          </a:xfrm>
-          <a:prstGeom prst="rect">
-            <a:avLst/>
-          </a:prstGeom>
-          <a:solidFill>
-            <a:srgbClr val="3843AF"/>
-          </a:solidFill>
-          <a:ln/>
-        </p:spPr>
-      </p:sp>
-      <p:sp>
-        <p:nvSpPr>
-          <p:cNvPr id="16" name="Text 14"/>
-          <p:cNvSpPr/>
-          <p:nvPr/>
-        </p:nvSpPr>
-        <p:spPr>
-          <a:xfrm>
-            <a:off x="6291072" y="2121408"/>
-            <a:ext cx="2121408" cy="256032"/>
-          </a:xfrm>
-          <a:prstGeom prst="rect">
-            <a:avLst/>
-          </a:prstGeom>
-          <a:noFill/>
-          <a:ln/>
-        </p:spPr>
-        <p:txBody>
-          <a:bodyPr wrap="square" lIns="0" tIns="0" rIns="0" bIns="0" rtlCol="0" anchor="t"/>
-          <a:lstStyle/>
-          <a:p>
-            <a:pPr indent="0" marL="0">
-              <a:buNone/>
-            </a:pPr>
-            <a:r>
-              <a:rPr lang="en-US" sz="1300" b="1" dirty="0">
-                <a:solidFill>
-                  <a:srgbClr val="272E52"/>
-                </a:solidFill>
-                <a:latin typeface="Arial" pitchFamily="34" charset="0"/>
-                <a:ea typeface="Arial" pitchFamily="34" charset="-122"/>
-                <a:cs typeface="Arial" pitchFamily="34" charset="-120"/>
-              </a:rPr>
-              <a:t>Donnerstag</a:t>
-            </a:r>
-            <a:endParaRPr lang="en-US" sz="1300" dirty="0"/>
-          </a:p>
-        </p:txBody>
-      </p:sp>
-      <p:sp>
-        <p:nvSpPr>
-          <p:cNvPr id="17" name="Text 15"/>
-          <p:cNvSpPr/>
-          <p:nvPr/>
-        </p:nvSpPr>
-        <p:spPr>
-          <a:xfrm>
-            <a:off x="6291072" y="2423160"/>
-            <a:ext cx="2121408" cy="1353312"/>
-          </a:xfrm>
-          <a:prstGeom prst="rect">
-            <a:avLst/>
-          </a:prstGeom>
-          <a:noFill/>
-          <a:ln/>
-        </p:spPr>
-        <p:txBody>
-          <a:bodyPr wrap="square" lIns="0" tIns="0" rIns="0" bIns="0" rtlCol="0" anchor="t"/>
-          <a:lstStyle/>
-          <a:p>
-            <a:pPr indent="0" marL="0">
-              <a:lnSpc>
-                <a:spcPct val="92000"/>
-              </a:lnSpc>
-              <a:buNone/>
-            </a:pPr>
-            <a:r>
-              <a:rPr lang="en-US" sz="1150" dirty="0">
-                <a:solidFill>
-                  <a:srgbClr val="434A63"/>
-                </a:solidFill>
-                <a:latin typeface="Arial" pitchFamily="34" charset="0"/>
-                <a:ea typeface="Arial" pitchFamily="34" charset="-122"/>
-                <a:cs typeface="Arial" pitchFamily="34" charset="-120"/>
-              </a:rPr>
-              <a:t>Routing, VLAN und Netzwerksicherheit kompakt – und zum Abschluss beantwortet ihr eine Frage, in der alles von heute steckt.</a:t>
-            </a:r>
-            <a:endParaRPr lang="en-US" sz="1150" dirty="0"/>
-          </a:p>
-        </p:txBody>
-      </p:sp>
-      <p:sp>
-        <p:nvSpPr>
-          <p:cNvPr id="18" name="Shape 16"/>
-          <p:cNvSpPr/>
-          <p:nvPr/>
-        </p:nvSpPr>
-        <p:spPr>
-          <a:xfrm>
-            <a:off x="566928" y="4160520"/>
-            <a:ext cx="32004" cy="256032"/>
-          </a:xfrm>
-          <a:prstGeom prst="rect">
-            <a:avLst/>
-          </a:prstGeom>
-          <a:solidFill>
-            <a:srgbClr val="3843AF"/>
-          </a:solidFill>
-          <a:ln/>
-        </p:spPr>
-      </p:sp>
-      <p:sp>
-        <p:nvSpPr>
-          <p:cNvPr id="19" name="Text 17"/>
-          <p:cNvSpPr/>
-          <p:nvPr/>
-        </p:nvSpPr>
-        <p:spPr>
-          <a:xfrm>
-            <a:off x="749808" y="4114800"/>
-            <a:ext cx="7827264" cy="402336"/>
-          </a:xfrm>
-          <a:prstGeom prst="rect">
-            <a:avLst/>
-          </a:prstGeom>
-          <a:noFill/>
-          <a:ln/>
-        </p:spPr>
-        <p:txBody>
-          <a:bodyPr wrap="square" lIns="0" tIns="0" rIns="0" bIns="0" rtlCol="0" anchor="ctr"/>
-          <a:lstStyle/>
-          <a:p>
-            <a:pPr indent="0" marL="0">
-              <a:buNone/>
-            </a:pPr>
-            <a:r>
-              <a:rPr lang="en-US" sz="1200" b="1" dirty="0">
-                <a:solidFill>
-                  <a:srgbClr val="434A63"/>
-                </a:solidFill>
-                <a:latin typeface="Arial" pitchFamily="34" charset="0"/>
-                <a:ea typeface="Arial" pitchFamily="34" charset="-122"/>
-                <a:cs typeface="Arial" pitchFamily="34" charset="-120"/>
-              </a:rPr>
-              <a:t>Nächster Termin: Donnerstag, 3. September, 18:00 Uhr – Teil zwei und das Finale.</a:t>
-            </a:r>
-            <a:endParaRPr lang="en-US" sz="1200" dirty="0"/>
-          </a:p>
-        </p:txBody>
-      </p:sp>
-      <p:sp>
-        <p:nvSpPr>
-          <p:cNvPr id="20" name="Shape 18"/>
           <p:cNvSpPr/>
           <p:nvPr/>
         </p:nvSpPr>
@@ -12283,7 +11994,7 @@
       </p:sp>
       <p:sp>
         <p:nvSpPr>
-          <p:cNvPr id="21" name="Text 19"/>
+          <p:cNvPr id="11" name="Text 9"/>
           <p:cNvSpPr/>
           <p:nvPr/>
         </p:nvSpPr>
@@ -12322,7 +12033,7 @@
       </p:sp>
       <p:sp>
         <p:nvSpPr>
-          <p:cNvPr id="22" name="Text 20"/>
+          <p:cNvPr id="12" name="Text 10"/>
           <p:cNvSpPr/>
           <p:nvPr/>
         </p:nvSpPr>
@@ -12353,7 +12064,7 @@
                 <a:ea typeface="Arial" pitchFamily="34" charset="-122"/>
                 <a:cs typeface="Arial" pitchFamily="34" charset="-120"/>
               </a:rPr>
-              <a:t>20/20</a:t>
+              <a:t>20/21</a:t>
             </a:r>
             <a:endParaRPr lang="en-US" sz="1050" dirty="0"/>
           </a:p>
@@ -12370,6 +12081,698 @@
 <file path=ppt/slides/slide27.xml><?xml version="1.0" encoding="utf-8"?>
 <p:sld xmlns:a="http://schemas.openxmlformats.org/drawingml/2006/main" xmlns:r="http://schemas.openxmlformats.org/officeDocument/2006/relationships" xmlns:p="http://schemas.openxmlformats.org/presentationml/2006/main">
   <p:cSld name="Slide 27">
+    <p:bg>
+      <p:bgPr>
+        <a:solidFill>
+          <a:srgbClr val="FFFFFF"/>
+        </a:solidFill>
+      </p:bgPr>
+    </p:bg>
+    <p:spTree>
+      <p:nvGrpSpPr>
+        <p:cNvPr id="1" name=""/>
+        <p:cNvGrpSpPr/>
+        <p:nvPr/>
+      </p:nvGrpSpPr>
+      <p:grpSpPr>
+        <a:xfrm>
+          <a:off x="0" y="0"/>
+          <a:ext cx="0" cy="0"/>
+          <a:chOff x="0" y="0"/>
+          <a:chExt cx="0" cy="0"/>
+        </a:xfrm>
+      </p:grpSpPr>
+      <p:sp>
+        <p:nvSpPr>
+          <p:cNvPr id="2" name="Shape 0"/>
+          <p:cNvSpPr/>
+          <p:nvPr/>
+        </p:nvSpPr>
+        <p:spPr>
+          <a:xfrm>
+            <a:off x="566928" y="201168"/>
+            <a:ext cx="475488" cy="50292"/>
+          </a:xfrm>
+          <a:prstGeom prst="rect">
+            <a:avLst/>
+          </a:prstGeom>
+          <a:solidFill>
+            <a:srgbClr val="3843AF"/>
+          </a:solidFill>
+          <a:ln/>
+        </p:spPr>
+      </p:sp>
+      <p:sp>
+        <p:nvSpPr>
+          <p:cNvPr id="3" name="Text 1"/>
+          <p:cNvSpPr/>
+          <p:nvPr/>
+        </p:nvSpPr>
+        <p:spPr>
+          <a:xfrm>
+            <a:off x="566928" y="384048"/>
+            <a:ext cx="8010144" cy="237744"/>
+          </a:xfrm>
+          <a:prstGeom prst="rect">
+            <a:avLst/>
+          </a:prstGeom>
+          <a:noFill/>
+          <a:ln/>
+        </p:spPr>
+        <p:txBody>
+          <a:bodyPr wrap="square" lIns="0" tIns="0" rIns="0" bIns="0" rtlCol="0" anchor="ctr"/>
+          <a:lstStyle/>
+          <a:p>
+            <a:pPr indent="0" marL="0">
+              <a:buNone/>
+            </a:pPr>
+            <a:r>
+              <a:rPr lang="en-US" sz="1150" b="1" spc="180" kern="0" dirty="0">
+                <a:solidFill>
+                  <a:srgbClr val="3843AF"/>
+                </a:solidFill>
+                <a:latin typeface="Arial" pitchFamily="34" charset="0"/>
+                <a:ea typeface="Arial" pitchFamily="34" charset="-122"/>
+                <a:cs typeface="Arial" pitchFamily="34" charset="-120"/>
+              </a:rPr>
+              <a:t>NACHARBEIT</a:t>
+            </a:r>
+            <a:endParaRPr lang="en-US" sz="1150" dirty="0"/>
+          </a:p>
+        </p:txBody>
+      </p:sp>
+      <p:sp>
+        <p:nvSpPr>
+          <p:cNvPr id="4" name="Text 2"/>
+          <p:cNvSpPr/>
+          <p:nvPr/>
+        </p:nvSpPr>
+        <p:spPr>
+          <a:xfrm>
+            <a:off x="566928" y="731520"/>
+            <a:ext cx="8010144" cy="603504"/>
+          </a:xfrm>
+          <a:prstGeom prst="rect">
+            <a:avLst/>
+          </a:prstGeom>
+          <a:noFill/>
+          <a:ln/>
+        </p:spPr>
+        <p:txBody>
+          <a:bodyPr wrap="square" lIns="0" tIns="0" rIns="0" bIns="0" rtlCol="0" anchor="t"/>
+          <a:lstStyle/>
+          <a:p>
+            <a:pPr indent="0" marL="0">
+              <a:buNone/>
+            </a:pPr>
+            <a:r>
+              <a:rPr lang="en-US" sz="2600" b="1" dirty="0">
+                <a:solidFill>
+                  <a:srgbClr val="272E52"/>
+                </a:solidFill>
+                <a:latin typeface="Arial" pitchFamily="34" charset="0"/>
+                <a:ea typeface="Arial" pitchFamily="34" charset="-122"/>
+                <a:cs typeface="Arial" pitchFamily="34" charset="-120"/>
+              </a:rPr>
+              <a:t>Bis Donnerstag</a:t>
+            </a:r>
+            <a:endParaRPr lang="en-US" sz="2600" dirty="0"/>
+          </a:p>
+        </p:txBody>
+      </p:sp>
+      <p:sp>
+        <p:nvSpPr>
+          <p:cNvPr id="5" name="Text 3"/>
+          <p:cNvSpPr/>
+          <p:nvPr/>
+        </p:nvSpPr>
+        <p:spPr>
+          <a:xfrm>
+            <a:off x="566928" y="1444752"/>
+            <a:ext cx="8010144" cy="438912"/>
+          </a:xfrm>
+          <a:prstGeom prst="rect">
+            <a:avLst/>
+          </a:prstGeom>
+          <a:noFill/>
+          <a:ln/>
+        </p:spPr>
+        <p:txBody>
+          <a:bodyPr wrap="square" lIns="0" tIns="0" rIns="0" bIns="0" rtlCol="0" anchor="t"/>
+          <a:lstStyle/>
+          <a:p>
+            <a:pPr indent="0" marL="0">
+              <a:buNone/>
+            </a:pPr>
+            <a:r>
+              <a:rPr lang="en-US" sz="1300" dirty="0">
+                <a:solidFill>
+                  <a:srgbClr val="5C6377"/>
+                </a:solidFill>
+                <a:latin typeface="Arial" pitchFamily="34" charset="0"/>
+                <a:ea typeface="Arial" pitchFamily="34" charset="-122"/>
+                <a:cs typeface="Arial" pitchFamily="34" charset="-120"/>
+              </a:rPr>
+              <a:t>Zwei Angebote, keine Pflicht – Donnerstag machen wir das Netz fertig.</a:t>
+            </a:r>
+            <a:endParaRPr lang="en-US" sz="1300" dirty="0"/>
+          </a:p>
+        </p:txBody>
+      </p:sp>
+      <p:sp>
+        <p:nvSpPr>
+          <p:cNvPr id="6" name="Shape 4"/>
+          <p:cNvSpPr/>
+          <p:nvPr/>
+        </p:nvSpPr>
+        <p:spPr>
+          <a:xfrm>
+            <a:off x="566928" y="1975104"/>
+            <a:ext cx="2523744" cy="1920240"/>
+          </a:xfrm>
+          <a:prstGeom prst="rect">
+            <a:avLst/>
+          </a:prstGeom>
+          <a:solidFill>
+            <a:srgbClr val="F5F6FC"/>
+          </a:solidFill>
+          <a:ln/>
+        </p:spPr>
+      </p:sp>
+      <p:sp>
+        <p:nvSpPr>
+          <p:cNvPr id="7" name="Shape 5"/>
+          <p:cNvSpPr/>
+          <p:nvPr/>
+        </p:nvSpPr>
+        <p:spPr>
+          <a:xfrm>
+            <a:off x="566928" y="1975104"/>
+            <a:ext cx="41148" cy="1920240"/>
+          </a:xfrm>
+          <a:prstGeom prst="rect">
+            <a:avLst/>
+          </a:prstGeom>
+          <a:solidFill>
+            <a:srgbClr val="3843AF"/>
+          </a:solidFill>
+          <a:ln/>
+        </p:spPr>
+      </p:sp>
+      <p:sp>
+        <p:nvSpPr>
+          <p:cNvPr id="8" name="Text 6"/>
+          <p:cNvSpPr/>
+          <p:nvPr/>
+        </p:nvSpPr>
+        <p:spPr>
+          <a:xfrm>
+            <a:off x="804672" y="2121408"/>
+            <a:ext cx="2121408" cy="256032"/>
+          </a:xfrm>
+          <a:prstGeom prst="rect">
+            <a:avLst/>
+          </a:prstGeom>
+          <a:noFill/>
+          <a:ln/>
+        </p:spPr>
+        <p:txBody>
+          <a:bodyPr wrap="square" lIns="0" tIns="0" rIns="0" bIns="0" rtlCol="0" anchor="t"/>
+          <a:lstStyle/>
+          <a:p>
+            <a:pPr indent="0" marL="0">
+              <a:buNone/>
+            </a:pPr>
+            <a:r>
+              <a:rPr lang="en-US" sz="1300" b="1" dirty="0">
+                <a:solidFill>
+                  <a:srgbClr val="272E52"/>
+                </a:solidFill>
+                <a:latin typeface="Arial" pitchFamily="34" charset="0"/>
+                <a:ea typeface="Arial" pitchFamily="34" charset="-122"/>
+                <a:cs typeface="Arial" pitchFamily="34" charset="-120"/>
+              </a:rPr>
+              <a:t>Nachrechnen</a:t>
+            </a:r>
+            <a:endParaRPr lang="en-US" sz="1300" dirty="0"/>
+          </a:p>
+        </p:txBody>
+      </p:sp>
+      <p:sp>
+        <p:nvSpPr>
+          <p:cNvPr id="9" name="Text 7"/>
+          <p:cNvSpPr/>
+          <p:nvPr/>
+        </p:nvSpPr>
+        <p:spPr>
+          <a:xfrm>
+            <a:off x="804672" y="2423160"/>
+            <a:ext cx="2121408" cy="1353312"/>
+          </a:xfrm>
+          <a:prstGeom prst="rect">
+            <a:avLst/>
+          </a:prstGeom>
+          <a:noFill/>
+          <a:ln/>
+        </p:spPr>
+        <p:txBody>
+          <a:bodyPr wrap="square" lIns="0" tIns="0" rIns="0" bIns="0" rtlCol="0" anchor="t"/>
+          <a:lstStyle/>
+          <a:p>
+            <a:pPr indent="0" marL="0">
+              <a:lnSpc>
+                <a:spcPct val="92000"/>
+              </a:lnSpc>
+              <a:buNone/>
+            </a:pPr>
+            <a:r>
+              <a:rPr lang="en-US" sz="1150" dirty="0">
+                <a:solidFill>
+                  <a:srgbClr val="434A63"/>
+                </a:solidFill>
+                <a:latin typeface="Arial" pitchFamily="34" charset="0"/>
+                <a:ea typeface="Arial" pitchFamily="34" charset="-122"/>
+                <a:cs typeface="Arial" pitchFamily="34" charset="-120"/>
+              </a:rPr>
+              <a:t>Wer heute noch gestolpert ist: Auf der Seite „Adressierung“ stehen weitere Aufgaben mit Lösungsweg – zwei davon reichen.</a:t>
+            </a:r>
+            <a:endParaRPr lang="en-US" sz="1150" dirty="0"/>
+          </a:p>
+        </p:txBody>
+      </p:sp>
+      <p:sp>
+        <p:nvSpPr>
+          <p:cNvPr id="10" name="Shape 8"/>
+          <p:cNvSpPr/>
+          <p:nvPr/>
+        </p:nvSpPr>
+        <p:spPr>
+          <a:xfrm>
+            <a:off x="3310128" y="1975104"/>
+            <a:ext cx="2523744" cy="1920240"/>
+          </a:xfrm>
+          <a:prstGeom prst="rect">
+            <a:avLst/>
+          </a:prstGeom>
+          <a:solidFill>
+            <a:srgbClr val="F5F6FC"/>
+          </a:solidFill>
+          <a:ln/>
+        </p:spPr>
+      </p:sp>
+      <p:sp>
+        <p:nvSpPr>
+          <p:cNvPr id="11" name="Shape 9"/>
+          <p:cNvSpPr/>
+          <p:nvPr/>
+        </p:nvSpPr>
+        <p:spPr>
+          <a:xfrm>
+            <a:off x="3310128" y="1975104"/>
+            <a:ext cx="41148" cy="1920240"/>
+          </a:xfrm>
+          <a:prstGeom prst="rect">
+            <a:avLst/>
+          </a:prstGeom>
+          <a:solidFill>
+            <a:srgbClr val="3843AF"/>
+          </a:solidFill>
+          <a:ln/>
+        </p:spPr>
+      </p:sp>
+      <p:sp>
+        <p:nvSpPr>
+          <p:cNvPr id="12" name="Text 10"/>
+          <p:cNvSpPr/>
+          <p:nvPr/>
+        </p:nvSpPr>
+        <p:spPr>
+          <a:xfrm>
+            <a:off x="3547872" y="2121408"/>
+            <a:ext cx="2121408" cy="256032"/>
+          </a:xfrm>
+          <a:prstGeom prst="rect">
+            <a:avLst/>
+          </a:prstGeom>
+          <a:noFill/>
+          <a:ln/>
+        </p:spPr>
+        <p:txBody>
+          <a:bodyPr wrap="square" lIns="0" tIns="0" rIns="0" bIns="0" rtlCol="0" anchor="t"/>
+          <a:lstStyle/>
+          <a:p>
+            <a:pPr indent="0" marL="0">
+              <a:buNone/>
+            </a:pPr>
+            <a:r>
+              <a:rPr lang="en-US" sz="1300" b="1" dirty="0">
+                <a:solidFill>
+                  <a:srgbClr val="272E52"/>
+                </a:solidFill>
+                <a:latin typeface="Arial" pitchFamily="34" charset="0"/>
+                <a:ea typeface="Arial" pitchFamily="34" charset="-122"/>
+                <a:cs typeface="Arial" pitchFamily="34" charset="-120"/>
+              </a:rPr>
+              <a:t>Weiterlesen</a:t>
+            </a:r>
+            <a:endParaRPr lang="en-US" sz="1300" dirty="0"/>
+          </a:p>
+        </p:txBody>
+      </p:sp>
+      <p:sp>
+        <p:nvSpPr>
+          <p:cNvPr id="13" name="Text 11"/>
+          <p:cNvSpPr/>
+          <p:nvPr/>
+        </p:nvSpPr>
+        <p:spPr>
+          <a:xfrm>
+            <a:off x="3547872" y="2423160"/>
+            <a:ext cx="2121408" cy="1353312"/>
+          </a:xfrm>
+          <a:prstGeom prst="rect">
+            <a:avLst/>
+          </a:prstGeom>
+          <a:noFill/>
+          <a:ln/>
+        </p:spPr>
+        <p:txBody>
+          <a:bodyPr wrap="square" lIns="0" tIns="0" rIns="0" bIns="0" rtlCol="0" anchor="t"/>
+          <a:lstStyle/>
+          <a:p>
+            <a:pPr indent="0" marL="0">
+              <a:lnSpc>
+                <a:spcPct val="92000"/>
+              </a:lnSpc>
+              <a:buNone/>
+            </a:pPr>
+            <a:r>
+              <a:rPr lang="en-US" sz="1150" dirty="0">
+                <a:solidFill>
+                  <a:srgbClr val="434A63"/>
+                </a:solidFill>
+                <a:latin typeface="Arial" pitchFamily="34" charset="0"/>
+                <a:ea typeface="Arial" pitchFamily="34" charset="-122"/>
+                <a:cs typeface="Arial" pitchFamily="34" charset="-120"/>
+              </a:rPr>
+              <a:t>Wer wissen will, wie der Weg eines Aufrufs wirklich aussieht: „Praxis: github.com – die Spurensuche“ auf der Kursseite.</a:t>
+            </a:r>
+            <a:endParaRPr lang="en-US" sz="1150" dirty="0"/>
+          </a:p>
+        </p:txBody>
+      </p:sp>
+      <p:sp>
+        <p:nvSpPr>
+          <p:cNvPr id="14" name="Shape 12"/>
+          <p:cNvSpPr/>
+          <p:nvPr/>
+        </p:nvSpPr>
+        <p:spPr>
+          <a:xfrm>
+            <a:off x="6053328" y="1975104"/>
+            <a:ext cx="2523744" cy="1920240"/>
+          </a:xfrm>
+          <a:prstGeom prst="rect">
+            <a:avLst/>
+          </a:prstGeom>
+          <a:solidFill>
+            <a:srgbClr val="F5F6FC"/>
+          </a:solidFill>
+          <a:ln/>
+        </p:spPr>
+      </p:sp>
+      <p:sp>
+        <p:nvSpPr>
+          <p:cNvPr id="15" name="Shape 13"/>
+          <p:cNvSpPr/>
+          <p:nvPr/>
+        </p:nvSpPr>
+        <p:spPr>
+          <a:xfrm>
+            <a:off x="6053328" y="1975104"/>
+            <a:ext cx="41148" cy="1920240"/>
+          </a:xfrm>
+          <a:prstGeom prst="rect">
+            <a:avLst/>
+          </a:prstGeom>
+          <a:solidFill>
+            <a:srgbClr val="3843AF"/>
+          </a:solidFill>
+          <a:ln/>
+        </p:spPr>
+      </p:sp>
+      <p:sp>
+        <p:nvSpPr>
+          <p:cNvPr id="16" name="Text 14"/>
+          <p:cNvSpPr/>
+          <p:nvPr/>
+        </p:nvSpPr>
+        <p:spPr>
+          <a:xfrm>
+            <a:off x="6291072" y="2121408"/>
+            <a:ext cx="2121408" cy="256032"/>
+          </a:xfrm>
+          <a:prstGeom prst="rect">
+            <a:avLst/>
+          </a:prstGeom>
+          <a:noFill/>
+          <a:ln/>
+        </p:spPr>
+        <p:txBody>
+          <a:bodyPr wrap="square" lIns="0" tIns="0" rIns="0" bIns="0" rtlCol="0" anchor="t"/>
+          <a:lstStyle/>
+          <a:p>
+            <a:pPr indent="0" marL="0">
+              <a:buNone/>
+            </a:pPr>
+            <a:r>
+              <a:rPr lang="en-US" sz="1300" b="1" dirty="0">
+                <a:solidFill>
+                  <a:srgbClr val="272E52"/>
+                </a:solidFill>
+                <a:latin typeface="Arial" pitchFamily="34" charset="0"/>
+                <a:ea typeface="Arial" pitchFamily="34" charset="-122"/>
+                <a:cs typeface="Arial" pitchFamily="34" charset="-120"/>
+              </a:rPr>
+              <a:t>Donnerstag</a:t>
+            </a:r>
+            <a:endParaRPr lang="en-US" sz="1300" dirty="0"/>
+          </a:p>
+        </p:txBody>
+      </p:sp>
+      <p:sp>
+        <p:nvSpPr>
+          <p:cNvPr id="17" name="Text 15"/>
+          <p:cNvSpPr/>
+          <p:nvPr/>
+        </p:nvSpPr>
+        <p:spPr>
+          <a:xfrm>
+            <a:off x="6291072" y="2423160"/>
+            <a:ext cx="2121408" cy="1353312"/>
+          </a:xfrm>
+          <a:prstGeom prst="rect">
+            <a:avLst/>
+          </a:prstGeom>
+          <a:noFill/>
+          <a:ln/>
+        </p:spPr>
+        <p:txBody>
+          <a:bodyPr wrap="square" lIns="0" tIns="0" rIns="0" bIns="0" rtlCol="0" anchor="t"/>
+          <a:lstStyle/>
+          <a:p>
+            <a:pPr indent="0" marL="0">
+              <a:lnSpc>
+                <a:spcPct val="92000"/>
+              </a:lnSpc>
+              <a:buNone/>
+            </a:pPr>
+            <a:r>
+              <a:rPr lang="en-US" sz="1150" dirty="0">
+                <a:solidFill>
+                  <a:srgbClr val="434A63"/>
+                </a:solidFill>
+                <a:latin typeface="Arial" pitchFamily="34" charset="0"/>
+                <a:ea typeface="Arial" pitchFamily="34" charset="-122"/>
+                <a:cs typeface="Arial" pitchFamily="34" charset="-120"/>
+              </a:rPr>
+              <a:t>Routing, VLAN und Netzwerksicherheit kompakt – und zum Abschluss beantwortet ihr eine Frage, in der alles von heute steckt.</a:t>
+            </a:r>
+            <a:endParaRPr lang="en-US" sz="1150" dirty="0"/>
+          </a:p>
+        </p:txBody>
+      </p:sp>
+      <p:sp>
+        <p:nvSpPr>
+          <p:cNvPr id="18" name="Shape 16"/>
+          <p:cNvSpPr/>
+          <p:nvPr/>
+        </p:nvSpPr>
+        <p:spPr>
+          <a:xfrm>
+            <a:off x="566928" y="4160520"/>
+            <a:ext cx="32004" cy="256032"/>
+          </a:xfrm>
+          <a:prstGeom prst="rect">
+            <a:avLst/>
+          </a:prstGeom>
+          <a:solidFill>
+            <a:srgbClr val="3843AF"/>
+          </a:solidFill>
+          <a:ln/>
+        </p:spPr>
+      </p:sp>
+      <p:sp>
+        <p:nvSpPr>
+          <p:cNvPr id="19" name="Text 17"/>
+          <p:cNvSpPr/>
+          <p:nvPr/>
+        </p:nvSpPr>
+        <p:spPr>
+          <a:xfrm>
+            <a:off x="749808" y="4114800"/>
+            <a:ext cx="7827264" cy="402336"/>
+          </a:xfrm>
+          <a:prstGeom prst="rect">
+            <a:avLst/>
+          </a:prstGeom>
+          <a:noFill/>
+          <a:ln/>
+        </p:spPr>
+        <p:txBody>
+          <a:bodyPr wrap="square" lIns="0" tIns="0" rIns="0" bIns="0" rtlCol="0" anchor="ctr"/>
+          <a:lstStyle/>
+          <a:p>
+            <a:pPr indent="0" marL="0">
+              <a:buNone/>
+            </a:pPr>
+            <a:r>
+              <a:rPr lang="en-US" sz="1200" b="1" dirty="0">
+                <a:solidFill>
+                  <a:srgbClr val="434A63"/>
+                </a:solidFill>
+                <a:latin typeface="Arial" pitchFamily="34" charset="0"/>
+                <a:ea typeface="Arial" pitchFamily="34" charset="-122"/>
+                <a:cs typeface="Arial" pitchFamily="34" charset="-120"/>
+              </a:rPr>
+              <a:t>Nächster Termin: Donnerstag, 3. September, 18:00 Uhr – Teil zwei und das Finale.</a:t>
+            </a:r>
+            <a:endParaRPr lang="en-US" sz="1200" dirty="0"/>
+          </a:p>
+        </p:txBody>
+      </p:sp>
+      <p:sp>
+        <p:nvSpPr>
+          <p:cNvPr id="20" name="Shape 18"/>
+          <p:cNvSpPr/>
+          <p:nvPr/>
+        </p:nvSpPr>
+        <p:spPr>
+          <a:xfrm>
+            <a:off x="566928" y="4631436"/>
+            <a:ext cx="8010144" cy="0"/>
+          </a:xfrm>
+          <a:prstGeom prst="line">
+            <a:avLst/>
+          </a:prstGeom>
+          <a:noFill/>
+          <a:ln w="9525">
+            <a:solidFill>
+              <a:srgbClr val="DFE3F0"/>
+            </a:solidFill>
+            <a:prstDash val="solid"/>
+          </a:ln>
+        </p:spPr>
+      </p:sp>
+      <p:sp>
+        <p:nvSpPr>
+          <p:cNvPr id="21" name="Text 19"/>
+          <p:cNvSpPr/>
+          <p:nvPr/>
+        </p:nvSpPr>
+        <p:spPr>
+          <a:xfrm>
+            <a:off x="566928" y="4722876"/>
+            <a:ext cx="5029200" cy="237744"/>
+          </a:xfrm>
+          <a:prstGeom prst="rect">
+            <a:avLst/>
+          </a:prstGeom>
+          <a:noFill/>
+          <a:ln/>
+        </p:spPr>
+        <p:txBody>
+          <a:bodyPr wrap="square" lIns="0" tIns="0" rIns="0" bIns="0" rtlCol="0" anchor="ctr"/>
+          <a:lstStyle/>
+          <a:p>
+            <a:pPr indent="0" marL="0">
+              <a:buNone/>
+            </a:pPr>
+            <a:r>
+              <a:rPr lang="en-US" sz="1050" spc="30" kern="0" dirty="0">
+                <a:solidFill>
+                  <a:srgbClr val="5C6377"/>
+                </a:solidFill>
+                <a:latin typeface="Arial" pitchFamily="34" charset="0"/>
+                <a:ea typeface="Arial" pitchFamily="34" charset="-122"/>
+                <a:cs typeface="Arial" pitchFamily="34" charset="-120"/>
+              </a:rPr>
+              <a:t>Abschluss</a:t>
+            </a:r>
+            <a:endParaRPr lang="en-US" sz="1050" dirty="0"/>
+          </a:p>
+        </p:txBody>
+      </p:sp>
+      <p:sp>
+        <p:nvSpPr>
+          <p:cNvPr id="22" name="Text 20"/>
+          <p:cNvSpPr/>
+          <p:nvPr/>
+        </p:nvSpPr>
+        <p:spPr>
+          <a:xfrm>
+            <a:off x="8028432" y="4722876"/>
+            <a:ext cx="548640" cy="237744"/>
+          </a:xfrm>
+          <a:prstGeom prst="rect">
+            <a:avLst/>
+          </a:prstGeom>
+          <a:noFill/>
+          <a:ln/>
+        </p:spPr>
+        <p:txBody>
+          <a:bodyPr wrap="square" lIns="0" tIns="0" rIns="0" bIns="0" rtlCol="0" anchor="ctr"/>
+          <a:lstStyle/>
+          <a:p>
+            <a:pPr algn="r" indent="0" marL="0">
+              <a:buNone/>
+            </a:pPr>
+            <a:r>
+              <a:rPr lang="en-US" sz="1050" dirty="0">
+                <a:solidFill>
+                  <a:srgbClr val="5C6377"/>
+                </a:solidFill>
+                <a:latin typeface="Arial" pitchFamily="34" charset="0"/>
+                <a:ea typeface="Arial" pitchFamily="34" charset="-122"/>
+                <a:cs typeface="Arial" pitchFamily="34" charset="-120"/>
+              </a:rPr>
+              <a:t>21/21</a:t>
+            </a:r>
+            <a:endParaRPr lang="en-US" sz="1050" dirty="0"/>
+          </a:p>
+        </p:txBody>
+      </p:sp>
+    </p:spTree>
+  </p:cSld>
+  <p:clrMapOvr>
+    <a:masterClrMapping/>
+  </p:clrMapOvr>
+</p:sld>
+</file>
+
+<file path=ppt/slides/slide28.xml><?xml version="1.0" encoding="utf-8"?>
+<p:sld xmlns:a="http://schemas.openxmlformats.org/drawingml/2006/main" xmlns:r="http://schemas.openxmlformats.org/officeDocument/2006/relationships" xmlns:p="http://schemas.openxmlformats.org/presentationml/2006/main">
+  <p:cSld name="Slide 28">
     <p:bg>
       <p:bgPr>
         <a:solidFill>
@@ -13045,7 +13448,7 @@
                 <a:ea typeface="Arial" pitchFamily="34" charset="-122"/>
                 <a:cs typeface="Arial" pitchFamily="34" charset="-120"/>
               </a:rPr>
-              <a:t>2/20</a:t>
+              <a:t>2/21</a:t>
             </a:r>
             <a:endParaRPr lang="en-US" sz="1050" dirty="0"/>
           </a:p>
@@ -13359,7 +13762,7 @@
                 <a:ea typeface="Arial" pitchFamily="34" charset="-122"/>
                 <a:cs typeface="Arial" pitchFamily="34" charset="-120"/>
               </a:rPr>
-              <a:t>3/20</a:t>
+              <a:t>3/21</a:t>
             </a:r>
             <a:endParaRPr lang="en-US" sz="1050" dirty="0"/>
           </a:p>
@@ -14790,7 +15193,7 @@
                 <a:ea typeface="Arial" pitchFamily="34" charset="-122"/>
                 <a:cs typeface="Arial" pitchFamily="34" charset="-120"/>
               </a:rPr>
-              <a:t>4/20</a:t>
+              <a:t>4/21</a:t>
             </a:r>
             <a:endParaRPr lang="en-US" sz="1050" dirty="0"/>
           </a:p>
@@ -15104,7 +15507,7 @@
                 <a:ea typeface="Arial" pitchFamily="34" charset="-122"/>
                 <a:cs typeface="Arial" pitchFamily="34" charset="-120"/>
               </a:rPr>
-              <a:t>5/20</a:t>
+              <a:t>5/21</a:t>
             </a:r>
             <a:endParaRPr lang="en-US" sz="1050" dirty="0"/>
           </a:p>
@@ -15465,8 +15868,8 @@
         </p:blipFill>
         <p:spPr>
           <a:xfrm>
-            <a:off x="566928" y="1572768"/>
-            <a:ext cx="8010144" cy="2286000"/>
+            <a:off x="566928" y="1536192"/>
+            <a:ext cx="8010144" cy="2468880"/>
           </a:xfrm>
           <a:prstGeom prst="rect">
             <a:avLst/>
@@ -15481,7 +15884,7 @@
         </p:nvSpPr>
         <p:spPr>
           <a:xfrm>
-            <a:off x="566928" y="4160520"/>
+            <a:off x="566928" y="4206240"/>
             <a:ext cx="32004" cy="256032"/>
           </a:xfrm>
           <a:prstGeom prst="rect">
@@ -15501,7 +15904,7 @@
         </p:nvSpPr>
         <p:spPr>
           <a:xfrm>
-            <a:off x="749808" y="4114800"/>
+            <a:off x="749808" y="4160520"/>
             <a:ext cx="7827264" cy="402336"/>
           </a:xfrm>
           <a:prstGeom prst="rect">
@@ -15627,7 +16030,7 @@
                 <a:ea typeface="Arial" pitchFamily="34" charset="-122"/>
                 <a:cs typeface="Arial" pitchFamily="34" charset="-120"/>
               </a:rPr>
-              <a:t>6/20</a:t>
+              <a:t>6/21</a:t>
             </a:r>
             <a:endParaRPr lang="en-US" sz="1050" dirty="0"/>
           </a:p>

--- a/folien/02-adressierung-subnetting-parallelkurs.pptx
+++ b/folien/02-adressierung-subnetting-parallelkurs.pptx
@@ -13931,7 +13931,7 @@
                 <a:ea typeface="Arial" pitchFamily="34" charset="-122"/>
                 <a:cs typeface="Arial" pitchFamily="34" charset="-120"/>
               </a:rPr>
-              <a:t>Euer Werkzeug für heute. Blockgröße = 2 hoch Hostbits – jeder Schritt halbiert.</a:t>
+              <a:t>Euer Werkzeug für heute. In der Maske gilt: Einsen = Netz, Nullen = Gerät.</a:t>
             </a:r>
             <a:endParaRPr lang="en-US" sz="1300" dirty="0"/>
           </a:p>
@@ -13946,7 +13946,7 @@
         <p:spPr>
           <a:xfrm>
             <a:off x="658368" y="1783080"/>
-            <a:ext cx="731520" cy="274320"/>
+            <a:ext cx="594360" cy="274320"/>
           </a:xfrm>
           <a:prstGeom prst="rect">
             <a:avLst/>
@@ -13984,8 +13984,8 @@
         </p:nvSpPr>
         <p:spPr>
           <a:xfrm>
-            <a:off x="1572768" y="1783080"/>
-            <a:ext cx="1737360" cy="274320"/>
+            <a:off x="1435608" y="1783080"/>
+            <a:ext cx="1554480" cy="274320"/>
           </a:xfrm>
           <a:prstGeom prst="rect">
             <a:avLst/>
@@ -14023,8 +14023,8 @@
         </p:nvSpPr>
         <p:spPr>
           <a:xfrm>
-            <a:off x="3493008" y="1783080"/>
-            <a:ext cx="2468880" cy="274320"/>
+            <a:off x="3172968" y="1783080"/>
+            <a:ext cx="1051560" cy="274320"/>
           </a:xfrm>
           <a:prstGeom prst="rect">
             <a:avLst/>
@@ -14048,6 +14048,45 @@
                 <a:ea typeface="Arial" pitchFamily="34" charset="-122"/>
                 <a:cs typeface="Arial" pitchFamily="34" charset="-120"/>
               </a:rPr>
+              <a:t>letztes Oktett</a:t>
+            </a:r>
+            <a:endParaRPr lang="en-US" sz="1050" dirty="0"/>
+          </a:p>
+        </p:txBody>
+      </p:sp>
+      <p:sp>
+        <p:nvSpPr>
+          <p:cNvPr id="9" name="Text 7"/>
+          <p:cNvSpPr/>
+          <p:nvPr/>
+        </p:nvSpPr>
+        <p:spPr>
+          <a:xfrm>
+            <a:off x="4407408" y="1783080"/>
+            <a:ext cx="1691640" cy="274320"/>
+          </a:xfrm>
+          <a:prstGeom prst="rect">
+            <a:avLst/>
+          </a:prstGeom>
+          <a:noFill/>
+          <a:ln/>
+        </p:spPr>
+        <p:txBody>
+          <a:bodyPr wrap="square" lIns="0" tIns="0" rIns="0" bIns="0" rtlCol="0" anchor="ctr"/>
+          <a:lstStyle/>
+          <a:p>
+            <a:pPr indent="0" marL="0">
+              <a:buNone/>
+            </a:pPr>
+            <a:r>
+              <a:rPr lang="en-US" sz="1050" b="1" spc="80" kern="0" dirty="0">
+                <a:solidFill>
+                  <a:srgbClr val="3843AF"/>
+                </a:solidFill>
+                <a:latin typeface="Arial" pitchFamily="34" charset="0"/>
+                <a:ea typeface="Arial" pitchFamily="34" charset="-122"/>
+                <a:cs typeface="Arial" pitchFamily="34" charset="-120"/>
+              </a:rPr>
               <a:t>Blockgröße · nutzbar</a:t>
             </a:r>
             <a:endParaRPr lang="en-US" sz="1050" dirty="0"/>
@@ -14056,14 +14095,14 @@
       </p:sp>
       <p:sp>
         <p:nvSpPr>
-          <p:cNvPr id="9" name="Shape 7"/>
+          <p:cNvPr id="10" name="Shape 8"/>
           <p:cNvSpPr/>
           <p:nvPr/>
         </p:nvSpPr>
         <p:spPr>
           <a:xfrm>
             <a:off x="566928" y="2075688"/>
-            <a:ext cx="5486400" cy="0"/>
+            <a:ext cx="5623560" cy="0"/>
           </a:xfrm>
           <a:prstGeom prst="line">
             <a:avLst/>
@@ -14079,14 +14118,14 @@
       </p:sp>
       <p:sp>
         <p:nvSpPr>
-          <p:cNvPr id="10" name="Shape 8"/>
+          <p:cNvPr id="11" name="Shape 9"/>
           <p:cNvSpPr/>
           <p:nvPr/>
         </p:nvSpPr>
         <p:spPr>
           <a:xfrm>
             <a:off x="475488" y="2148840"/>
-            <a:ext cx="5669280" cy="283464"/>
+            <a:ext cx="5806440" cy="283464"/>
           </a:xfrm>
           <a:prstGeom prst="rect">
             <a:avLst/>
@@ -14099,14 +14138,14 @@
       </p:sp>
       <p:sp>
         <p:nvSpPr>
-          <p:cNvPr id="11" name="Text 9"/>
+          <p:cNvPr id="12" name="Text 10"/>
           <p:cNvSpPr/>
           <p:nvPr/>
         </p:nvSpPr>
         <p:spPr>
           <a:xfrm>
             <a:off x="658368" y="2148840"/>
-            <a:ext cx="731520" cy="283464"/>
+            <a:ext cx="594360" cy="283464"/>
           </a:xfrm>
           <a:prstGeom prst="rect">
             <a:avLst/>
@@ -14138,14 +14177,14 @@
       </p:sp>
       <p:sp>
         <p:nvSpPr>
-          <p:cNvPr id="12" name="Text 10"/>
-          <p:cNvSpPr/>
-          <p:nvPr/>
-        </p:nvSpPr>
-        <p:spPr>
-          <a:xfrm>
-            <a:off x="1572768" y="2148840"/>
-            <a:ext cx="1737360" cy="283464"/>
+          <p:cNvPr id="13" name="Text 11"/>
+          <p:cNvSpPr/>
+          <p:nvPr/>
+        </p:nvSpPr>
+        <p:spPr>
+          <a:xfrm>
+            <a:off x="1435608" y="2148840"/>
+            <a:ext cx="1554480" cy="283464"/>
           </a:xfrm>
           <a:prstGeom prst="rect">
             <a:avLst/>
@@ -14177,14 +14216,14 @@
       </p:sp>
       <p:sp>
         <p:nvSpPr>
-          <p:cNvPr id="13" name="Text 11"/>
-          <p:cNvSpPr/>
-          <p:nvPr/>
-        </p:nvSpPr>
-        <p:spPr>
-          <a:xfrm>
-            <a:off x="3493008" y="2148840"/>
-            <a:ext cx="2468880" cy="283464"/>
+          <p:cNvPr id="14" name="Text 12"/>
+          <p:cNvSpPr/>
+          <p:nvPr/>
+        </p:nvSpPr>
+        <p:spPr>
+          <a:xfrm>
+            <a:off x="3172968" y="2148840"/>
+            <a:ext cx="1051560" cy="283464"/>
           </a:xfrm>
           <a:prstGeom prst="rect">
             <a:avLst/>
@@ -14202,6 +14241,45 @@
             <a:r>
               <a:rPr lang="en-US" sz="1100" dirty="0">
                 <a:solidFill>
+                  <a:srgbClr val="9A6310"/>
+                </a:solidFill>
+                <a:latin typeface="Arial" pitchFamily="34" charset="0"/>
+                <a:ea typeface="Arial" pitchFamily="34" charset="-122"/>
+                <a:cs typeface="Arial" pitchFamily="34" charset="-120"/>
+              </a:rPr>
+              <a:t>00000000</a:t>
+            </a:r>
+            <a:endParaRPr lang="en-US" sz="1100" dirty="0"/>
+          </a:p>
+        </p:txBody>
+      </p:sp>
+      <p:sp>
+        <p:nvSpPr>
+          <p:cNvPr id="15" name="Text 13"/>
+          <p:cNvSpPr/>
+          <p:nvPr/>
+        </p:nvSpPr>
+        <p:spPr>
+          <a:xfrm>
+            <a:off x="4407408" y="2148840"/>
+            <a:ext cx="1691640" cy="283464"/>
+          </a:xfrm>
+          <a:prstGeom prst="rect">
+            <a:avLst/>
+          </a:prstGeom>
+          <a:noFill/>
+          <a:ln/>
+        </p:spPr>
+        <p:txBody>
+          <a:bodyPr wrap="square" lIns="0" tIns="0" rIns="0" bIns="0" rtlCol="0" anchor="ctr"/>
+          <a:lstStyle/>
+          <a:p>
+            <a:pPr indent="0" marL="0">
+              <a:buNone/>
+            </a:pPr>
+            <a:r>
+              <a:rPr lang="en-US" sz="1100" dirty="0">
+                <a:solidFill>
                   <a:srgbClr val="434A63"/>
                 </a:solidFill>
                 <a:latin typeface="Arial" pitchFamily="34" charset="0"/>
@@ -14216,14 +14294,14 @@
       </p:sp>
       <p:sp>
         <p:nvSpPr>
-          <p:cNvPr id="14" name="Text 12"/>
+          <p:cNvPr id="16" name="Text 14"/>
           <p:cNvSpPr/>
           <p:nvPr/>
         </p:nvSpPr>
         <p:spPr>
           <a:xfrm>
             <a:off x="658368" y="2432304"/>
-            <a:ext cx="731520" cy="283464"/>
+            <a:ext cx="594360" cy="283464"/>
           </a:xfrm>
           <a:prstGeom prst="rect">
             <a:avLst/>
@@ -14255,14 +14333,14 @@
       </p:sp>
       <p:sp>
         <p:nvSpPr>
-          <p:cNvPr id="15" name="Text 13"/>
-          <p:cNvSpPr/>
-          <p:nvPr/>
-        </p:nvSpPr>
-        <p:spPr>
-          <a:xfrm>
-            <a:off x="1572768" y="2432304"/>
-            <a:ext cx="1737360" cy="283464"/>
+          <p:cNvPr id="17" name="Text 15"/>
+          <p:cNvSpPr/>
+          <p:nvPr/>
+        </p:nvSpPr>
+        <p:spPr>
+          <a:xfrm>
+            <a:off x="1435608" y="2432304"/>
+            <a:ext cx="1554480" cy="283464"/>
           </a:xfrm>
           <a:prstGeom prst="rect">
             <a:avLst/>
@@ -14294,31 +14372,84 @@
       </p:sp>
       <p:sp>
         <p:nvSpPr>
-          <p:cNvPr id="16" name="Text 14"/>
-          <p:cNvSpPr/>
-          <p:nvPr/>
-        </p:nvSpPr>
-        <p:spPr>
-          <a:xfrm>
-            <a:off x="3493008" y="2432304"/>
-            <a:ext cx="2468880" cy="283464"/>
-          </a:xfrm>
-          <a:prstGeom prst="rect">
-            <a:avLst/>
-          </a:prstGeom>
-          <a:noFill/>
-          <a:ln/>
-        </p:spPr>
-        <p:txBody>
-          <a:bodyPr wrap="square" lIns="0" tIns="0" rIns="0" bIns="0" rtlCol="0" anchor="ctr"/>
-          <a:lstStyle/>
-          <a:p>
+          <p:cNvPr id="18" name="Text 16"/>
+          <p:cNvSpPr/>
+          <p:nvPr/>
+        </p:nvSpPr>
+        <p:spPr>
+          <a:xfrm>
+            <a:off x="3172968" y="2432304"/>
+            <a:ext cx="1051560" cy="283464"/>
+          </a:xfrm>
+          <a:prstGeom prst="rect">
+            <a:avLst/>
+          </a:prstGeom>
+          <a:noFill/>
+          <a:ln/>
+        </p:spPr>
+        <p:txBody>
+          <a:bodyPr wrap="square" lIns="0" tIns="0" rIns="0" bIns="0" rtlCol="0" anchor="ctr"/>
+          <a:lstStyle/>
+          <a:p>
+            <a:pPr indent="0" marL="0">
+              <a:buNone/>
+            </a:pPr>
+            <a:r>
+              <a:rPr lang="en-US" sz="1100" b="1" dirty="0">
+                <a:solidFill>
+                  <a:srgbClr val="3843AF"/>
+                </a:solidFill>
+                <a:latin typeface="Arial" pitchFamily="34" charset="0"/>
+                <a:ea typeface="Arial" pitchFamily="34" charset="-122"/>
+                <a:cs typeface="Arial" pitchFamily="34" charset="-120"/>
+              </a:rPr>
+              <a:t>1</a:t>
+            </a:r>
             <a:pPr indent="0" marL="0">
               <a:buNone/>
             </a:pPr>
             <a:r>
               <a:rPr lang="en-US" sz="1100" dirty="0">
                 <a:solidFill>
+                  <a:srgbClr val="9A6310"/>
+                </a:solidFill>
+                <a:latin typeface="Arial" pitchFamily="34" charset="0"/>
+                <a:ea typeface="Arial" pitchFamily="34" charset="-122"/>
+                <a:cs typeface="Arial" pitchFamily="34" charset="-120"/>
+              </a:rPr>
+              <a:t>0000000</a:t>
+            </a:r>
+            <a:endParaRPr lang="en-US" sz="1100" dirty="0"/>
+          </a:p>
+        </p:txBody>
+      </p:sp>
+      <p:sp>
+        <p:nvSpPr>
+          <p:cNvPr id="19" name="Text 17"/>
+          <p:cNvSpPr/>
+          <p:nvPr/>
+        </p:nvSpPr>
+        <p:spPr>
+          <a:xfrm>
+            <a:off x="4407408" y="2432304"/>
+            <a:ext cx="1691640" cy="283464"/>
+          </a:xfrm>
+          <a:prstGeom prst="rect">
+            <a:avLst/>
+          </a:prstGeom>
+          <a:noFill/>
+          <a:ln/>
+        </p:spPr>
+        <p:txBody>
+          <a:bodyPr wrap="square" lIns="0" tIns="0" rIns="0" bIns="0" rtlCol="0" anchor="ctr"/>
+          <a:lstStyle/>
+          <a:p>
+            <a:pPr indent="0" marL="0">
+              <a:buNone/>
+            </a:pPr>
+            <a:r>
+              <a:rPr lang="en-US" sz="1100" dirty="0">
+                <a:solidFill>
                   <a:srgbClr val="434A63"/>
                 </a:solidFill>
                 <a:latin typeface="Arial" pitchFamily="34" charset="0"/>
@@ -14333,14 +14464,14 @@
       </p:sp>
       <p:sp>
         <p:nvSpPr>
-          <p:cNvPr id="17" name="Shape 15"/>
+          <p:cNvPr id="20" name="Shape 18"/>
           <p:cNvSpPr/>
           <p:nvPr/>
         </p:nvSpPr>
         <p:spPr>
           <a:xfrm>
             <a:off x="475488" y="2715768"/>
-            <a:ext cx="5669280" cy="283464"/>
+            <a:ext cx="5806440" cy="283464"/>
           </a:xfrm>
           <a:prstGeom prst="rect">
             <a:avLst/>
@@ -14353,14 +14484,14 @@
       </p:sp>
       <p:sp>
         <p:nvSpPr>
-          <p:cNvPr id="18" name="Text 16"/>
+          <p:cNvPr id="21" name="Text 19"/>
           <p:cNvSpPr/>
           <p:nvPr/>
         </p:nvSpPr>
         <p:spPr>
           <a:xfrm>
             <a:off x="658368" y="2715768"/>
-            <a:ext cx="731520" cy="283464"/>
+            <a:ext cx="594360" cy="283464"/>
           </a:xfrm>
           <a:prstGeom prst="rect">
             <a:avLst/>
@@ -14392,14 +14523,14 @@
       </p:sp>
       <p:sp>
         <p:nvSpPr>
-          <p:cNvPr id="19" name="Text 17"/>
-          <p:cNvSpPr/>
-          <p:nvPr/>
-        </p:nvSpPr>
-        <p:spPr>
-          <a:xfrm>
-            <a:off x="1572768" y="2715768"/>
-            <a:ext cx="1737360" cy="283464"/>
+          <p:cNvPr id="22" name="Text 20"/>
+          <p:cNvSpPr/>
+          <p:nvPr/>
+        </p:nvSpPr>
+        <p:spPr>
+          <a:xfrm>
+            <a:off x="1435608" y="2715768"/>
+            <a:ext cx="1554480" cy="283464"/>
           </a:xfrm>
           <a:prstGeom prst="rect">
             <a:avLst/>
@@ -14431,31 +14562,84 @@
       </p:sp>
       <p:sp>
         <p:nvSpPr>
-          <p:cNvPr id="20" name="Text 18"/>
-          <p:cNvSpPr/>
-          <p:nvPr/>
-        </p:nvSpPr>
-        <p:spPr>
-          <a:xfrm>
-            <a:off x="3493008" y="2715768"/>
-            <a:ext cx="2468880" cy="283464"/>
-          </a:xfrm>
-          <a:prstGeom prst="rect">
-            <a:avLst/>
-          </a:prstGeom>
-          <a:noFill/>
-          <a:ln/>
-        </p:spPr>
-        <p:txBody>
-          <a:bodyPr wrap="square" lIns="0" tIns="0" rIns="0" bIns="0" rtlCol="0" anchor="ctr"/>
-          <a:lstStyle/>
-          <a:p>
+          <p:cNvPr id="23" name="Text 21"/>
+          <p:cNvSpPr/>
+          <p:nvPr/>
+        </p:nvSpPr>
+        <p:spPr>
+          <a:xfrm>
+            <a:off x="3172968" y="2715768"/>
+            <a:ext cx="1051560" cy="283464"/>
+          </a:xfrm>
+          <a:prstGeom prst="rect">
+            <a:avLst/>
+          </a:prstGeom>
+          <a:noFill/>
+          <a:ln/>
+        </p:spPr>
+        <p:txBody>
+          <a:bodyPr wrap="square" lIns="0" tIns="0" rIns="0" bIns="0" rtlCol="0" anchor="ctr"/>
+          <a:lstStyle/>
+          <a:p>
+            <a:pPr indent="0" marL="0">
+              <a:buNone/>
+            </a:pPr>
+            <a:r>
+              <a:rPr lang="en-US" sz="1100" b="1" dirty="0">
+                <a:solidFill>
+                  <a:srgbClr val="3843AF"/>
+                </a:solidFill>
+                <a:latin typeface="Arial" pitchFamily="34" charset="0"/>
+                <a:ea typeface="Arial" pitchFamily="34" charset="-122"/>
+                <a:cs typeface="Arial" pitchFamily="34" charset="-120"/>
+              </a:rPr>
+              <a:t>11</a:t>
+            </a:r>
             <a:pPr indent="0" marL="0">
               <a:buNone/>
             </a:pPr>
             <a:r>
               <a:rPr lang="en-US" sz="1100" dirty="0">
                 <a:solidFill>
+                  <a:srgbClr val="9A6310"/>
+                </a:solidFill>
+                <a:latin typeface="Arial" pitchFamily="34" charset="0"/>
+                <a:ea typeface="Arial" pitchFamily="34" charset="-122"/>
+                <a:cs typeface="Arial" pitchFamily="34" charset="-120"/>
+              </a:rPr>
+              <a:t>000000</a:t>
+            </a:r>
+            <a:endParaRPr lang="en-US" sz="1100" dirty="0"/>
+          </a:p>
+        </p:txBody>
+      </p:sp>
+      <p:sp>
+        <p:nvSpPr>
+          <p:cNvPr id="24" name="Text 22"/>
+          <p:cNvSpPr/>
+          <p:nvPr/>
+        </p:nvSpPr>
+        <p:spPr>
+          <a:xfrm>
+            <a:off x="4407408" y="2715768"/>
+            <a:ext cx="1691640" cy="283464"/>
+          </a:xfrm>
+          <a:prstGeom prst="rect">
+            <a:avLst/>
+          </a:prstGeom>
+          <a:noFill/>
+          <a:ln/>
+        </p:spPr>
+        <p:txBody>
+          <a:bodyPr wrap="square" lIns="0" tIns="0" rIns="0" bIns="0" rtlCol="0" anchor="ctr"/>
+          <a:lstStyle/>
+          <a:p>
+            <a:pPr indent="0" marL="0">
+              <a:buNone/>
+            </a:pPr>
+            <a:r>
+              <a:rPr lang="en-US" sz="1100" dirty="0">
+                <a:solidFill>
                   <a:srgbClr val="434A63"/>
                 </a:solidFill>
                 <a:latin typeface="Arial" pitchFamily="34" charset="0"/>
@@ -14470,14 +14654,14 @@
       </p:sp>
       <p:sp>
         <p:nvSpPr>
-          <p:cNvPr id="21" name="Text 19"/>
+          <p:cNvPr id="25" name="Text 23"/>
           <p:cNvSpPr/>
           <p:nvPr/>
         </p:nvSpPr>
         <p:spPr>
           <a:xfrm>
             <a:off x="658368" y="2999232"/>
-            <a:ext cx="731520" cy="283464"/>
+            <a:ext cx="594360" cy="283464"/>
           </a:xfrm>
           <a:prstGeom prst="rect">
             <a:avLst/>
@@ -14509,14 +14693,14 @@
       </p:sp>
       <p:sp>
         <p:nvSpPr>
-          <p:cNvPr id="22" name="Text 20"/>
-          <p:cNvSpPr/>
-          <p:nvPr/>
-        </p:nvSpPr>
-        <p:spPr>
-          <a:xfrm>
-            <a:off x="1572768" y="2999232"/>
-            <a:ext cx="1737360" cy="283464"/>
+          <p:cNvPr id="26" name="Text 24"/>
+          <p:cNvSpPr/>
+          <p:nvPr/>
+        </p:nvSpPr>
+        <p:spPr>
+          <a:xfrm>
+            <a:off x="1435608" y="2999232"/>
+            <a:ext cx="1554480" cy="283464"/>
           </a:xfrm>
           <a:prstGeom prst="rect">
             <a:avLst/>
@@ -14548,31 +14732,84 @@
       </p:sp>
       <p:sp>
         <p:nvSpPr>
-          <p:cNvPr id="23" name="Text 21"/>
-          <p:cNvSpPr/>
-          <p:nvPr/>
-        </p:nvSpPr>
-        <p:spPr>
-          <a:xfrm>
-            <a:off x="3493008" y="2999232"/>
-            <a:ext cx="2468880" cy="283464"/>
-          </a:xfrm>
-          <a:prstGeom prst="rect">
-            <a:avLst/>
-          </a:prstGeom>
-          <a:noFill/>
-          <a:ln/>
-        </p:spPr>
-        <p:txBody>
-          <a:bodyPr wrap="square" lIns="0" tIns="0" rIns="0" bIns="0" rtlCol="0" anchor="ctr"/>
-          <a:lstStyle/>
-          <a:p>
+          <p:cNvPr id="27" name="Text 25"/>
+          <p:cNvSpPr/>
+          <p:nvPr/>
+        </p:nvSpPr>
+        <p:spPr>
+          <a:xfrm>
+            <a:off x="3172968" y="2999232"/>
+            <a:ext cx="1051560" cy="283464"/>
+          </a:xfrm>
+          <a:prstGeom prst="rect">
+            <a:avLst/>
+          </a:prstGeom>
+          <a:noFill/>
+          <a:ln/>
+        </p:spPr>
+        <p:txBody>
+          <a:bodyPr wrap="square" lIns="0" tIns="0" rIns="0" bIns="0" rtlCol="0" anchor="ctr"/>
+          <a:lstStyle/>
+          <a:p>
+            <a:pPr indent="0" marL="0">
+              <a:buNone/>
+            </a:pPr>
+            <a:r>
+              <a:rPr lang="en-US" sz="1100" b="1" dirty="0">
+                <a:solidFill>
+                  <a:srgbClr val="3843AF"/>
+                </a:solidFill>
+                <a:latin typeface="Arial" pitchFamily="34" charset="0"/>
+                <a:ea typeface="Arial" pitchFamily="34" charset="-122"/>
+                <a:cs typeface="Arial" pitchFamily="34" charset="-120"/>
+              </a:rPr>
+              <a:t>111</a:t>
+            </a:r>
             <a:pPr indent="0" marL="0">
               <a:buNone/>
             </a:pPr>
             <a:r>
               <a:rPr lang="en-US" sz="1100" dirty="0">
                 <a:solidFill>
+                  <a:srgbClr val="9A6310"/>
+                </a:solidFill>
+                <a:latin typeface="Arial" pitchFamily="34" charset="0"/>
+                <a:ea typeface="Arial" pitchFamily="34" charset="-122"/>
+                <a:cs typeface="Arial" pitchFamily="34" charset="-120"/>
+              </a:rPr>
+              <a:t>00000</a:t>
+            </a:r>
+            <a:endParaRPr lang="en-US" sz="1100" dirty="0"/>
+          </a:p>
+        </p:txBody>
+      </p:sp>
+      <p:sp>
+        <p:nvSpPr>
+          <p:cNvPr id="28" name="Text 26"/>
+          <p:cNvSpPr/>
+          <p:nvPr/>
+        </p:nvSpPr>
+        <p:spPr>
+          <a:xfrm>
+            <a:off x="4407408" y="2999232"/>
+            <a:ext cx="1691640" cy="283464"/>
+          </a:xfrm>
+          <a:prstGeom prst="rect">
+            <a:avLst/>
+          </a:prstGeom>
+          <a:noFill/>
+          <a:ln/>
+        </p:spPr>
+        <p:txBody>
+          <a:bodyPr wrap="square" lIns="0" tIns="0" rIns="0" bIns="0" rtlCol="0" anchor="ctr"/>
+          <a:lstStyle/>
+          <a:p>
+            <a:pPr indent="0" marL="0">
+              <a:buNone/>
+            </a:pPr>
+            <a:r>
+              <a:rPr lang="en-US" sz="1100" dirty="0">
+                <a:solidFill>
                   <a:srgbClr val="434A63"/>
                 </a:solidFill>
                 <a:latin typeface="Arial" pitchFamily="34" charset="0"/>
@@ -14587,14 +14824,14 @@
       </p:sp>
       <p:sp>
         <p:nvSpPr>
-          <p:cNvPr id="24" name="Shape 22"/>
+          <p:cNvPr id="29" name="Shape 27"/>
           <p:cNvSpPr/>
           <p:nvPr/>
         </p:nvSpPr>
         <p:spPr>
           <a:xfrm>
             <a:off x="475488" y="3282696"/>
-            <a:ext cx="5669280" cy="283464"/>
+            <a:ext cx="5806440" cy="283464"/>
           </a:xfrm>
           <a:prstGeom prst="rect">
             <a:avLst/>
@@ -14607,14 +14844,14 @@
       </p:sp>
       <p:sp>
         <p:nvSpPr>
-          <p:cNvPr id="25" name="Text 23"/>
+          <p:cNvPr id="30" name="Text 28"/>
           <p:cNvSpPr/>
           <p:nvPr/>
         </p:nvSpPr>
         <p:spPr>
           <a:xfrm>
             <a:off x="658368" y="3282696"/>
-            <a:ext cx="731520" cy="283464"/>
+            <a:ext cx="594360" cy="283464"/>
           </a:xfrm>
           <a:prstGeom prst="rect">
             <a:avLst/>
@@ -14646,14 +14883,14 @@
       </p:sp>
       <p:sp>
         <p:nvSpPr>
-          <p:cNvPr id="26" name="Text 24"/>
-          <p:cNvSpPr/>
-          <p:nvPr/>
-        </p:nvSpPr>
-        <p:spPr>
-          <a:xfrm>
-            <a:off x="1572768" y="3282696"/>
-            <a:ext cx="1737360" cy="283464"/>
+          <p:cNvPr id="31" name="Text 29"/>
+          <p:cNvSpPr/>
+          <p:nvPr/>
+        </p:nvSpPr>
+        <p:spPr>
+          <a:xfrm>
+            <a:off x="1435608" y="3282696"/>
+            <a:ext cx="1554480" cy="283464"/>
           </a:xfrm>
           <a:prstGeom prst="rect">
             <a:avLst/>
@@ -14685,31 +14922,84 @@
       </p:sp>
       <p:sp>
         <p:nvSpPr>
-          <p:cNvPr id="27" name="Text 25"/>
-          <p:cNvSpPr/>
-          <p:nvPr/>
-        </p:nvSpPr>
-        <p:spPr>
-          <a:xfrm>
-            <a:off x="3493008" y="3282696"/>
-            <a:ext cx="2468880" cy="283464"/>
-          </a:xfrm>
-          <a:prstGeom prst="rect">
-            <a:avLst/>
-          </a:prstGeom>
-          <a:noFill/>
-          <a:ln/>
-        </p:spPr>
-        <p:txBody>
-          <a:bodyPr wrap="square" lIns="0" tIns="0" rIns="0" bIns="0" rtlCol="0" anchor="ctr"/>
-          <a:lstStyle/>
-          <a:p>
+          <p:cNvPr id="32" name="Text 30"/>
+          <p:cNvSpPr/>
+          <p:nvPr/>
+        </p:nvSpPr>
+        <p:spPr>
+          <a:xfrm>
+            <a:off x="3172968" y="3282696"/>
+            <a:ext cx="1051560" cy="283464"/>
+          </a:xfrm>
+          <a:prstGeom prst="rect">
+            <a:avLst/>
+          </a:prstGeom>
+          <a:noFill/>
+          <a:ln/>
+        </p:spPr>
+        <p:txBody>
+          <a:bodyPr wrap="square" lIns="0" tIns="0" rIns="0" bIns="0" rtlCol="0" anchor="ctr"/>
+          <a:lstStyle/>
+          <a:p>
+            <a:pPr indent="0" marL="0">
+              <a:buNone/>
+            </a:pPr>
+            <a:r>
+              <a:rPr lang="en-US" sz="1100" b="1" dirty="0">
+                <a:solidFill>
+                  <a:srgbClr val="3843AF"/>
+                </a:solidFill>
+                <a:latin typeface="Arial" pitchFamily="34" charset="0"/>
+                <a:ea typeface="Arial" pitchFamily="34" charset="-122"/>
+                <a:cs typeface="Arial" pitchFamily="34" charset="-120"/>
+              </a:rPr>
+              <a:t>1111</a:t>
+            </a:r>
             <a:pPr indent="0" marL="0">
               <a:buNone/>
             </a:pPr>
             <a:r>
               <a:rPr lang="en-US" sz="1100" dirty="0">
                 <a:solidFill>
+                  <a:srgbClr val="9A6310"/>
+                </a:solidFill>
+                <a:latin typeface="Arial" pitchFamily="34" charset="0"/>
+                <a:ea typeface="Arial" pitchFamily="34" charset="-122"/>
+                <a:cs typeface="Arial" pitchFamily="34" charset="-120"/>
+              </a:rPr>
+              <a:t>0000</a:t>
+            </a:r>
+            <a:endParaRPr lang="en-US" sz="1100" dirty="0"/>
+          </a:p>
+        </p:txBody>
+      </p:sp>
+      <p:sp>
+        <p:nvSpPr>
+          <p:cNvPr id="33" name="Text 31"/>
+          <p:cNvSpPr/>
+          <p:nvPr/>
+        </p:nvSpPr>
+        <p:spPr>
+          <a:xfrm>
+            <a:off x="4407408" y="3282696"/>
+            <a:ext cx="1691640" cy="283464"/>
+          </a:xfrm>
+          <a:prstGeom prst="rect">
+            <a:avLst/>
+          </a:prstGeom>
+          <a:noFill/>
+          <a:ln/>
+        </p:spPr>
+        <p:txBody>
+          <a:bodyPr wrap="square" lIns="0" tIns="0" rIns="0" bIns="0" rtlCol="0" anchor="ctr"/>
+          <a:lstStyle/>
+          <a:p>
+            <a:pPr indent="0" marL="0">
+              <a:buNone/>
+            </a:pPr>
+            <a:r>
+              <a:rPr lang="en-US" sz="1100" dirty="0">
+                <a:solidFill>
                   <a:srgbClr val="434A63"/>
                 </a:solidFill>
                 <a:latin typeface="Arial" pitchFamily="34" charset="0"/>
@@ -14724,14 +15014,14 @@
       </p:sp>
       <p:sp>
         <p:nvSpPr>
-          <p:cNvPr id="28" name="Text 26"/>
+          <p:cNvPr id="34" name="Text 32"/>
           <p:cNvSpPr/>
           <p:nvPr/>
         </p:nvSpPr>
         <p:spPr>
           <a:xfrm>
             <a:off x="658368" y="3566160"/>
-            <a:ext cx="731520" cy="283464"/>
+            <a:ext cx="594360" cy="283464"/>
           </a:xfrm>
           <a:prstGeom prst="rect">
             <a:avLst/>
@@ -14763,14 +15053,14 @@
       </p:sp>
       <p:sp>
         <p:nvSpPr>
-          <p:cNvPr id="29" name="Text 27"/>
-          <p:cNvSpPr/>
-          <p:nvPr/>
-        </p:nvSpPr>
-        <p:spPr>
-          <a:xfrm>
-            <a:off x="1572768" y="3566160"/>
-            <a:ext cx="1737360" cy="283464"/>
+          <p:cNvPr id="35" name="Text 33"/>
+          <p:cNvSpPr/>
+          <p:nvPr/>
+        </p:nvSpPr>
+        <p:spPr>
+          <a:xfrm>
+            <a:off x="1435608" y="3566160"/>
+            <a:ext cx="1554480" cy="283464"/>
           </a:xfrm>
           <a:prstGeom prst="rect">
             <a:avLst/>
@@ -14802,31 +15092,84 @@
       </p:sp>
       <p:sp>
         <p:nvSpPr>
-          <p:cNvPr id="30" name="Text 28"/>
-          <p:cNvSpPr/>
-          <p:nvPr/>
-        </p:nvSpPr>
-        <p:spPr>
-          <a:xfrm>
-            <a:off x="3493008" y="3566160"/>
-            <a:ext cx="2468880" cy="283464"/>
-          </a:xfrm>
-          <a:prstGeom prst="rect">
-            <a:avLst/>
-          </a:prstGeom>
-          <a:noFill/>
-          <a:ln/>
-        </p:spPr>
-        <p:txBody>
-          <a:bodyPr wrap="square" lIns="0" tIns="0" rIns="0" bIns="0" rtlCol="0" anchor="ctr"/>
-          <a:lstStyle/>
-          <a:p>
+          <p:cNvPr id="36" name="Text 34"/>
+          <p:cNvSpPr/>
+          <p:nvPr/>
+        </p:nvSpPr>
+        <p:spPr>
+          <a:xfrm>
+            <a:off x="3172968" y="3566160"/>
+            <a:ext cx="1051560" cy="283464"/>
+          </a:xfrm>
+          <a:prstGeom prst="rect">
+            <a:avLst/>
+          </a:prstGeom>
+          <a:noFill/>
+          <a:ln/>
+        </p:spPr>
+        <p:txBody>
+          <a:bodyPr wrap="square" lIns="0" tIns="0" rIns="0" bIns="0" rtlCol="0" anchor="ctr"/>
+          <a:lstStyle/>
+          <a:p>
+            <a:pPr indent="0" marL="0">
+              <a:buNone/>
+            </a:pPr>
+            <a:r>
+              <a:rPr lang="en-US" sz="1100" b="1" dirty="0">
+                <a:solidFill>
+                  <a:srgbClr val="3843AF"/>
+                </a:solidFill>
+                <a:latin typeface="Arial" pitchFamily="34" charset="0"/>
+                <a:ea typeface="Arial" pitchFamily="34" charset="-122"/>
+                <a:cs typeface="Arial" pitchFamily="34" charset="-120"/>
+              </a:rPr>
+              <a:t>11111</a:t>
+            </a:r>
             <a:pPr indent="0" marL="0">
               <a:buNone/>
             </a:pPr>
             <a:r>
               <a:rPr lang="en-US" sz="1100" dirty="0">
                 <a:solidFill>
+                  <a:srgbClr val="9A6310"/>
+                </a:solidFill>
+                <a:latin typeface="Arial" pitchFamily="34" charset="0"/>
+                <a:ea typeface="Arial" pitchFamily="34" charset="-122"/>
+                <a:cs typeface="Arial" pitchFamily="34" charset="-120"/>
+              </a:rPr>
+              <a:t>000</a:t>
+            </a:r>
+            <a:endParaRPr lang="en-US" sz="1100" dirty="0"/>
+          </a:p>
+        </p:txBody>
+      </p:sp>
+      <p:sp>
+        <p:nvSpPr>
+          <p:cNvPr id="37" name="Text 35"/>
+          <p:cNvSpPr/>
+          <p:nvPr/>
+        </p:nvSpPr>
+        <p:spPr>
+          <a:xfrm>
+            <a:off x="4407408" y="3566160"/>
+            <a:ext cx="1691640" cy="283464"/>
+          </a:xfrm>
+          <a:prstGeom prst="rect">
+            <a:avLst/>
+          </a:prstGeom>
+          <a:noFill/>
+          <a:ln/>
+        </p:spPr>
+        <p:txBody>
+          <a:bodyPr wrap="square" lIns="0" tIns="0" rIns="0" bIns="0" rtlCol="0" anchor="ctr"/>
+          <a:lstStyle/>
+          <a:p>
+            <a:pPr indent="0" marL="0">
+              <a:buNone/>
+            </a:pPr>
+            <a:r>
+              <a:rPr lang="en-US" sz="1100" dirty="0">
+                <a:solidFill>
                   <a:srgbClr val="434A63"/>
                 </a:solidFill>
                 <a:latin typeface="Arial" pitchFamily="34" charset="0"/>
@@ -14841,14 +15184,14 @@
       </p:sp>
       <p:sp>
         <p:nvSpPr>
-          <p:cNvPr id="31" name="Shape 29"/>
+          <p:cNvPr id="38" name="Shape 36"/>
           <p:cNvSpPr/>
           <p:nvPr/>
         </p:nvSpPr>
         <p:spPr>
           <a:xfrm>
             <a:off x="475488" y="3849624"/>
-            <a:ext cx="5669280" cy="283464"/>
+            <a:ext cx="5806440" cy="283464"/>
           </a:xfrm>
           <a:prstGeom prst="rect">
             <a:avLst/>
@@ -14861,14 +15204,14 @@
       </p:sp>
       <p:sp>
         <p:nvSpPr>
-          <p:cNvPr id="32" name="Text 30"/>
+          <p:cNvPr id="39" name="Text 37"/>
           <p:cNvSpPr/>
           <p:nvPr/>
         </p:nvSpPr>
         <p:spPr>
           <a:xfrm>
             <a:off x="658368" y="3849624"/>
-            <a:ext cx="731520" cy="283464"/>
+            <a:ext cx="594360" cy="283464"/>
           </a:xfrm>
           <a:prstGeom prst="rect">
             <a:avLst/>
@@ -14900,14 +15243,14 @@
       </p:sp>
       <p:sp>
         <p:nvSpPr>
-          <p:cNvPr id="33" name="Text 31"/>
-          <p:cNvSpPr/>
-          <p:nvPr/>
-        </p:nvSpPr>
-        <p:spPr>
-          <a:xfrm>
-            <a:off x="1572768" y="3849624"/>
-            <a:ext cx="1737360" cy="283464"/>
+          <p:cNvPr id="40" name="Text 38"/>
+          <p:cNvSpPr/>
+          <p:nvPr/>
+        </p:nvSpPr>
+        <p:spPr>
+          <a:xfrm>
+            <a:off x="1435608" y="3849624"/>
+            <a:ext cx="1554480" cy="283464"/>
           </a:xfrm>
           <a:prstGeom prst="rect">
             <a:avLst/>
@@ -14939,31 +15282,84 @@
       </p:sp>
       <p:sp>
         <p:nvSpPr>
-          <p:cNvPr id="34" name="Text 32"/>
-          <p:cNvSpPr/>
-          <p:nvPr/>
-        </p:nvSpPr>
-        <p:spPr>
-          <a:xfrm>
-            <a:off x="3493008" y="3849624"/>
-            <a:ext cx="2468880" cy="283464"/>
-          </a:xfrm>
-          <a:prstGeom prst="rect">
-            <a:avLst/>
-          </a:prstGeom>
-          <a:noFill/>
-          <a:ln/>
-        </p:spPr>
-        <p:txBody>
-          <a:bodyPr wrap="square" lIns="0" tIns="0" rIns="0" bIns="0" rtlCol="0" anchor="ctr"/>
-          <a:lstStyle/>
-          <a:p>
+          <p:cNvPr id="41" name="Text 39"/>
+          <p:cNvSpPr/>
+          <p:nvPr/>
+        </p:nvSpPr>
+        <p:spPr>
+          <a:xfrm>
+            <a:off x="3172968" y="3849624"/>
+            <a:ext cx="1051560" cy="283464"/>
+          </a:xfrm>
+          <a:prstGeom prst="rect">
+            <a:avLst/>
+          </a:prstGeom>
+          <a:noFill/>
+          <a:ln/>
+        </p:spPr>
+        <p:txBody>
+          <a:bodyPr wrap="square" lIns="0" tIns="0" rIns="0" bIns="0" rtlCol="0" anchor="ctr"/>
+          <a:lstStyle/>
+          <a:p>
+            <a:pPr indent="0" marL="0">
+              <a:buNone/>
+            </a:pPr>
+            <a:r>
+              <a:rPr lang="en-US" sz="1100" b="1" dirty="0">
+                <a:solidFill>
+                  <a:srgbClr val="3843AF"/>
+                </a:solidFill>
+                <a:latin typeface="Arial" pitchFamily="34" charset="0"/>
+                <a:ea typeface="Arial" pitchFamily="34" charset="-122"/>
+                <a:cs typeface="Arial" pitchFamily="34" charset="-120"/>
+              </a:rPr>
+              <a:t>111111</a:t>
+            </a:r>
             <a:pPr indent="0" marL="0">
               <a:buNone/>
             </a:pPr>
             <a:r>
               <a:rPr lang="en-US" sz="1100" dirty="0">
                 <a:solidFill>
+                  <a:srgbClr val="9A6310"/>
+                </a:solidFill>
+                <a:latin typeface="Arial" pitchFamily="34" charset="0"/>
+                <a:ea typeface="Arial" pitchFamily="34" charset="-122"/>
+                <a:cs typeface="Arial" pitchFamily="34" charset="-120"/>
+              </a:rPr>
+              <a:t>00</a:t>
+            </a:r>
+            <a:endParaRPr lang="en-US" sz="1100" dirty="0"/>
+          </a:p>
+        </p:txBody>
+      </p:sp>
+      <p:sp>
+        <p:nvSpPr>
+          <p:cNvPr id="42" name="Text 40"/>
+          <p:cNvSpPr/>
+          <p:nvPr/>
+        </p:nvSpPr>
+        <p:spPr>
+          <a:xfrm>
+            <a:off x="4407408" y="3849624"/>
+            <a:ext cx="1691640" cy="283464"/>
+          </a:xfrm>
+          <a:prstGeom prst="rect">
+            <a:avLst/>
+          </a:prstGeom>
+          <a:noFill/>
+          <a:ln/>
+        </p:spPr>
+        <p:txBody>
+          <a:bodyPr wrap="square" lIns="0" tIns="0" rIns="0" bIns="0" rtlCol="0" anchor="ctr"/>
+          <a:lstStyle/>
+          <a:p>
+            <a:pPr indent="0" marL="0">
+              <a:buNone/>
+            </a:pPr>
+            <a:r>
+              <a:rPr lang="en-US" sz="1100" dirty="0">
+                <a:solidFill>
                   <a:srgbClr val="434A63"/>
                 </a:solidFill>
                 <a:latin typeface="Arial" pitchFamily="34" charset="0"/>
@@ -14978,7 +15374,7 @@
       </p:sp>
       <p:sp>
         <p:nvSpPr>
-          <p:cNvPr id="35" name="Text 33"/>
+          <p:cNvPr id="43" name="Text 41"/>
           <p:cNvSpPr/>
           <p:nvPr/>
         </p:nvSpPr>
@@ -15017,7 +15413,7 @@
       </p:sp>
       <p:pic>
         <p:nvPicPr>
-          <p:cNvPr id="36" name="Image 0" descr="/Users/jacobmenge/Desktop/kurs-26.2b-orga/folienwerkstatt/assets/diagramme/praefix-balken.png">    </p:cNvPr>
+          <p:cNvPr id="44" name="Image 0" descr="/Users/jacobmenge/Desktop/kurs-26.2b-orga/folienwerkstatt/assets/diagramme/praefix-balken.png">    </p:cNvPr>
           <p:cNvPicPr>
             <a:picLocks noChangeAspect="1"/>
           </p:cNvPicPr>
@@ -15041,7 +15437,7 @@
       </p:pic>
       <p:sp>
         <p:nvSpPr>
-          <p:cNvPr id="37" name="Shape 34"/>
+          <p:cNvPr id="45" name="Shape 42"/>
           <p:cNvSpPr/>
           <p:nvPr/>
         </p:nvSpPr>
@@ -15061,7 +15457,7 @@
       </p:sp>
       <p:sp>
         <p:nvSpPr>
-          <p:cNvPr id="38" name="Text 35"/>
+          <p:cNvPr id="46" name="Text 43"/>
           <p:cNvSpPr/>
           <p:nvPr/>
         </p:nvSpPr>
@@ -15100,7 +15496,7 @@
       </p:sp>
       <p:sp>
         <p:nvSpPr>
-          <p:cNvPr id="39" name="Shape 36"/>
+          <p:cNvPr id="47" name="Shape 44"/>
           <p:cNvSpPr/>
           <p:nvPr/>
         </p:nvSpPr>
@@ -15123,7 +15519,7 @@
       </p:sp>
       <p:sp>
         <p:nvSpPr>
-          <p:cNvPr id="40" name="Text 37"/>
+          <p:cNvPr id="48" name="Text 45"/>
           <p:cNvSpPr/>
           <p:nvPr/>
         </p:nvSpPr>
@@ -15162,7 +15558,7 @@
       </p:sp>
       <p:sp>
         <p:nvSpPr>
-          <p:cNvPr id="41" name="Text 38"/>
+          <p:cNvPr id="49" name="Text 46"/>
           <p:cNvSpPr/>
           <p:nvPr/>
         </p:nvSpPr>

--- a/folien/02-adressierung-subnetting-parallelkurs.pptx
+++ b/folien/02-adressierung-subnetting-parallelkurs.pptx
@@ -4034,8 +4034,8 @@
         </p:blipFill>
         <p:spPr>
           <a:xfrm>
-            <a:off x="566928" y="1536192"/>
-            <a:ext cx="8010144" cy="2468880"/>
+            <a:off x="566928" y="1426464"/>
+            <a:ext cx="8010144" cy="2743200"/>
           </a:xfrm>
           <a:prstGeom prst="rect">
             <a:avLst/>
@@ -4050,7 +4050,7 @@
         </p:nvSpPr>
         <p:spPr>
           <a:xfrm>
-            <a:off x="566928" y="4206240"/>
+            <a:off x="566928" y="4288536"/>
             <a:ext cx="32004" cy="256032"/>
           </a:xfrm>
           <a:prstGeom prst="rect">
@@ -4070,7 +4070,7 @@
         </p:nvSpPr>
         <p:spPr>
           <a:xfrm>
-            <a:off x="749808" y="4160520"/>
+            <a:off x="749808" y="4242816"/>
             <a:ext cx="7827264" cy="402336"/>
           </a:xfrm>
           <a:prstGeom prst="rect">
@@ -4672,7 +4672,7 @@
       </p:pic>
       <p:pic>
         <p:nvPicPr>
-          <p:cNvPr id="6" name="Image 1" descr="/Users/jacobmenge/Desktop/kurs-26.2b-orga/folienwerkstatt/assets/diagramme/block-strahl.png">    </p:cNvPr>
+          <p:cNvPr id="6" name="Image 1" descr="/Users/jacobmenge/Desktop/kurs-26.2b-orga/folienwerkstatt/assets/diagramme/loesungsweg-a.png">    </p:cNvPr>
           <p:cNvPicPr>
             <a:picLocks noChangeAspect="1"/>
           </p:cNvPicPr>
@@ -4686,8 +4686,8 @@
         </p:blipFill>
         <p:spPr>
           <a:xfrm>
-            <a:off x="566928" y="3200400"/>
-            <a:ext cx="8010144" cy="1115568"/>
+            <a:off x="566928" y="3310128"/>
+            <a:ext cx="8010144" cy="877824"/>
           </a:xfrm>
           <a:prstGeom prst="rect">
             <a:avLst/>
@@ -5255,7 +5255,7 @@
         </p:blipFill>
         <p:spPr>
           <a:xfrm>
-            <a:off x="566928" y="1874520"/>
+            <a:off x="566928" y="1572768"/>
             <a:ext cx="8010144" cy="1536192"/>
           </a:xfrm>
           <a:prstGeom prst="rect">
@@ -5263,68 +5263,33 @@
           </a:prstGeom>
         </p:spPr>
       </p:pic>
-      <p:sp>
-        <p:nvSpPr>
-          <p:cNvPr id="6" name="Shape 3"/>
-          <p:cNvSpPr/>
-          <p:nvPr/>
-        </p:nvSpPr>
-        <p:spPr>
-          <a:xfrm>
-            <a:off x="566928" y="4160520"/>
-            <a:ext cx="32004" cy="256032"/>
-          </a:xfrm>
-          <a:prstGeom prst="rect">
-            <a:avLst/>
-          </a:prstGeom>
-          <a:solidFill>
-            <a:srgbClr val="0F7C86"/>
-          </a:solidFill>
-          <a:ln/>
-        </p:spPr>
-      </p:sp>
-      <p:sp>
-        <p:nvSpPr>
-          <p:cNvPr id="7" name="Text 4"/>
-          <p:cNvSpPr/>
-          <p:nvPr/>
-        </p:nvSpPr>
-        <p:spPr>
-          <a:xfrm>
-            <a:off x="749808" y="4114800"/>
-            <a:ext cx="7827264" cy="402336"/>
-          </a:xfrm>
-          <a:prstGeom prst="rect">
-            <a:avLst/>
-          </a:prstGeom>
-          <a:noFill/>
-          <a:ln/>
-        </p:spPr>
-        <p:txBody>
-          <a:bodyPr wrap="square" lIns="0" tIns="0" rIns="0" bIns="0" rtlCol="0" anchor="ctr"/>
-          <a:lstStyle/>
-          <a:p>
-            <a:pPr indent="0" marL="0">
-              <a:buNone/>
-            </a:pPr>
-            <a:r>
-              <a:rPr lang="en-US" sz="1200" b="1" dirty="0">
-                <a:solidFill>
-                  <a:srgbClr val="5C6377"/>
-                </a:solidFill>
-                <a:latin typeface="Arial" pitchFamily="34" charset="0"/>
-                <a:ea typeface="Arial" pitchFamily="34" charset="-122"/>
-                <a:cs typeface="Arial" pitchFamily="34" charset="-120"/>
-              </a:rPr>
-              <a:t>Das Rezept: Hostbits → Blockgröße → Block finden → minus zwei.</a:t>
-            </a:r>
-            <a:endParaRPr lang="en-US" sz="1200" dirty="0"/>
-          </a:p>
-        </p:txBody>
-      </p:sp>
-      <p:sp>
-        <p:nvSpPr>
-          <p:cNvPr id="8" name="Shape 5"/>
+      <p:pic>
+        <p:nvPicPr>
+          <p:cNvPr id="6" name="Image 1" descr="/Users/jacobmenge/Desktop/kurs-26.2b-orga/folienwerkstatt/assets/diagramme/loesungsweg-b.png">    </p:cNvPr>
+          <p:cNvPicPr>
+            <a:picLocks noChangeAspect="1"/>
+          </p:cNvPicPr>
+          <p:nvPr/>
+        </p:nvPicPr>
+        <p:blipFill>
+          <a:blip r:embed="rId2"/>
+          <a:stretch>
+            <a:fillRect/>
+          </a:stretch>
+        </p:blipFill>
+        <p:spPr>
+          <a:xfrm>
+            <a:off x="566928" y="3310128"/>
+            <a:ext cx="8010144" cy="877824"/>
+          </a:xfrm>
+          <a:prstGeom prst="rect">
+            <a:avLst/>
+          </a:prstGeom>
+        </p:spPr>
+      </p:pic>
+      <p:sp>
+        <p:nvSpPr>
+          <p:cNvPr id="7" name="Shape 3"/>
           <p:cNvSpPr/>
           <p:nvPr/>
         </p:nvSpPr>
@@ -5347,7 +5312,7 @@
       </p:sp>
       <p:sp>
         <p:nvSpPr>
-          <p:cNvPr id="9" name="Text 6"/>
+          <p:cNvPr id="8" name="Text 4"/>
           <p:cNvSpPr/>
           <p:nvPr/>
         </p:nvSpPr>
@@ -5386,7 +5351,7 @@
       </p:sp>
       <p:sp>
         <p:nvSpPr>
-          <p:cNvPr id="10" name="Text 7"/>
+          <p:cNvPr id="9" name="Text 5"/>
           <p:cNvSpPr/>
           <p:nvPr/>
         </p:nvSpPr>
@@ -5883,7 +5848,7 @@
         </p:blipFill>
         <p:spPr>
           <a:xfrm>
-            <a:off x="566928" y="1874520"/>
+            <a:off x="566928" y="1572768"/>
             <a:ext cx="8010144" cy="1536192"/>
           </a:xfrm>
           <a:prstGeom prst="rect">
@@ -5891,68 +5856,33 @@
           </a:prstGeom>
         </p:spPr>
       </p:pic>
-      <p:sp>
-        <p:nvSpPr>
-          <p:cNvPr id="6" name="Shape 3"/>
-          <p:cNvSpPr/>
-          <p:nvPr/>
-        </p:nvSpPr>
-        <p:spPr>
-          <a:xfrm>
-            <a:off x="566928" y="4160520"/>
-            <a:ext cx="32004" cy="256032"/>
-          </a:xfrm>
-          <a:prstGeom prst="rect">
-            <a:avLst/>
-          </a:prstGeom>
-          <a:solidFill>
-            <a:srgbClr val="0F7C86"/>
-          </a:solidFill>
-          <a:ln/>
-        </p:spPr>
-      </p:sp>
-      <p:sp>
-        <p:nvSpPr>
-          <p:cNvPr id="7" name="Text 4"/>
-          <p:cNvSpPr/>
-          <p:nvPr/>
-        </p:nvSpPr>
-        <p:spPr>
-          <a:xfrm>
-            <a:off x="749808" y="4114800"/>
-            <a:ext cx="7827264" cy="402336"/>
-          </a:xfrm>
-          <a:prstGeom prst="rect">
-            <a:avLst/>
-          </a:prstGeom>
-          <a:noFill/>
-          <a:ln/>
-        </p:spPr>
-        <p:txBody>
-          <a:bodyPr wrap="square" lIns="0" tIns="0" rIns="0" bIns="0" rtlCol="0" anchor="ctr"/>
-          <a:lstStyle/>
-          <a:p>
-            <a:pPr indent="0" marL="0">
-              <a:buNone/>
-            </a:pPr>
-            <a:r>
-              <a:rPr lang="en-US" sz="1200" b="1" dirty="0">
-                <a:solidFill>
-                  <a:srgbClr val="5C6377"/>
-                </a:solidFill>
-                <a:latin typeface="Arial" pitchFamily="34" charset="0"/>
-                <a:ea typeface="Arial" pitchFamily="34" charset="-122"/>
-                <a:cs typeface="Arial" pitchFamily="34" charset="-120"/>
-              </a:rPr>
-              <a:t>Das Rezept: Hostbits → Blockgröße → Block finden → minus zwei.</a:t>
-            </a:r>
-            <a:endParaRPr lang="en-US" sz="1200" dirty="0"/>
-          </a:p>
-        </p:txBody>
-      </p:sp>
-      <p:sp>
-        <p:nvSpPr>
-          <p:cNvPr id="8" name="Shape 5"/>
+      <p:pic>
+        <p:nvPicPr>
+          <p:cNvPr id="6" name="Image 1" descr="/Users/jacobmenge/Desktop/kurs-26.2b-orga/folienwerkstatt/assets/diagramme/loesungsweg-c.png">    </p:cNvPr>
+          <p:cNvPicPr>
+            <a:picLocks noChangeAspect="1"/>
+          </p:cNvPicPr>
+          <p:nvPr/>
+        </p:nvPicPr>
+        <p:blipFill>
+          <a:blip r:embed="rId2"/>
+          <a:stretch>
+            <a:fillRect/>
+          </a:stretch>
+        </p:blipFill>
+        <p:spPr>
+          <a:xfrm>
+            <a:off x="566928" y="3310128"/>
+            <a:ext cx="8010144" cy="877824"/>
+          </a:xfrm>
+          <a:prstGeom prst="rect">
+            <a:avLst/>
+          </a:prstGeom>
+        </p:spPr>
+      </p:pic>
+      <p:sp>
+        <p:nvSpPr>
+          <p:cNvPr id="7" name="Shape 3"/>
           <p:cNvSpPr/>
           <p:nvPr/>
         </p:nvSpPr>
@@ -5975,7 +5905,7 @@
       </p:sp>
       <p:sp>
         <p:nvSpPr>
-          <p:cNvPr id="9" name="Text 6"/>
+          <p:cNvPr id="8" name="Text 4"/>
           <p:cNvSpPr/>
           <p:nvPr/>
         </p:nvSpPr>
@@ -6014,7 +5944,7 @@
       </p:sp>
       <p:sp>
         <p:nvSpPr>
-          <p:cNvPr id="10" name="Text 7"/>
+          <p:cNvPr id="9" name="Text 5"/>
           <p:cNvSpPr/>
           <p:nvPr/>
         </p:nvSpPr>

--- a/folien/02-adressierung-subnetting-parallelkurs.pptx
+++ b/folien/02-adressierung-subnetting-parallelkurs.pptx
@@ -11190,7 +11190,7 @@
         </p:nvSpPr>
         <p:spPr>
           <a:xfrm>
-            <a:off x="658368" y="1737360"/>
+            <a:off x="658368" y="1627632"/>
             <a:ext cx="1554480" cy="274320"/>
           </a:xfrm>
           <a:prstGeom prst="rect">
@@ -11229,7 +11229,7 @@
         </p:nvSpPr>
         <p:spPr>
           <a:xfrm>
-            <a:off x="2395728" y="1737360"/>
+            <a:off x="2395728" y="1627632"/>
             <a:ext cx="731520" cy="274320"/>
           </a:xfrm>
           <a:prstGeom prst="rect">
@@ -11268,7 +11268,7 @@
         </p:nvSpPr>
         <p:spPr>
           <a:xfrm>
-            <a:off x="3310128" y="1737360"/>
+            <a:off x="3310128" y="1627632"/>
             <a:ext cx="5175504" cy="274320"/>
           </a:xfrm>
           <a:prstGeom prst="rect">
@@ -11307,7 +11307,7 @@
         </p:nvSpPr>
         <p:spPr>
           <a:xfrm>
-            <a:off x="566928" y="2029968"/>
+            <a:off x="566928" y="1920240"/>
             <a:ext cx="8010144" cy="0"/>
           </a:xfrm>
           <a:prstGeom prst="line">
@@ -11330,8 +11330,8 @@
         </p:nvSpPr>
         <p:spPr>
           <a:xfrm>
-            <a:off x="475488" y="2103120"/>
-            <a:ext cx="8193024" cy="365760"/>
+            <a:off x="475488" y="1993392"/>
+            <a:ext cx="8193024" cy="310896"/>
           </a:xfrm>
           <a:prstGeom prst="rect">
             <a:avLst/>
@@ -11350,8 +11350,8 @@
         </p:nvSpPr>
         <p:spPr>
           <a:xfrm>
-            <a:off x="658368" y="2103120"/>
-            <a:ext cx="1554480" cy="365760"/>
+            <a:off x="658368" y="1993392"/>
+            <a:ext cx="1554480" cy="310896"/>
           </a:xfrm>
           <a:prstGeom prst="rect">
             <a:avLst/>
@@ -11389,8 +11389,8 @@
         </p:nvSpPr>
         <p:spPr>
           <a:xfrm>
-            <a:off x="2395728" y="2103120"/>
-            <a:ext cx="731520" cy="365760"/>
+            <a:off x="2395728" y="1993392"/>
+            <a:ext cx="731520" cy="310896"/>
           </a:xfrm>
           <a:prstGeom prst="rect">
             <a:avLst/>
@@ -11428,8 +11428,8 @@
         </p:nvSpPr>
         <p:spPr>
           <a:xfrm>
-            <a:off x="3310128" y="2103120"/>
-            <a:ext cx="5175504" cy="365760"/>
+            <a:off x="3310128" y="1993392"/>
+            <a:ext cx="5175504" cy="310896"/>
           </a:xfrm>
           <a:prstGeom prst="rect">
             <a:avLst/>
@@ -11467,8 +11467,8 @@
         </p:nvSpPr>
         <p:spPr>
           <a:xfrm>
-            <a:off x="658368" y="2468880"/>
-            <a:ext cx="1554480" cy="365760"/>
+            <a:off x="658368" y="2304288"/>
+            <a:ext cx="1554480" cy="310896"/>
           </a:xfrm>
           <a:prstGeom prst="rect">
             <a:avLst/>
@@ -11506,8 +11506,8 @@
         </p:nvSpPr>
         <p:spPr>
           <a:xfrm>
-            <a:off x="2395728" y="2468880"/>
-            <a:ext cx="731520" cy="365760"/>
+            <a:off x="2395728" y="2304288"/>
+            <a:ext cx="731520" cy="310896"/>
           </a:xfrm>
           <a:prstGeom prst="rect">
             <a:avLst/>
@@ -11545,8 +11545,8 @@
         </p:nvSpPr>
         <p:spPr>
           <a:xfrm>
-            <a:off x="3310128" y="2468880"/>
-            <a:ext cx="5175504" cy="365760"/>
+            <a:off x="3310128" y="2304288"/>
+            <a:ext cx="5175504" cy="310896"/>
           </a:xfrm>
           <a:prstGeom prst="rect">
             <a:avLst/>
@@ -11584,8 +11584,8 @@
         </p:nvSpPr>
         <p:spPr>
           <a:xfrm>
-            <a:off x="475488" y="2834640"/>
-            <a:ext cx="8193024" cy="365760"/>
+            <a:off x="475488" y="2615184"/>
+            <a:ext cx="8193024" cy="310896"/>
           </a:xfrm>
           <a:prstGeom prst="rect">
             <a:avLst/>
@@ -11604,8 +11604,8 @@
         </p:nvSpPr>
         <p:spPr>
           <a:xfrm>
-            <a:off x="658368" y="2834640"/>
-            <a:ext cx="1554480" cy="365760"/>
+            <a:off x="658368" y="2615184"/>
+            <a:ext cx="1554480" cy="310896"/>
           </a:xfrm>
           <a:prstGeom prst="rect">
             <a:avLst/>
@@ -11643,8 +11643,8 @@
         </p:nvSpPr>
         <p:spPr>
           <a:xfrm>
-            <a:off x="2395728" y="2834640"/>
-            <a:ext cx="731520" cy="365760"/>
+            <a:off x="2395728" y="2615184"/>
+            <a:ext cx="731520" cy="310896"/>
           </a:xfrm>
           <a:prstGeom prst="rect">
             <a:avLst/>
@@ -11682,8 +11682,8 @@
         </p:nvSpPr>
         <p:spPr>
           <a:xfrm>
-            <a:off x="3310128" y="2834640"/>
-            <a:ext cx="5175504" cy="365760"/>
+            <a:off x="3310128" y="2615184"/>
+            <a:ext cx="5175504" cy="310896"/>
           </a:xfrm>
           <a:prstGeom prst="rect">
             <a:avLst/>
@@ -11721,8 +11721,8 @@
         </p:nvSpPr>
         <p:spPr>
           <a:xfrm>
-            <a:off x="658368" y="3200400"/>
-            <a:ext cx="1554480" cy="365760"/>
+            <a:off x="658368" y="2926080"/>
+            <a:ext cx="1554480" cy="310896"/>
           </a:xfrm>
           <a:prstGeom prst="rect">
             <a:avLst/>
@@ -11760,8 +11760,8 @@
         </p:nvSpPr>
         <p:spPr>
           <a:xfrm>
-            <a:off x="2395728" y="3200400"/>
-            <a:ext cx="731520" cy="365760"/>
+            <a:off x="2395728" y="2926080"/>
+            <a:ext cx="731520" cy="310896"/>
           </a:xfrm>
           <a:prstGeom prst="rect">
             <a:avLst/>
@@ -11799,8 +11799,8 @@
         </p:nvSpPr>
         <p:spPr>
           <a:xfrm>
-            <a:off x="3310128" y="3200400"/>
-            <a:ext cx="5175504" cy="365760"/>
+            <a:off x="3310128" y="2926080"/>
+            <a:ext cx="5175504" cy="310896"/>
           </a:xfrm>
           <a:prstGeom prst="rect">
             <a:avLst/>
@@ -11830,152 +11830,39 @@
           </a:p>
         </p:txBody>
       </p:sp>
-      <p:sp>
-        <p:nvSpPr>
-          <p:cNvPr id="23" name="Shape 21"/>
-          <p:cNvSpPr/>
-          <p:nvPr/>
-        </p:nvSpPr>
-        <p:spPr>
-          <a:xfrm>
-            <a:off x="475488" y="3566160"/>
-            <a:ext cx="8193024" cy="365760"/>
-          </a:xfrm>
-          <a:prstGeom prst="rect">
-            <a:avLst/>
-          </a:prstGeom>
-          <a:solidFill>
-            <a:srgbClr val="F5F6FC"/>
-          </a:solidFill>
-          <a:ln/>
-        </p:spPr>
-      </p:sp>
-      <p:sp>
-        <p:nvSpPr>
-          <p:cNvPr id="24" name="Text 22"/>
-          <p:cNvSpPr/>
-          <p:nvPr/>
-        </p:nvSpPr>
-        <p:spPr>
-          <a:xfrm>
-            <a:off x="658368" y="3566160"/>
-            <a:ext cx="1554480" cy="365760"/>
-          </a:xfrm>
-          <a:prstGeom prst="rect">
-            <a:avLst/>
-          </a:prstGeom>
-          <a:noFill/>
-          <a:ln/>
-        </p:spPr>
-        <p:txBody>
-          <a:bodyPr wrap="square" lIns="0" tIns="0" rIns="0" bIns="0" rtlCol="0" anchor="ctr"/>
-          <a:lstStyle/>
-          <a:p>
-            <a:pPr indent="0" marL="0">
-              <a:buNone/>
-            </a:pPr>
-            <a:r>
-              <a:rPr lang="en-US" sz="1150" b="1" dirty="0">
-                <a:solidFill>
-                  <a:srgbClr val="272E52"/>
-                </a:solidFill>
-                <a:latin typeface="Arial" pitchFamily="34" charset="0"/>
-                <a:ea typeface="Arial" pitchFamily="34" charset="-122"/>
-                <a:cs typeface="Arial" pitchFamily="34" charset="-120"/>
-              </a:rPr>
-              <a:t>Reserve</a:t>
-            </a:r>
-            <a:endParaRPr lang="en-US" sz="1150" dirty="0"/>
-          </a:p>
-        </p:txBody>
-      </p:sp>
-      <p:sp>
-        <p:nvSpPr>
-          <p:cNvPr id="25" name="Text 23"/>
-          <p:cNvSpPr/>
-          <p:nvPr/>
-        </p:nvSpPr>
-        <p:spPr>
-          <a:xfrm>
-            <a:off x="2395728" y="3566160"/>
-            <a:ext cx="731520" cy="365760"/>
-          </a:xfrm>
-          <a:prstGeom prst="rect">
-            <a:avLst/>
-          </a:prstGeom>
-          <a:noFill/>
-          <a:ln/>
-        </p:spPr>
-        <p:txBody>
-          <a:bodyPr wrap="square" lIns="0" tIns="0" rIns="0" bIns="0" rtlCol="0" anchor="ctr"/>
-          <a:lstStyle/>
-          <a:p>
-            <a:pPr indent="0" marL="0">
-              <a:buNone/>
-            </a:pPr>
-            <a:r>
-              <a:rPr lang="en-US" sz="1150" dirty="0">
-                <a:solidFill>
-                  <a:srgbClr val="434A63"/>
-                </a:solidFill>
-                <a:latin typeface="Arial" pitchFamily="34" charset="0"/>
-                <a:ea typeface="Arial" pitchFamily="34" charset="-122"/>
-                <a:cs typeface="Arial" pitchFamily="34" charset="-120"/>
-              </a:rPr>
-              <a:t>–</a:t>
-            </a:r>
-            <a:endParaRPr lang="en-US" sz="1150" dirty="0"/>
-          </a:p>
-        </p:txBody>
-      </p:sp>
-      <p:sp>
-        <p:nvSpPr>
-          <p:cNvPr id="26" name="Text 24"/>
-          <p:cNvSpPr/>
-          <p:nvPr/>
-        </p:nvSpPr>
-        <p:spPr>
-          <a:xfrm>
-            <a:off x="3310128" y="3566160"/>
-            <a:ext cx="5175504" cy="365760"/>
-          </a:xfrm>
-          <a:prstGeom prst="rect">
-            <a:avLst/>
-          </a:prstGeom>
-          <a:noFill/>
-          <a:ln/>
-        </p:spPr>
-        <p:txBody>
-          <a:bodyPr wrap="square" lIns="0" tIns="0" rIns="0" bIns="0" rtlCol="0" anchor="ctr"/>
-          <a:lstStyle/>
-          <a:p>
-            <a:pPr indent="0" marL="0">
-              <a:buNone/>
-            </a:pPr>
-            <a:r>
-              <a:rPr lang="en-US" sz="1150" dirty="0">
-                <a:solidFill>
-                  <a:srgbClr val="434A63"/>
-                </a:solidFill>
-                <a:latin typeface="Arial" pitchFamily="34" charset="0"/>
-                <a:ea typeface="Arial" pitchFamily="34" charset="-122"/>
-                <a:cs typeface="Arial" pitchFamily="34" charset="-120"/>
-              </a:rPr>
-              <a:t>.240 bis .255 bleiben frei – Platz zum Wachsen</a:t>
-            </a:r>
-            <a:endParaRPr lang="en-US" sz="1150" dirty="0"/>
-          </a:p>
-        </p:txBody>
-      </p:sp>
-      <p:sp>
-        <p:nvSpPr>
-          <p:cNvPr id="27" name="Shape 25"/>
-          <p:cNvSpPr/>
-          <p:nvPr/>
-        </p:nvSpPr>
-        <p:spPr>
-          <a:xfrm>
-            <a:off x="566928" y="4160520"/>
+      <p:pic>
+        <p:nvPicPr>
+          <p:cNvPr id="23" name="Image 0" descr="/Users/jacobmenge/Desktop/kurs-26.2b-orga/folienwerkstatt/assets/diagramme/subnetz-plan.png">    </p:cNvPr>
+          <p:cNvPicPr>
+            <a:picLocks noChangeAspect="1"/>
+          </p:cNvPicPr>
+          <p:nvPr/>
+        </p:nvPicPr>
+        <p:blipFill>
+          <a:blip r:embed="rId1"/>
+          <a:stretch>
+            <a:fillRect/>
+          </a:stretch>
+        </p:blipFill>
+        <p:spPr>
+          <a:xfrm>
+            <a:off x="566928" y="3364992"/>
+            <a:ext cx="8010144" cy="777240"/>
+          </a:xfrm>
+          <a:prstGeom prst="rect">
+            <a:avLst/>
+          </a:prstGeom>
+        </p:spPr>
+      </p:pic>
+      <p:sp>
+        <p:nvSpPr>
+          <p:cNvPr id="24" name="Shape 21"/>
+          <p:cNvSpPr/>
+          <p:nvPr/>
+        </p:nvSpPr>
+        <p:spPr>
+          <a:xfrm>
+            <a:off x="566928" y="4288536"/>
             <a:ext cx="32004" cy="256032"/>
           </a:xfrm>
           <a:prstGeom prst="rect">
@@ -11989,13 +11876,13 @@
       </p:sp>
       <p:sp>
         <p:nvSpPr>
-          <p:cNvPr id="28" name="Text 26"/>
-          <p:cNvSpPr/>
-          <p:nvPr/>
-        </p:nvSpPr>
-        <p:spPr>
-          <a:xfrm>
-            <a:off x="749808" y="4114800"/>
+          <p:cNvPr id="25" name="Text 22"/>
+          <p:cNvSpPr/>
+          <p:nvPr/>
+        </p:nvSpPr>
+        <p:spPr>
+          <a:xfrm>
+            <a:off x="749808" y="4242816"/>
             <a:ext cx="7827264" cy="402336"/>
           </a:xfrm>
           <a:prstGeom prst="rect">
@@ -12020,7 +11907,7 @@
                 <a:ea typeface="Arial" pitchFamily="34" charset="-122"/>
                 <a:cs typeface="Arial" pitchFamily="34" charset="-120"/>
               </a:rPr>
-              <a:t>Größte zuerst vermeidet Lücken. Probe: 128 + 64 + 32 + 16 = 240 ≤ 256 – passt.</a:t>
+              <a:t>Größte zuerst vermeidet Lücken. Probe: 128 + 64 + 32 + 16 = 240 ≤ 256 – der Rest bleibt Reserve.</a:t>
             </a:r>
             <a:endParaRPr lang="en-US" sz="1200" dirty="0"/>
           </a:p>
@@ -12028,7 +11915,7 @@
       </p:sp>
       <p:sp>
         <p:nvSpPr>
-          <p:cNvPr id="29" name="Shape 27"/>
+          <p:cNvPr id="26" name="Shape 23"/>
           <p:cNvSpPr/>
           <p:nvPr/>
         </p:nvSpPr>
@@ -12051,7 +11938,7 @@
       </p:sp>
       <p:sp>
         <p:nvSpPr>
-          <p:cNvPr id="30" name="Text 28"/>
+          <p:cNvPr id="27" name="Text 24"/>
           <p:cNvSpPr/>
           <p:nvPr/>
         </p:nvSpPr>
@@ -12090,7 +11977,7 @@
       </p:sp>
       <p:sp>
         <p:nvSpPr>
-          <p:cNvPr id="31" name="Text 29"/>
+          <p:cNvPr id="28" name="Text 25"/>
           <p:cNvSpPr/>
           <p:nvPr/>
         </p:nvSpPr>
